--- a/analise/LLM_Model_Log_Analysis_New.pptx
+++ b/analise/LLM_Model_Log_Analysis_New.pptx
@@ -6,16 +6,18 @@
   </p:sldMasterIdLst>
   <p:sldIdLst>
     <p:sldId id="256" r:id="rId5"/>
-    <p:sldId id="257" r:id="rId6"/>
-    <p:sldId id="258" r:id="rId7"/>
+    <p:sldId id="271" r:id="rId6"/>
+    <p:sldId id="268" r:id="rId7"/>
     <p:sldId id="260" r:id="rId8"/>
     <p:sldId id="261" r:id="rId9"/>
-    <p:sldId id="262" r:id="rId10"/>
-    <p:sldId id="263" r:id="rId11"/>
-    <p:sldId id="264" r:id="rId12"/>
-    <p:sldId id="265" r:id="rId13"/>
-    <p:sldId id="266" r:id="rId14"/>
-    <p:sldId id="267" r:id="rId15"/>
+    <p:sldId id="269" r:id="rId10"/>
+    <p:sldId id="262" r:id="rId11"/>
+    <p:sldId id="263" r:id="rId12"/>
+    <p:sldId id="270" r:id="rId13"/>
+    <p:sldId id="264" r:id="rId14"/>
+    <p:sldId id="265" r:id="rId15"/>
+    <p:sldId id="266" r:id="rId16"/>
+    <p:sldId id="267" r:id="rId17"/>
   </p:sldIdLst>
   <p:sldSz cx="12192000" cy="6858000"/>
   <p:notesSz cx="6858000" cy="9144000"/>
@@ -184,7 +186,7 @@
             </a:r>
             <a:r>
               <a:rPr lang="pt-PT" noProof="0" dirty="0"/>
-              <a:t> - gpt-oss:120b (Depois)</a:t>
+              <a:t> - deepseek-r1:8b (Antes)</a:t>
             </a:r>
           </a:p>
         </c:rich>
@@ -302,21 +304,12 @@
               <c:numCache>
                 <c:formatCode>General</c:formatCode>
                 <c:ptCount val="3"/>
-                <c:pt idx="0">
-                  <c:v>20</c:v>
-                </c:pt>
-                <c:pt idx="1">
-                  <c:v>4</c:v>
-                </c:pt>
-                <c:pt idx="2">
-                  <c:v>52</c:v>
-                </c:pt>
               </c:numCache>
             </c:numRef>
           </c:val>
           <c:extLst>
             <c:ext xmlns:c16="http://schemas.microsoft.com/office/drawing/2014/chart" uri="{C3380CC4-5D6E-409C-BE32-E72D297353CC}">
-              <c16:uniqueId val="{00000000-F9FB-4755-AE5D-4A8E50E0869D}"/>
+              <c16:uniqueId val="{00000000-C76C-4CFA-ADFE-5221D56D0E93}"/>
             </c:ext>
           </c:extLst>
         </c:ser>
@@ -397,21 +390,12 @@
               <c:numCache>
                 <c:formatCode>General</c:formatCode>
                 <c:ptCount val="3"/>
-                <c:pt idx="0">
-                  <c:v>20</c:v>
-                </c:pt>
-                <c:pt idx="1">
-                  <c:v>4</c:v>
-                </c:pt>
-                <c:pt idx="2">
-                  <c:v>12</c:v>
-                </c:pt>
               </c:numCache>
             </c:numRef>
           </c:val>
           <c:extLst>
             <c:ext xmlns:c16="http://schemas.microsoft.com/office/drawing/2014/chart" uri="{C3380CC4-5D6E-409C-BE32-E72D297353CC}">
-              <c16:uniqueId val="{00000001-F9FB-4755-AE5D-4A8E50E0869D}"/>
+              <c16:uniqueId val="{00000001-C76C-4CFA-ADFE-5221D56D0E93}"/>
             </c:ext>
           </c:extLst>
         </c:ser>
@@ -492,21 +476,12 @@
               <c:numCache>
                 <c:formatCode>General</c:formatCode>
                 <c:ptCount val="3"/>
-                <c:pt idx="0">
-                  <c:v>20</c:v>
-                </c:pt>
-                <c:pt idx="1">
-                  <c:v>48</c:v>
-                </c:pt>
-                <c:pt idx="2">
-                  <c:v>12</c:v>
-                </c:pt>
               </c:numCache>
             </c:numRef>
           </c:val>
           <c:extLst>
             <c:ext xmlns:c16="http://schemas.microsoft.com/office/drawing/2014/chart" uri="{C3380CC4-5D6E-409C-BE32-E72D297353CC}">
-              <c16:uniqueId val="{00000002-F9FB-4755-AE5D-4A8E50E0869D}"/>
+              <c16:uniqueId val="{00000002-C76C-4CFA-ADFE-5221D56D0E93}"/>
             </c:ext>
           </c:extLst>
         </c:ser>
@@ -587,21 +562,12 @@
               <c:numCache>
                 <c:formatCode>General</c:formatCode>
                 <c:ptCount val="3"/>
-                <c:pt idx="0">
-                  <c:v>20</c:v>
-                </c:pt>
-                <c:pt idx="1">
-                  <c:v>4</c:v>
-                </c:pt>
-                <c:pt idx="2">
-                  <c:v>12</c:v>
-                </c:pt>
               </c:numCache>
             </c:numRef>
           </c:val>
           <c:extLst>
             <c:ext xmlns:c16="http://schemas.microsoft.com/office/drawing/2014/chart" uri="{C3380CC4-5D6E-409C-BE32-E72D297353CC}">
-              <c16:uniqueId val="{00000003-F9FB-4755-AE5D-4A8E50E0869D}"/>
+              <c16:uniqueId val="{00000003-C76C-4CFA-ADFE-5221D56D0E93}"/>
             </c:ext>
           </c:extLst>
         </c:ser>
@@ -7663,7 +7629,7 @@
             </a:r>
             <a:r>
               <a:rPr lang="pt-PT" noProof="0" dirty="0"/>
-              <a:t> - gpt-oss:120b (Antes)</a:t>
+              <a:t> - deepseek-r1:8b (Depois)</a:t>
             </a:r>
           </a:p>
         </c:rich>
@@ -7784,15 +7750,18 @@
                 <c:pt idx="0">
                   <c:v>20</c:v>
                 </c:pt>
+                <c:pt idx="1">
+                  <c:v>4</c:v>
+                </c:pt>
                 <c:pt idx="2">
-                  <c:v>10</c:v>
+                  <c:v>12</c:v>
                 </c:pt>
               </c:numCache>
             </c:numRef>
           </c:val>
           <c:extLst>
             <c:ext xmlns:c16="http://schemas.microsoft.com/office/drawing/2014/chart" uri="{C3380CC4-5D6E-409C-BE32-E72D297353CC}">
-              <c16:uniqueId val="{00000000-B711-4A99-A04C-DF60721CB00A}"/>
+              <c16:uniqueId val="{00000000-53CE-4667-AAFE-94BF9D77E902}"/>
             </c:ext>
           </c:extLst>
         </c:ser>
@@ -7877,17 +7846,17 @@
                   <c:v>20</c:v>
                 </c:pt>
                 <c:pt idx="1">
-                  <c:v>0</c:v>
+                  <c:v>4</c:v>
                 </c:pt>
                 <c:pt idx="2">
-                  <c:v>6</c:v>
+                  <c:v>12</c:v>
                 </c:pt>
               </c:numCache>
             </c:numRef>
           </c:val>
           <c:extLst>
             <c:ext xmlns:c16="http://schemas.microsoft.com/office/drawing/2014/chart" uri="{C3380CC4-5D6E-409C-BE32-E72D297353CC}">
-              <c16:uniqueId val="{00000001-B711-4A99-A04C-DF60721CB00A}"/>
+              <c16:uniqueId val="{00000001-53CE-4667-AAFE-94BF9D77E902}"/>
             </c:ext>
           </c:extLst>
         </c:ser>
@@ -7971,12 +7940,18 @@
                 <c:pt idx="0">
                   <c:v>20</c:v>
                 </c:pt>
+                <c:pt idx="1">
+                  <c:v>4</c:v>
+                </c:pt>
+                <c:pt idx="2">
+                  <c:v>12</c:v>
+                </c:pt>
               </c:numCache>
             </c:numRef>
           </c:val>
           <c:extLst>
             <c:ext xmlns:c16="http://schemas.microsoft.com/office/drawing/2014/chart" uri="{C3380CC4-5D6E-409C-BE32-E72D297353CC}">
-              <c16:uniqueId val="{00000002-B711-4A99-A04C-DF60721CB00A}"/>
+              <c16:uniqueId val="{00000002-53CE-4667-AAFE-94BF9D77E902}"/>
             </c:ext>
           </c:extLst>
         </c:ser>
@@ -8060,15 +8035,18 @@
                 <c:pt idx="0">
                   <c:v>20</c:v>
                 </c:pt>
+                <c:pt idx="1">
+                  <c:v>4</c:v>
+                </c:pt>
                 <c:pt idx="2">
-                  <c:v>10</c:v>
+                  <c:v>12</c:v>
                 </c:pt>
               </c:numCache>
             </c:numRef>
           </c:val>
           <c:extLst>
             <c:ext xmlns:c16="http://schemas.microsoft.com/office/drawing/2014/chart" uri="{C3380CC4-5D6E-409C-BE32-E72D297353CC}">
-              <c16:uniqueId val="{00000003-B711-4A99-A04C-DF60721CB00A}"/>
+              <c16:uniqueId val="{00000003-53CE-4667-AAFE-94BF9D77E902}"/>
             </c:ext>
           </c:extLst>
         </c:ser>
@@ -11733,7 +11711,7 @@
             </a:r>
             <a:r>
               <a:rPr lang="pt-PT" noProof="0" dirty="0"/>
-              <a:t> - deepseek-r1:8b (Antes)</a:t>
+              <a:t> - gpt-oss:120b (Antes)</a:t>
             </a:r>
           </a:p>
         </c:rich>
@@ -11851,12 +11829,18 @@
               <c:numCache>
                 <c:formatCode>General</c:formatCode>
                 <c:ptCount val="3"/>
+                <c:pt idx="0">
+                  <c:v>20</c:v>
+                </c:pt>
+                <c:pt idx="2">
+                  <c:v>10</c:v>
+                </c:pt>
               </c:numCache>
             </c:numRef>
           </c:val>
           <c:extLst>
             <c:ext xmlns:c16="http://schemas.microsoft.com/office/drawing/2014/chart" uri="{C3380CC4-5D6E-409C-BE32-E72D297353CC}">
-              <c16:uniqueId val="{00000000-B17F-4F5C-BAB0-B345E20935D1}"/>
+              <c16:uniqueId val="{00000000-32F1-492E-BE01-917362E1C5ED}"/>
             </c:ext>
           </c:extLst>
         </c:ser>
@@ -11937,12 +11921,21 @@
               <c:numCache>
                 <c:formatCode>General</c:formatCode>
                 <c:ptCount val="3"/>
+                <c:pt idx="0">
+                  <c:v>20</c:v>
+                </c:pt>
+                <c:pt idx="1">
+                  <c:v>0</c:v>
+                </c:pt>
+                <c:pt idx="2">
+                  <c:v>6</c:v>
+                </c:pt>
               </c:numCache>
             </c:numRef>
           </c:val>
           <c:extLst>
             <c:ext xmlns:c16="http://schemas.microsoft.com/office/drawing/2014/chart" uri="{C3380CC4-5D6E-409C-BE32-E72D297353CC}">
-              <c16:uniqueId val="{00000001-B17F-4F5C-BAB0-B345E20935D1}"/>
+              <c16:uniqueId val="{00000001-32F1-492E-BE01-917362E1C5ED}"/>
             </c:ext>
           </c:extLst>
         </c:ser>
@@ -12023,12 +12016,15 @@
               <c:numCache>
                 <c:formatCode>General</c:formatCode>
                 <c:ptCount val="3"/>
+                <c:pt idx="0">
+                  <c:v>20</c:v>
+                </c:pt>
               </c:numCache>
             </c:numRef>
           </c:val>
           <c:extLst>
             <c:ext xmlns:c16="http://schemas.microsoft.com/office/drawing/2014/chart" uri="{C3380CC4-5D6E-409C-BE32-E72D297353CC}">
-              <c16:uniqueId val="{00000002-B17F-4F5C-BAB0-B345E20935D1}"/>
+              <c16:uniqueId val="{00000002-32F1-492E-BE01-917362E1C5ED}"/>
             </c:ext>
           </c:extLst>
         </c:ser>
@@ -12109,12 +12105,18 @@
               <c:numCache>
                 <c:formatCode>General</c:formatCode>
                 <c:ptCount val="3"/>
+                <c:pt idx="0">
+                  <c:v>20</c:v>
+                </c:pt>
+                <c:pt idx="2">
+                  <c:v>10</c:v>
+                </c:pt>
               </c:numCache>
             </c:numRef>
           </c:val>
           <c:extLst>
             <c:ext xmlns:c16="http://schemas.microsoft.com/office/drawing/2014/chart" uri="{C3380CC4-5D6E-409C-BE32-E72D297353CC}">
-              <c16:uniqueId val="{00000003-B17F-4F5C-BAB0-B345E20935D1}"/>
+              <c16:uniqueId val="{00000003-32F1-492E-BE01-917362E1C5ED}"/>
             </c:ext>
           </c:extLst>
         </c:ser>
@@ -12358,7 +12360,7 @@
             </a:r>
             <a:r>
               <a:rPr lang="pt-PT" noProof="0" dirty="0"/>
-              <a:t> - deepseek-r1:8b (Depois)</a:t>
+              <a:t> - gpt-oss:120b (Depois)</a:t>
             </a:r>
           </a:p>
         </c:rich>
@@ -12483,14 +12485,14 @@
                   <c:v>4</c:v>
                 </c:pt>
                 <c:pt idx="2">
-                  <c:v>12</c:v>
+                  <c:v>52</c:v>
                 </c:pt>
               </c:numCache>
             </c:numRef>
           </c:val>
           <c:extLst>
             <c:ext xmlns:c16="http://schemas.microsoft.com/office/drawing/2014/chart" uri="{C3380CC4-5D6E-409C-BE32-E72D297353CC}">
-              <c16:uniqueId val="{00000000-621B-46E4-A1B1-75BE563CEA1C}"/>
+              <c16:uniqueId val="{00000000-0CB7-4DA4-861E-8A397535B43F}"/>
             </c:ext>
           </c:extLst>
         </c:ser>
@@ -12585,7 +12587,7 @@
           </c:val>
           <c:extLst>
             <c:ext xmlns:c16="http://schemas.microsoft.com/office/drawing/2014/chart" uri="{C3380CC4-5D6E-409C-BE32-E72D297353CC}">
-              <c16:uniqueId val="{00000001-621B-46E4-A1B1-75BE563CEA1C}"/>
+              <c16:uniqueId val="{00000001-0CB7-4DA4-861E-8A397535B43F}"/>
             </c:ext>
           </c:extLst>
         </c:ser>
@@ -12670,7 +12672,7 @@
                   <c:v>20</c:v>
                 </c:pt>
                 <c:pt idx="1">
-                  <c:v>4</c:v>
+                  <c:v>48</c:v>
                 </c:pt>
                 <c:pt idx="2">
                   <c:v>12</c:v>
@@ -12680,7 +12682,7 @@
           </c:val>
           <c:extLst>
             <c:ext xmlns:c16="http://schemas.microsoft.com/office/drawing/2014/chart" uri="{C3380CC4-5D6E-409C-BE32-E72D297353CC}">
-              <c16:uniqueId val="{00000002-621B-46E4-A1B1-75BE563CEA1C}"/>
+              <c16:uniqueId val="{00000002-0CB7-4DA4-861E-8A397535B43F}"/>
             </c:ext>
           </c:extLst>
         </c:ser>
@@ -12775,7 +12777,7 @@
           </c:val>
           <c:extLst>
             <c:ext xmlns:c16="http://schemas.microsoft.com/office/drawing/2014/chart" uri="{C3380CC4-5D6E-409C-BE32-E72D297353CC}">
-              <c16:uniqueId val="{00000003-621B-46E4-A1B1-75BE563CEA1C}"/>
+              <c16:uniqueId val="{00000003-0CB7-4DA4-861E-8A397535B43F}"/>
             </c:ext>
           </c:extLst>
         </c:ser>
@@ -13019,7 +13021,7 @@
             </a:r>
             <a:r>
               <a:rPr lang="pt-PT" noProof="0" dirty="0"/>
-              <a:t> - gemma3:4b (Antes)</a:t>
+              <a:t> - qwen3:4b (Antes)</a:t>
             </a:r>
           </a:p>
         </c:rich>
@@ -13137,21 +13139,12 @@
               <c:numCache>
                 <c:formatCode>General</c:formatCode>
                 <c:ptCount val="3"/>
-                <c:pt idx="0">
-                  <c:v>20</c:v>
-                </c:pt>
-                <c:pt idx="1">
-                  <c:v>4</c:v>
-                </c:pt>
-                <c:pt idx="2">
-                  <c:v>0</c:v>
-                </c:pt>
               </c:numCache>
             </c:numRef>
           </c:val>
           <c:extLst>
             <c:ext xmlns:c16="http://schemas.microsoft.com/office/drawing/2014/chart" uri="{C3380CC4-5D6E-409C-BE32-E72D297353CC}">
-              <c16:uniqueId val="{00000000-AD5F-43F0-9B10-ECF07463736F}"/>
+              <c16:uniqueId val="{00000000-A20A-49FD-A8C5-4EE760D9CCB3}"/>
             </c:ext>
           </c:extLst>
         </c:ser>
@@ -13232,21 +13225,12 @@
               <c:numCache>
                 <c:formatCode>General</c:formatCode>
                 <c:ptCount val="3"/>
-                <c:pt idx="0">
-                  <c:v>20</c:v>
-                </c:pt>
-                <c:pt idx="1">
-                  <c:v>4</c:v>
-                </c:pt>
-                <c:pt idx="2">
-                  <c:v>0</c:v>
-                </c:pt>
               </c:numCache>
             </c:numRef>
           </c:val>
           <c:extLst>
             <c:ext xmlns:c16="http://schemas.microsoft.com/office/drawing/2014/chart" uri="{C3380CC4-5D6E-409C-BE32-E72D297353CC}">
-              <c16:uniqueId val="{00000001-AD5F-43F0-9B10-ECF07463736F}"/>
+              <c16:uniqueId val="{00000001-A20A-49FD-A8C5-4EE760D9CCB3}"/>
             </c:ext>
           </c:extLst>
         </c:ser>
@@ -13327,18 +13311,12 @@
               <c:numCache>
                 <c:formatCode>General</c:formatCode>
                 <c:ptCount val="3"/>
-                <c:pt idx="0">
-                  <c:v>20</c:v>
-                </c:pt>
-                <c:pt idx="2">
-                  <c:v>0</c:v>
-                </c:pt>
               </c:numCache>
             </c:numRef>
           </c:val>
           <c:extLst>
             <c:ext xmlns:c16="http://schemas.microsoft.com/office/drawing/2014/chart" uri="{C3380CC4-5D6E-409C-BE32-E72D297353CC}">
-              <c16:uniqueId val="{00000002-AD5F-43F0-9B10-ECF07463736F}"/>
+              <c16:uniqueId val="{00000002-A20A-49FD-A8C5-4EE760D9CCB3}"/>
             </c:ext>
           </c:extLst>
         </c:ser>
@@ -13419,21 +13397,12 @@
               <c:numCache>
                 <c:formatCode>General</c:formatCode>
                 <c:ptCount val="3"/>
-                <c:pt idx="0">
-                  <c:v>20</c:v>
-                </c:pt>
-                <c:pt idx="1">
-                  <c:v>4</c:v>
-                </c:pt>
-                <c:pt idx="2">
-                  <c:v>0</c:v>
-                </c:pt>
               </c:numCache>
             </c:numRef>
           </c:val>
           <c:extLst>
             <c:ext xmlns:c16="http://schemas.microsoft.com/office/drawing/2014/chart" uri="{C3380CC4-5D6E-409C-BE32-E72D297353CC}">
-              <c16:uniqueId val="{00000003-AD5F-43F0-9B10-ECF07463736F}"/>
+              <c16:uniqueId val="{00000003-A20A-49FD-A8C5-4EE760D9CCB3}"/>
             </c:ext>
           </c:extLst>
         </c:ser>
@@ -13677,7 +13646,7 @@
             </a:r>
             <a:r>
               <a:rPr lang="pt-PT" noProof="0" dirty="0"/>
-              <a:t> - gemma3:4b (Depois)</a:t>
+              <a:t> - qwen3:4b (Depois)</a:t>
             </a:r>
           </a:p>
         </c:rich>
@@ -13796,20 +13765,20 @@
                 <c:formatCode>General</c:formatCode>
                 <c:ptCount val="3"/>
                 <c:pt idx="0">
-                  <c:v>40</c:v>
+                  <c:v>20</c:v>
                 </c:pt>
                 <c:pt idx="1">
-                  <c:v>8</c:v>
+                  <c:v>4</c:v>
                 </c:pt>
                 <c:pt idx="2">
-                  <c:v>10</c:v>
+                  <c:v>12</c:v>
                 </c:pt>
               </c:numCache>
             </c:numRef>
           </c:val>
           <c:extLst>
             <c:ext xmlns:c16="http://schemas.microsoft.com/office/drawing/2014/chart" uri="{C3380CC4-5D6E-409C-BE32-E72D297353CC}">
-              <c16:uniqueId val="{00000000-DB19-4657-9BAE-CED33E0B6F59}"/>
+              <c16:uniqueId val="{00000000-173C-411A-B01B-56EF583E6AB3}"/>
             </c:ext>
           </c:extLst>
         </c:ser>
@@ -13891,20 +13860,20 @@
                 <c:formatCode>General</c:formatCode>
                 <c:ptCount val="3"/>
                 <c:pt idx="0">
-                  <c:v>40</c:v>
+                  <c:v>20</c:v>
                 </c:pt>
                 <c:pt idx="1">
-                  <c:v>8</c:v>
+                  <c:v>4</c:v>
                 </c:pt>
                 <c:pt idx="2">
-                  <c:v>10</c:v>
+                  <c:v>12</c:v>
                 </c:pt>
               </c:numCache>
             </c:numRef>
           </c:val>
           <c:extLst>
             <c:ext xmlns:c16="http://schemas.microsoft.com/office/drawing/2014/chart" uri="{C3380CC4-5D6E-409C-BE32-E72D297353CC}">
-              <c16:uniqueId val="{00000001-DB19-4657-9BAE-CED33E0B6F59}"/>
+              <c16:uniqueId val="{00000001-173C-411A-B01B-56EF583E6AB3}"/>
             </c:ext>
           </c:extLst>
         </c:ser>
@@ -13986,20 +13955,20 @@
                 <c:formatCode>General</c:formatCode>
                 <c:ptCount val="3"/>
                 <c:pt idx="0">
-                  <c:v>40</c:v>
+                  <c:v>20</c:v>
                 </c:pt>
                 <c:pt idx="1">
-                  <c:v>8</c:v>
+                  <c:v>4</c:v>
                 </c:pt>
                 <c:pt idx="2">
-                  <c:v>10</c:v>
+                  <c:v>12</c:v>
                 </c:pt>
               </c:numCache>
             </c:numRef>
           </c:val>
           <c:extLst>
             <c:ext xmlns:c16="http://schemas.microsoft.com/office/drawing/2014/chart" uri="{C3380CC4-5D6E-409C-BE32-E72D297353CC}">
-              <c16:uniqueId val="{00000002-DB19-4657-9BAE-CED33E0B6F59}"/>
+              <c16:uniqueId val="{00000002-173C-411A-B01B-56EF583E6AB3}"/>
             </c:ext>
           </c:extLst>
         </c:ser>
@@ -14081,20 +14050,20 @@
                 <c:formatCode>General</c:formatCode>
                 <c:ptCount val="3"/>
                 <c:pt idx="0">
-                  <c:v>40</c:v>
+                  <c:v>20</c:v>
                 </c:pt>
                 <c:pt idx="1">
-                  <c:v>8</c:v>
+                  <c:v>4</c:v>
                 </c:pt>
                 <c:pt idx="2">
-                  <c:v>10</c:v>
+                  <c:v>12</c:v>
                 </c:pt>
               </c:numCache>
             </c:numRef>
           </c:val>
           <c:extLst>
             <c:ext xmlns:c16="http://schemas.microsoft.com/office/drawing/2014/chart" uri="{C3380CC4-5D6E-409C-BE32-E72D297353CC}">
-              <c16:uniqueId val="{00000003-DB19-4657-9BAE-CED33E0B6F59}"/>
+              <c16:uniqueId val="{00000003-173C-411A-B01B-56EF583E6AB3}"/>
             </c:ext>
           </c:extLst>
         </c:ser>
@@ -14338,7 +14307,7 @@
             </a:r>
             <a:r>
               <a:rPr lang="pt-PT" noProof="0" dirty="0"/>
-              <a:t> - qwen3:4b (Antes)</a:t>
+              <a:t> - gemma3:4b (Depois)</a:t>
             </a:r>
           </a:p>
         </c:rich>
@@ -14456,12 +14425,21 @@
               <c:numCache>
                 <c:formatCode>General</c:formatCode>
                 <c:ptCount val="3"/>
+                <c:pt idx="0">
+                  <c:v>40</c:v>
+                </c:pt>
+                <c:pt idx="1">
+                  <c:v>8</c:v>
+                </c:pt>
+                <c:pt idx="2">
+                  <c:v>10</c:v>
+                </c:pt>
               </c:numCache>
             </c:numRef>
           </c:val>
           <c:extLst>
             <c:ext xmlns:c16="http://schemas.microsoft.com/office/drawing/2014/chart" uri="{C3380CC4-5D6E-409C-BE32-E72D297353CC}">
-              <c16:uniqueId val="{00000000-AFA5-43F6-8FD9-96EE9BBD22A5}"/>
+              <c16:uniqueId val="{00000000-5A50-4609-B4FE-714560441F5F}"/>
             </c:ext>
           </c:extLst>
         </c:ser>
@@ -14542,12 +14520,21 @@
               <c:numCache>
                 <c:formatCode>General</c:formatCode>
                 <c:ptCount val="3"/>
+                <c:pt idx="0">
+                  <c:v>40</c:v>
+                </c:pt>
+                <c:pt idx="1">
+                  <c:v>8</c:v>
+                </c:pt>
+                <c:pt idx="2">
+                  <c:v>10</c:v>
+                </c:pt>
               </c:numCache>
             </c:numRef>
           </c:val>
           <c:extLst>
             <c:ext xmlns:c16="http://schemas.microsoft.com/office/drawing/2014/chart" uri="{C3380CC4-5D6E-409C-BE32-E72D297353CC}">
-              <c16:uniqueId val="{00000001-AFA5-43F6-8FD9-96EE9BBD22A5}"/>
+              <c16:uniqueId val="{00000001-5A50-4609-B4FE-714560441F5F}"/>
             </c:ext>
           </c:extLst>
         </c:ser>
@@ -14628,12 +14615,21 @@
               <c:numCache>
                 <c:formatCode>General</c:formatCode>
                 <c:ptCount val="3"/>
+                <c:pt idx="0">
+                  <c:v>40</c:v>
+                </c:pt>
+                <c:pt idx="1">
+                  <c:v>8</c:v>
+                </c:pt>
+                <c:pt idx="2">
+                  <c:v>10</c:v>
+                </c:pt>
               </c:numCache>
             </c:numRef>
           </c:val>
           <c:extLst>
             <c:ext xmlns:c16="http://schemas.microsoft.com/office/drawing/2014/chart" uri="{C3380CC4-5D6E-409C-BE32-E72D297353CC}">
-              <c16:uniqueId val="{00000002-AFA5-43F6-8FD9-96EE9BBD22A5}"/>
+              <c16:uniqueId val="{00000002-5A50-4609-B4FE-714560441F5F}"/>
             </c:ext>
           </c:extLst>
         </c:ser>
@@ -14714,12 +14710,21 @@
               <c:numCache>
                 <c:formatCode>General</c:formatCode>
                 <c:ptCount val="3"/>
+                <c:pt idx="0">
+                  <c:v>40</c:v>
+                </c:pt>
+                <c:pt idx="1">
+                  <c:v>8</c:v>
+                </c:pt>
+                <c:pt idx="2">
+                  <c:v>10</c:v>
+                </c:pt>
               </c:numCache>
             </c:numRef>
           </c:val>
           <c:extLst>
             <c:ext xmlns:c16="http://schemas.microsoft.com/office/drawing/2014/chart" uri="{C3380CC4-5D6E-409C-BE32-E72D297353CC}">
-              <c16:uniqueId val="{00000003-AFA5-43F6-8FD9-96EE9BBD22A5}"/>
+              <c16:uniqueId val="{00000003-5A50-4609-B4FE-714560441F5F}"/>
             </c:ext>
           </c:extLst>
         </c:ser>
@@ -14963,7 +14968,7 @@
             </a:r>
             <a:r>
               <a:rPr lang="pt-PT" noProof="0" dirty="0"/>
-              <a:t> - qwen3:4b (Depois)</a:t>
+              <a:t> - gemma3:4b (Antes)</a:t>
             </a:r>
           </a:p>
         </c:rich>
@@ -15088,14 +15093,14 @@
                   <c:v>4</c:v>
                 </c:pt>
                 <c:pt idx="2">
-                  <c:v>12</c:v>
+                  <c:v>0</c:v>
                 </c:pt>
               </c:numCache>
             </c:numRef>
           </c:val>
           <c:extLst>
             <c:ext xmlns:c16="http://schemas.microsoft.com/office/drawing/2014/chart" uri="{C3380CC4-5D6E-409C-BE32-E72D297353CC}">
-              <c16:uniqueId val="{00000000-4F51-4392-926F-5587A06D7D47}"/>
+              <c16:uniqueId val="{00000000-FAB1-4B95-B8BA-F1D833863351}"/>
             </c:ext>
           </c:extLst>
         </c:ser>
@@ -15183,14 +15188,14 @@
                   <c:v>4</c:v>
                 </c:pt>
                 <c:pt idx="2">
-                  <c:v>12</c:v>
+                  <c:v>0</c:v>
                 </c:pt>
               </c:numCache>
             </c:numRef>
           </c:val>
           <c:extLst>
             <c:ext xmlns:c16="http://schemas.microsoft.com/office/drawing/2014/chart" uri="{C3380CC4-5D6E-409C-BE32-E72D297353CC}">
-              <c16:uniqueId val="{00000001-4F51-4392-926F-5587A06D7D47}"/>
+              <c16:uniqueId val="{00000001-FAB1-4B95-B8BA-F1D833863351}"/>
             </c:ext>
           </c:extLst>
         </c:ser>
@@ -15274,18 +15279,15 @@
                 <c:pt idx="0">
                   <c:v>20</c:v>
                 </c:pt>
-                <c:pt idx="1">
-                  <c:v>4</c:v>
-                </c:pt>
                 <c:pt idx="2">
-                  <c:v>12</c:v>
+                  <c:v>0</c:v>
                 </c:pt>
               </c:numCache>
             </c:numRef>
           </c:val>
           <c:extLst>
             <c:ext xmlns:c16="http://schemas.microsoft.com/office/drawing/2014/chart" uri="{C3380CC4-5D6E-409C-BE32-E72D297353CC}">
-              <c16:uniqueId val="{00000002-4F51-4392-926F-5587A06D7D47}"/>
+              <c16:uniqueId val="{00000002-FAB1-4B95-B8BA-F1D833863351}"/>
             </c:ext>
           </c:extLst>
         </c:ser>
@@ -15373,14 +15375,14 @@
                   <c:v>4</c:v>
                 </c:pt>
                 <c:pt idx="2">
-                  <c:v>12</c:v>
+                  <c:v>0</c:v>
                 </c:pt>
               </c:numCache>
             </c:numRef>
           </c:val>
           <c:extLst>
             <c:ext xmlns:c16="http://schemas.microsoft.com/office/drawing/2014/chart" uri="{C3380CC4-5D6E-409C-BE32-E72D297353CC}">
-              <c16:uniqueId val="{00000003-4F51-4392-926F-5587A06D7D47}"/>
+              <c16:uniqueId val="{00000003-FAB1-4B95-B8BA-F1D833863351}"/>
             </c:ext>
           </c:extLst>
         </c:ser>
@@ -30048,7 +30050,7 @@
           <a:p>
             <a:fld id="{5BCAD085-E8A6-8845-BD4E-CB4CCA059FC4}" type="datetimeFigureOut">
               <a:rPr lang="en-US" smtClean="0"/>
-              <a:t>2025-11-09</a:t>
+              <a:t>2025-11-11</a:t>
             </a:fld>
             <a:endParaRPr lang="en-US"/>
           </a:p>
@@ -30299,7 +30301,7 @@
           <a:p>
             <a:fld id="{5BCAD085-E8A6-8845-BD4E-CB4CCA059FC4}" type="datetimeFigureOut">
               <a:rPr lang="en-US" smtClean="0"/>
-              <a:t>2025-11-09</a:t>
+              <a:t>2025-11-11</a:t>
             </a:fld>
             <a:endParaRPr lang="en-US"/>
           </a:p>
@@ -30613,7 +30615,7 @@
           <a:p>
             <a:fld id="{5BCAD085-E8A6-8845-BD4E-CB4CCA059FC4}" type="datetimeFigureOut">
               <a:rPr lang="en-US" smtClean="0"/>
-              <a:t>2025-11-09</a:t>
+              <a:t>2025-11-11</a:t>
             </a:fld>
             <a:endParaRPr lang="en-US"/>
           </a:p>
@@ -30954,7 +30956,7 @@
           <a:p>
             <a:fld id="{5BCAD085-E8A6-8845-BD4E-CB4CCA059FC4}" type="datetimeFigureOut">
               <a:rPr lang="en-US" smtClean="0"/>
-              <a:t>2025-11-09</a:t>
+              <a:t>2025-11-11</a:t>
             </a:fld>
             <a:endParaRPr lang="en-US"/>
           </a:p>
@@ -31268,7 +31270,7 @@
           <a:p>
             <a:fld id="{5BCAD085-E8A6-8845-BD4E-CB4CCA059FC4}" type="datetimeFigureOut">
               <a:rPr lang="en-US" smtClean="0"/>
-              <a:t>2025-11-09</a:t>
+              <a:t>2025-11-11</a:t>
             </a:fld>
             <a:endParaRPr lang="en-US"/>
           </a:p>
@@ -31661,7 +31663,7 @@
           <a:p>
             <a:fld id="{5BCAD085-E8A6-8845-BD4E-CB4CCA059FC4}" type="datetimeFigureOut">
               <a:rPr lang="en-US" smtClean="0"/>
-              <a:t>2025-11-09</a:t>
+              <a:t>2025-11-11</a:t>
             </a:fld>
             <a:endParaRPr lang="en-US"/>
           </a:p>
@@ -31831,7 +31833,7 @@
           <a:p>
             <a:fld id="{5BCAD085-E8A6-8845-BD4E-CB4CCA059FC4}" type="datetimeFigureOut">
               <a:rPr lang="en-US" smtClean="0"/>
-              <a:t>2025-11-09</a:t>
+              <a:t>2025-11-11</a:t>
             </a:fld>
             <a:endParaRPr lang="en-US"/>
           </a:p>
@@ -32011,7 +32013,7 @@
           <a:p>
             <a:fld id="{5BCAD085-E8A6-8845-BD4E-CB4CCA059FC4}" type="datetimeFigureOut">
               <a:rPr lang="en-US" smtClean="0"/>
-              <a:t>2025-11-09</a:t>
+              <a:t>2025-11-11</a:t>
             </a:fld>
             <a:endParaRPr lang="en-US"/>
           </a:p>
@@ -32187,7 +32189,7 @@
           <a:p>
             <a:fld id="{5BCAD085-E8A6-8845-BD4E-CB4CCA059FC4}" type="datetimeFigureOut">
               <a:rPr lang="en-US" smtClean="0"/>
-              <a:t>2025-11-09</a:t>
+              <a:t>2025-11-11</a:t>
             </a:fld>
             <a:endParaRPr lang="en-US"/>
           </a:p>
@@ -32434,7 +32436,7 @@
           <a:p>
             <a:fld id="{5BCAD085-E8A6-8845-BD4E-CB4CCA059FC4}" type="datetimeFigureOut">
               <a:rPr lang="en-US" smtClean="0"/>
-              <a:t>2025-11-09</a:t>
+              <a:t>2025-11-11</a:t>
             </a:fld>
             <a:endParaRPr lang="en-US"/>
           </a:p>
@@ -32666,7 +32668,7 @@
           <a:p>
             <a:fld id="{5BCAD085-E8A6-8845-BD4E-CB4CCA059FC4}" type="datetimeFigureOut">
               <a:rPr lang="en-US" smtClean="0"/>
-              <a:t>2025-11-09</a:t>
+              <a:t>2025-11-11</a:t>
             </a:fld>
             <a:endParaRPr lang="en-US"/>
           </a:p>
@@ -33040,7 +33042,7 @@
           <a:p>
             <a:fld id="{5BCAD085-E8A6-8845-BD4E-CB4CCA059FC4}" type="datetimeFigureOut">
               <a:rPr lang="en-US" smtClean="0"/>
-              <a:t>2025-11-09</a:t>
+              <a:t>2025-11-11</a:t>
             </a:fld>
             <a:endParaRPr lang="en-US"/>
           </a:p>
@@ -33163,7 +33165,7 @@
           <a:p>
             <a:fld id="{5BCAD085-E8A6-8845-BD4E-CB4CCA059FC4}" type="datetimeFigureOut">
               <a:rPr lang="en-US" smtClean="0"/>
-              <a:t>2025-11-09</a:t>
+              <a:t>2025-11-11</a:t>
             </a:fld>
             <a:endParaRPr lang="en-US"/>
           </a:p>
@@ -33258,7 +33260,7 @@
           <a:p>
             <a:fld id="{5BCAD085-E8A6-8845-BD4E-CB4CCA059FC4}" type="datetimeFigureOut">
               <a:rPr lang="en-US" smtClean="0"/>
-              <a:t>2025-11-09</a:t>
+              <a:t>2025-11-11</a:t>
             </a:fld>
             <a:endParaRPr lang="en-US"/>
           </a:p>
@@ -33513,7 +33515,7 @@
           <a:p>
             <a:fld id="{5BCAD085-E8A6-8845-BD4E-CB4CCA059FC4}" type="datetimeFigureOut">
               <a:rPr lang="en-US" smtClean="0"/>
-              <a:t>2025-11-09</a:t>
+              <a:t>2025-11-11</a:t>
             </a:fld>
             <a:endParaRPr lang="en-US"/>
           </a:p>
@@ -33776,7 +33778,7 @@
           <a:p>
             <a:fld id="{5BCAD085-E8A6-8845-BD4E-CB4CCA059FC4}" type="datetimeFigureOut">
               <a:rPr lang="en-US" smtClean="0"/>
-              <a:t>2025-11-09</a:t>
+              <a:t>2025-11-11</a:t>
             </a:fld>
             <a:endParaRPr lang="en-US"/>
           </a:p>
@@ -34575,7 +34577,7 @@
           <a:p>
             <a:fld id="{5BCAD085-E8A6-8845-BD4E-CB4CCA059FC4}" type="datetimeFigureOut">
               <a:rPr lang="en-US" smtClean="0"/>
-              <a:t>2025-11-09</a:t>
+              <a:t>2025-11-11</a:t>
             </a:fld>
             <a:endParaRPr lang="en-US"/>
           </a:p>
@@ -35116,7 +35118,7 @@
           <a:p>
             <a:r>
               <a:rPr lang="pt-PT" noProof="0" dirty="0"/>
-              <a:t>Métricas</a:t>
+              <a:t>Ponto de Situação</a:t>
             </a:r>
           </a:p>
         </p:txBody>
@@ -35130,6 +35132,290 @@
 </file>
 
 <file path=ppt/slides/slide10.xml><?xml version="1.0" encoding="utf-8"?>
+<p:sld xmlns:a="http://schemas.openxmlformats.org/drawingml/2006/main" xmlns:r="http://schemas.openxmlformats.org/officeDocument/2006/relationships" xmlns:p="http://schemas.openxmlformats.org/presentationml/2006/main">
+  <p:cSld>
+    <p:spTree>
+      <p:nvGrpSpPr>
+        <p:cNvPr id="1" name=""/>
+        <p:cNvGrpSpPr/>
+        <p:nvPr/>
+      </p:nvGrpSpPr>
+      <p:grpSpPr>
+        <a:xfrm>
+          <a:off x="0" y="0"/>
+          <a:ext cx="0" cy="0"/>
+          <a:chOff x="0" y="0"/>
+          <a:chExt cx="0" cy="0"/>
+        </a:xfrm>
+      </p:grpSpPr>
+      <p:graphicFrame>
+        <p:nvGraphicFramePr>
+          <p:cNvPr id="2" name="Chart 1">
+            <a:extLst>
+              <a:ext uri="{FF2B5EF4-FFF2-40B4-BE49-F238E27FC236}">
+                <a16:creationId xmlns:a16="http://schemas.microsoft.com/office/drawing/2014/main" id="{F7C4CA31-8D6C-EEC9-FF8E-A864971B8B12}"/>
+              </a:ext>
+            </a:extLst>
+          </p:cNvPr>
+          <p:cNvGraphicFramePr/>
+          <p:nvPr>
+            <p:extLst>
+              <p:ext uri="{D42A27DB-BD31-4B8C-83A1-F6EECF244321}">
+                <p14:modId xmlns:p14="http://schemas.microsoft.com/office/powerpoint/2010/main" val="1851922245"/>
+              </p:ext>
+            </p:extLst>
+          </p:nvPr>
+        </p:nvGraphicFramePr>
+        <p:xfrm>
+          <a:off x="604982" y="150090"/>
+          <a:ext cx="4918364" cy="3278910"/>
+        </p:xfrm>
+        <a:graphic>
+          <a:graphicData uri="http://schemas.openxmlformats.org/drawingml/2006/chart">
+            <c:chart xmlns:c="http://schemas.openxmlformats.org/drawingml/2006/chart" xmlns:r="http://schemas.openxmlformats.org/officeDocument/2006/relationships" r:id="rId2"/>
+          </a:graphicData>
+        </a:graphic>
+      </p:graphicFrame>
+      <p:graphicFrame>
+        <p:nvGraphicFramePr>
+          <p:cNvPr id="4" name="Chart 3">
+            <a:extLst>
+              <a:ext uri="{FF2B5EF4-FFF2-40B4-BE49-F238E27FC236}">
+                <a16:creationId xmlns:a16="http://schemas.microsoft.com/office/drawing/2014/main" id="{B1101694-D930-0541-90D6-796D9CFC98E6}"/>
+              </a:ext>
+            </a:extLst>
+          </p:cNvPr>
+          <p:cNvGraphicFramePr/>
+          <p:nvPr>
+            <p:extLst>
+              <p:ext uri="{D42A27DB-BD31-4B8C-83A1-F6EECF244321}">
+                <p14:modId xmlns:p14="http://schemas.microsoft.com/office/powerpoint/2010/main" val="2621704426"/>
+              </p:ext>
+            </p:extLst>
+          </p:nvPr>
+        </p:nvGraphicFramePr>
+        <p:xfrm>
+          <a:off x="604982" y="3429000"/>
+          <a:ext cx="4918364" cy="3278910"/>
+        </p:xfrm>
+        <a:graphic>
+          <a:graphicData uri="http://schemas.openxmlformats.org/drawingml/2006/chart">
+            <c:chart xmlns:c="http://schemas.openxmlformats.org/drawingml/2006/chart" xmlns:r="http://schemas.openxmlformats.org/officeDocument/2006/relationships" r:id="rId3"/>
+          </a:graphicData>
+        </a:graphic>
+      </p:graphicFrame>
+      <p:graphicFrame>
+        <p:nvGraphicFramePr>
+          <p:cNvPr id="6" name="Chart 5">
+            <a:extLst>
+              <a:ext uri="{FF2B5EF4-FFF2-40B4-BE49-F238E27FC236}">
+                <a16:creationId xmlns:a16="http://schemas.microsoft.com/office/drawing/2014/main" id="{A08E4A76-3143-6853-3FB5-1E7B1A5272B0}"/>
+              </a:ext>
+            </a:extLst>
+          </p:cNvPr>
+          <p:cNvGraphicFramePr/>
+          <p:nvPr>
+            <p:extLst>
+              <p:ext uri="{D42A27DB-BD31-4B8C-83A1-F6EECF244321}">
+                <p14:modId xmlns:p14="http://schemas.microsoft.com/office/powerpoint/2010/main" val="1930677601"/>
+              </p:ext>
+            </p:extLst>
+          </p:nvPr>
+        </p:nvGraphicFramePr>
+        <p:xfrm>
+          <a:off x="6668654" y="150090"/>
+          <a:ext cx="4918364" cy="3278910"/>
+        </p:xfrm>
+        <a:graphic>
+          <a:graphicData uri="http://schemas.openxmlformats.org/drawingml/2006/chart">
+            <c:chart xmlns:c="http://schemas.openxmlformats.org/drawingml/2006/chart" xmlns:r="http://schemas.openxmlformats.org/officeDocument/2006/relationships" r:id="rId4"/>
+          </a:graphicData>
+        </a:graphic>
+      </p:graphicFrame>
+      <p:graphicFrame>
+        <p:nvGraphicFramePr>
+          <p:cNvPr id="7" name="Chart 6">
+            <a:extLst>
+              <a:ext uri="{FF2B5EF4-FFF2-40B4-BE49-F238E27FC236}">
+                <a16:creationId xmlns:a16="http://schemas.microsoft.com/office/drawing/2014/main" id="{CB7ED540-1028-E3F9-AD73-DD893C7E2F2E}"/>
+              </a:ext>
+            </a:extLst>
+          </p:cNvPr>
+          <p:cNvGraphicFramePr/>
+          <p:nvPr>
+            <p:extLst>
+              <p:ext uri="{D42A27DB-BD31-4B8C-83A1-F6EECF244321}">
+                <p14:modId xmlns:p14="http://schemas.microsoft.com/office/powerpoint/2010/main" val="1424678726"/>
+              </p:ext>
+            </p:extLst>
+          </p:nvPr>
+        </p:nvGraphicFramePr>
+        <p:xfrm>
+          <a:off x="6668654" y="3429000"/>
+          <a:ext cx="4918364" cy="3278910"/>
+        </p:xfrm>
+        <a:graphic>
+          <a:graphicData uri="http://schemas.openxmlformats.org/drawingml/2006/chart">
+            <c:chart xmlns:c="http://schemas.openxmlformats.org/drawingml/2006/chart" xmlns:r="http://schemas.openxmlformats.org/officeDocument/2006/relationships" r:id="rId5"/>
+          </a:graphicData>
+        </a:graphic>
+      </p:graphicFrame>
+    </p:spTree>
+    <p:extLst>
+      <p:ext uri="{BB962C8B-B14F-4D97-AF65-F5344CB8AC3E}">
+        <p14:creationId xmlns:p14="http://schemas.microsoft.com/office/powerpoint/2010/main" val="3881569123"/>
+      </p:ext>
+    </p:extLst>
+  </p:cSld>
+  <p:clrMapOvr>
+    <a:masterClrMapping/>
+  </p:clrMapOvr>
+</p:sld>
+</file>
+
+<file path=ppt/slides/slide11.xml><?xml version="1.0" encoding="utf-8"?>
+<p:sld xmlns:a="http://schemas.openxmlformats.org/drawingml/2006/main" xmlns:r="http://schemas.openxmlformats.org/officeDocument/2006/relationships" xmlns:p="http://schemas.openxmlformats.org/presentationml/2006/main">
+  <p:cSld>
+    <p:spTree>
+      <p:nvGrpSpPr>
+        <p:cNvPr id="1" name=""/>
+        <p:cNvGrpSpPr/>
+        <p:nvPr/>
+      </p:nvGrpSpPr>
+      <p:grpSpPr>
+        <a:xfrm>
+          <a:off x="0" y="0"/>
+          <a:ext cx="0" cy="0"/>
+          <a:chOff x="0" y="0"/>
+          <a:chExt cx="0" cy="0"/>
+        </a:xfrm>
+      </p:grpSpPr>
+      <p:graphicFrame>
+        <p:nvGraphicFramePr>
+          <p:cNvPr id="2" name="Chart 1">
+            <a:extLst>
+              <a:ext uri="{FF2B5EF4-FFF2-40B4-BE49-F238E27FC236}">
+                <a16:creationId xmlns:a16="http://schemas.microsoft.com/office/drawing/2014/main" id="{7591DCE1-FDBC-B035-AD2A-BC860B0A6B99}"/>
+              </a:ext>
+            </a:extLst>
+          </p:cNvPr>
+          <p:cNvGraphicFramePr/>
+          <p:nvPr>
+            <p:extLst>
+              <p:ext uri="{D42A27DB-BD31-4B8C-83A1-F6EECF244321}">
+                <p14:modId xmlns:p14="http://schemas.microsoft.com/office/powerpoint/2010/main" val="1648282566"/>
+              </p:ext>
+            </p:extLst>
+          </p:nvPr>
+        </p:nvGraphicFramePr>
+        <p:xfrm>
+          <a:off x="604982" y="150090"/>
+          <a:ext cx="4918364" cy="3278910"/>
+        </p:xfrm>
+        <a:graphic>
+          <a:graphicData uri="http://schemas.openxmlformats.org/drawingml/2006/chart">
+            <c:chart xmlns:c="http://schemas.openxmlformats.org/drawingml/2006/chart" xmlns:r="http://schemas.openxmlformats.org/officeDocument/2006/relationships" r:id="rId2"/>
+          </a:graphicData>
+        </a:graphic>
+      </p:graphicFrame>
+      <p:graphicFrame>
+        <p:nvGraphicFramePr>
+          <p:cNvPr id="4" name="Chart 3">
+            <a:extLst>
+              <a:ext uri="{FF2B5EF4-FFF2-40B4-BE49-F238E27FC236}">
+                <a16:creationId xmlns:a16="http://schemas.microsoft.com/office/drawing/2014/main" id="{E30F73BE-6062-BECB-9D8A-98BCC08F0AA0}"/>
+              </a:ext>
+            </a:extLst>
+          </p:cNvPr>
+          <p:cNvGraphicFramePr/>
+          <p:nvPr>
+            <p:extLst>
+              <p:ext uri="{D42A27DB-BD31-4B8C-83A1-F6EECF244321}">
+                <p14:modId xmlns:p14="http://schemas.microsoft.com/office/powerpoint/2010/main" val="408466376"/>
+              </p:ext>
+            </p:extLst>
+          </p:nvPr>
+        </p:nvGraphicFramePr>
+        <p:xfrm>
+          <a:off x="604982" y="3429000"/>
+          <a:ext cx="4918364" cy="3278910"/>
+        </p:xfrm>
+        <a:graphic>
+          <a:graphicData uri="http://schemas.openxmlformats.org/drawingml/2006/chart">
+            <c:chart xmlns:c="http://schemas.openxmlformats.org/drawingml/2006/chart" xmlns:r="http://schemas.openxmlformats.org/officeDocument/2006/relationships" r:id="rId3"/>
+          </a:graphicData>
+        </a:graphic>
+      </p:graphicFrame>
+      <p:graphicFrame>
+        <p:nvGraphicFramePr>
+          <p:cNvPr id="6" name="Chart 5">
+            <a:extLst>
+              <a:ext uri="{FF2B5EF4-FFF2-40B4-BE49-F238E27FC236}">
+                <a16:creationId xmlns:a16="http://schemas.microsoft.com/office/drawing/2014/main" id="{C0B3D3F9-CDEA-889B-81C8-48566CE79712}"/>
+              </a:ext>
+            </a:extLst>
+          </p:cNvPr>
+          <p:cNvGraphicFramePr/>
+          <p:nvPr>
+            <p:extLst>
+              <p:ext uri="{D42A27DB-BD31-4B8C-83A1-F6EECF244321}">
+                <p14:modId xmlns:p14="http://schemas.microsoft.com/office/powerpoint/2010/main" val="3862442733"/>
+              </p:ext>
+            </p:extLst>
+          </p:nvPr>
+        </p:nvGraphicFramePr>
+        <p:xfrm>
+          <a:off x="6668654" y="150090"/>
+          <a:ext cx="4918364" cy="3278910"/>
+        </p:xfrm>
+        <a:graphic>
+          <a:graphicData uri="http://schemas.openxmlformats.org/drawingml/2006/chart">
+            <c:chart xmlns:c="http://schemas.openxmlformats.org/drawingml/2006/chart" xmlns:r="http://schemas.openxmlformats.org/officeDocument/2006/relationships" r:id="rId4"/>
+          </a:graphicData>
+        </a:graphic>
+      </p:graphicFrame>
+      <p:graphicFrame>
+        <p:nvGraphicFramePr>
+          <p:cNvPr id="7" name="Chart 6">
+            <a:extLst>
+              <a:ext uri="{FF2B5EF4-FFF2-40B4-BE49-F238E27FC236}">
+                <a16:creationId xmlns:a16="http://schemas.microsoft.com/office/drawing/2014/main" id="{7BA64F22-F5BF-BA30-DF84-B3C70C16D047}"/>
+              </a:ext>
+            </a:extLst>
+          </p:cNvPr>
+          <p:cNvGraphicFramePr/>
+          <p:nvPr>
+            <p:extLst>
+              <p:ext uri="{D42A27DB-BD31-4B8C-83A1-F6EECF244321}">
+                <p14:modId xmlns:p14="http://schemas.microsoft.com/office/powerpoint/2010/main" val="2333106123"/>
+              </p:ext>
+            </p:extLst>
+          </p:nvPr>
+        </p:nvGraphicFramePr>
+        <p:xfrm>
+          <a:off x="6668654" y="3429000"/>
+          <a:ext cx="4918364" cy="3278910"/>
+        </p:xfrm>
+        <a:graphic>
+          <a:graphicData uri="http://schemas.openxmlformats.org/drawingml/2006/chart">
+            <c:chart xmlns:c="http://schemas.openxmlformats.org/drawingml/2006/chart" xmlns:r="http://schemas.openxmlformats.org/officeDocument/2006/relationships" r:id="rId5"/>
+          </a:graphicData>
+        </a:graphic>
+      </p:graphicFrame>
+    </p:spTree>
+    <p:extLst>
+      <p:ext uri="{BB962C8B-B14F-4D97-AF65-F5344CB8AC3E}">
+        <p14:creationId xmlns:p14="http://schemas.microsoft.com/office/powerpoint/2010/main" val="4203274677"/>
+      </p:ext>
+    </p:extLst>
+  </p:cSld>
+  <p:clrMapOvr>
+    <a:masterClrMapping/>
+  </p:clrMapOvr>
+</p:sld>
+</file>
+
+<file path=ppt/slides/slide12.xml><?xml version="1.0" encoding="utf-8"?>
 <p:sld xmlns:a="http://schemas.openxmlformats.org/drawingml/2006/main" xmlns:r="http://schemas.openxmlformats.org/officeDocument/2006/relationships" xmlns:p="http://schemas.openxmlformats.org/presentationml/2006/main">
   <p:cSld>
     <p:spTree>
@@ -35169,7 +35455,7 @@
           <a:p>
             <a:r>
               <a:rPr lang="pt-PT" noProof="0" dirty="0"/>
-              <a:t>Análise de resultados</a:t>
+              <a:t>Análise dos resultados</a:t>
             </a:r>
           </a:p>
         </p:txBody>
@@ -35193,7 +35479,7 @@
         <p:spPr/>
         <p:txBody>
           <a:bodyPr>
-            <a:normAutofit fontScale="92500" lnSpcReduction="10000"/>
+            <a:normAutofit fontScale="92500" lnSpcReduction="20000"/>
           </a:bodyPr>
           <a:lstStyle/>
           <a:p>
@@ -35209,59 +35495,19 @@
               <a:t>O </a:t>
             </a:r>
             <a:r>
-              <a:rPr lang="pt-BR" b="1" dirty="0"/>
-              <a:t>Gemma3:4B</a:t>
+              <a:rPr lang="pt-BR" sz="1700" dirty="0"/>
+              <a:t>gemma3:4b</a:t>
             </a:r>
             <a:r>
               <a:rPr lang="pt-BR" dirty="0"/>
-              <a:t> obteve a </a:t>
-            </a:r>
-            <a:r>
-              <a:rPr lang="pt-BR" b="1" dirty="0"/>
-              <a:t>melhor precisão média (≈ 19,3 %)</a:t>
-            </a:r>
-            <a:r>
-              <a:rPr lang="pt-BR" dirty="0"/>
-              <a:t>, seguida do </a:t>
-            </a:r>
-            <a:r>
-              <a:rPr lang="pt-BR" b="1" dirty="0"/>
-              <a:t>GPT-OSS:120B (≈ 19 %)</a:t>
-            </a:r>
-            <a:r>
-              <a:rPr lang="pt-BR" dirty="0"/>
-              <a:t>.</a:t>
+              <a:t> obteve a melhor precisão média (≈ 19,3 %), seguida do gpt-oss:120B (≈ 19 %).</a:t>
             </a:r>
           </a:p>
           <a:p>
             <a:pPr lvl="1"/>
             <a:r>
               <a:rPr lang="pt-BR" dirty="0"/>
-              <a:t>Os modelos </a:t>
-            </a:r>
-            <a:r>
-              <a:rPr lang="pt-BR" b="1" dirty="0"/>
-              <a:t>DeepSeek-R1:8B</a:t>
-            </a:r>
-            <a:r>
-              <a:rPr lang="pt-BR" dirty="0"/>
-              <a:t> e </a:t>
-            </a:r>
-            <a:r>
-              <a:rPr lang="pt-BR" b="1" dirty="0"/>
-              <a:t>Qwen3:4B</a:t>
-            </a:r>
-            <a:r>
-              <a:rPr lang="pt-BR" dirty="0"/>
-              <a:t> registaram </a:t>
-            </a:r>
-            <a:r>
-              <a:rPr lang="pt-BR" b="1" dirty="0"/>
-              <a:t>precisão moderada (≈ 12 %)</a:t>
-            </a:r>
-            <a:r>
-              <a:rPr lang="pt-BR" dirty="0"/>
-              <a:t>, revelando comportamento menos consistente nos testes.</a:t>
+              <a:t>O deepseek-r1:8b e o qwen3:4b registaram uma precisão mais baixa (≈ 12 %), revelando comportamento menos consistente nos testes.</a:t>
             </a:r>
             <a:endParaRPr lang="pt-PT" noProof="0" dirty="0"/>
           </a:p>
@@ -35275,44 +35521,16 @@
             <a:pPr lvl="1"/>
             <a:r>
               <a:rPr lang="pt-BR" dirty="0"/>
-              <a:t>Os modelos </a:t>
+              <a:t>O gemma3:4b e o gpt-oss:120b apresentaram tempos de execução equilibrados e estáveis.</a:t>
             </a:r>
-            <a:r>
-              <a:rPr lang="pt-BR" b="1" dirty="0"/>
-              <a:t>Gemma3:4B</a:t>
-            </a:r>
+          </a:p>
+          <a:p>
+            <a:pPr lvl="1"/>
             <a:r>
               <a:rPr lang="pt-BR" dirty="0"/>
-              <a:t> e </a:t>
+              <a:t>Já o deepseek-r1:8b e qwen3:4b geraram volumes de tokens significativamente maiores, aumentando o tempo médio de resposta.</a:t>
             </a:r>
-            <a:r>
-              <a:rPr lang="pt-BR" b="1" dirty="0"/>
-              <a:t>GPT-OSS:120B</a:t>
-            </a:r>
-            <a:r>
-              <a:rPr lang="pt-BR" dirty="0"/>
-              <a:t> apresentaram tempos de execução equilibrados e estáveis, enquanto que o </a:t>
-            </a:r>
-            <a:r>
-              <a:rPr lang="pt-BR" b="1" dirty="0"/>
-              <a:t>DeepSeek-R1:8B</a:t>
-            </a:r>
-            <a:r>
-              <a:rPr lang="pt-BR" dirty="0"/>
-              <a:t> e </a:t>
-            </a:r>
-            <a:r>
-              <a:rPr lang="pt-BR" b="1" dirty="0"/>
-              <a:t>Qwen3:4B</a:t>
-            </a:r>
-            <a:r>
-              <a:rPr lang="pt-BR" dirty="0"/>
-              <a:t> geraram volumes de tokens significativamente superiores, aumentando o tempo médio de resposta.</a:t>
-            </a:r>
-            <a:r>
-              <a:rPr lang="pt-PT" noProof="0" dirty="0"/>
-              <a:t> </a:t>
-            </a:r>
+            <a:endParaRPr lang="pt-PT" noProof="0" dirty="0"/>
           </a:p>
           <a:p>
             <a:r>
@@ -35333,7 +35551,7 @@
             <a:pPr lvl="1"/>
             <a:r>
               <a:rPr lang="pt-BR" dirty="0"/>
-              <a:t>Todos os modelos mantiveram desempenho relativamente estável nas diversas quantidades, embora os modelos maiores mostrem ligeira degradação de precisão à medida que o volume de logs aumenta.</a:t>
+              <a:t>Todos os modelos mantiveram desempenho relativamente estável nas diversas quantidades, embora os modelos maiores mostrem alguma degradação de precisão à medida que o volume de logs aumenta.</a:t>
             </a:r>
             <a:endParaRPr lang="pt-PT" noProof="0" dirty="0"/>
           </a:p>
@@ -35352,7 +35570,7 @@
 </p:sld>
 </file>
 
-<file path=ppt/slides/slide11.xml><?xml version="1.0" encoding="utf-8"?>
+<file path=ppt/slides/slide13.xml><?xml version="1.0" encoding="utf-8"?>
 <p:sld xmlns:a="http://schemas.openxmlformats.org/drawingml/2006/main" xmlns:r="http://schemas.openxmlformats.org/officeDocument/2006/relationships" xmlns:p="http://schemas.openxmlformats.org/presentationml/2006/main">
   <p:cSld>
     <p:spTree>
@@ -35418,7 +35636,7 @@
           <p:nvPr>
             <p:extLst>
               <p:ext uri="{D42A27DB-BD31-4B8C-83A1-F6EECF244321}">
-                <p14:modId xmlns:p14="http://schemas.microsoft.com/office/powerpoint/2010/main" val="2803481003"/>
+                <p14:modId xmlns:p14="http://schemas.microsoft.com/office/powerpoint/2010/main" val="1215614086"/>
               </p:ext>
             </p:extLst>
           </p:nvPr>
@@ -35457,9 +35675,10 @@
                         <a:buNone/>
                       </a:pPr>
                       <a:r>
-                        <a:rPr lang="pt-PT" noProof="0" dirty="0"/>
+                        <a:rPr lang="pt-PT" noProof="0"/>
                         <a:t>Modelo</a:t>
                       </a:r>
+                      <a:endParaRPr lang="pt-PT" noProof="0" dirty="0"/>
                     </a:p>
                   </a:txBody>
                   <a:tcPr anchor="ctr">
@@ -35511,9 +35730,10 @@
                         <a:buNone/>
                       </a:pPr>
                       <a:r>
-                        <a:rPr lang="pt-PT" noProof="0" dirty="0"/>
+                        <a:rPr lang="pt-PT" noProof="0"/>
                         <a:t>Observação</a:t>
                       </a:r>
+                      <a:endParaRPr lang="pt-PT" noProof="0" dirty="0"/>
                     </a:p>
                   </a:txBody>
                   <a:tcPr anchor="ctr">
@@ -35573,7 +35793,7 @@
                       </a:pPr>
                       <a:r>
                         <a:rPr lang="pt-PT" noProof="0" dirty="0"/>
-                        <a:t>GPT-OSS:120B</a:t>
+                        <a:t>gpt-oss:120b</a:t>
                       </a:r>
                     </a:p>
                   </a:txBody>
@@ -35626,7 +35846,7 @@
                         <a:buNone/>
                       </a:pPr>
                       <a:r>
-                        <a:rPr lang="pt-BR" dirty="0"/>
+                        <a:rPr lang="pt-BR"/>
                         <a:t>precisão alta, mas menos eficiente</a:t>
                       </a:r>
                       <a:endParaRPr lang="pt-PT" noProof="0" dirty="0"/>
@@ -35688,9 +35908,10 @@
                         <a:buNone/>
                       </a:pPr>
                       <a:r>
-                        <a:rPr lang="pt-PT" noProof="0" dirty="0"/>
-                        <a:t>Gemma3:4B</a:t>
+                        <a:rPr lang="pt-PT" noProof="0"/>
+                        <a:t>deepseek-r1:8b</a:t>
                       </a:r>
+                      <a:endParaRPr lang="pt-PT" noProof="0" dirty="0"/>
                     </a:p>
                   </a:txBody>
                   <a:tcPr anchor="ctr">
@@ -35742,16 +35963,8 @@
                         <a:buNone/>
                       </a:pPr>
                       <a:r>
-                        <a:rPr lang="en-US" dirty="0" err="1"/>
-                        <a:t>desempenho</a:t>
-                      </a:r>
-                      <a:r>
-                        <a:rPr lang="en-US" dirty="0"/>
-                        <a:t> </a:t>
-                      </a:r>
-                      <a:r>
-                        <a:rPr lang="en-US" dirty="0" err="1"/>
-                        <a:t>inconsistente</a:t>
+                        <a:rPr lang="en-US"/>
+                        <a:t>desempenho inconsistente</a:t>
                       </a:r>
                       <a:endParaRPr lang="pt-PT" noProof="0" dirty="0"/>
                     </a:p>
@@ -35813,7 +36026,7 @@
                       </a:pPr>
                       <a:r>
                         <a:rPr lang="pt-PT" noProof="0" dirty="0"/>
-                        <a:t>Qwen3:4B</a:t>
+                        <a:t>qwen3:4b</a:t>
                       </a:r>
                     </a:p>
                   </a:txBody>
@@ -35866,16 +36079,8 @@
                         <a:buNone/>
                       </a:pPr>
                       <a:r>
-                        <a:rPr lang="en-US" dirty="0" err="1"/>
-                        <a:t>desempenho</a:t>
-                      </a:r>
-                      <a:r>
-                        <a:rPr lang="en-US" dirty="0"/>
-                        <a:t> </a:t>
-                      </a:r>
-                      <a:r>
-                        <a:rPr lang="en-US" dirty="0" err="1"/>
-                        <a:t>inconsistente</a:t>
+                        <a:rPr lang="en-US"/>
+                        <a:t>desempenho inconsistente</a:t>
                       </a:r>
                       <a:endParaRPr lang="pt-PT" noProof="0" dirty="0"/>
                     </a:p>
@@ -35937,7 +36142,7 @@
                       </a:pPr>
                       <a:r>
                         <a:rPr lang="pt-PT" noProof="0" dirty="0"/>
-                        <a:t>Gemma3:4B</a:t>
+                        <a:t>gemma3:4b</a:t>
                       </a:r>
                     </a:p>
                   </a:txBody>
@@ -36100,63 +36305,115 @@
           <a:chExt cx="0" cy="0"/>
         </a:xfrm>
       </p:grpSpPr>
-      <p:graphicFrame>
-        <p:nvGraphicFramePr>
-          <p:cNvPr id="4" name="Chart 3">
+      <p:sp>
+        <p:nvSpPr>
+          <p:cNvPr id="2" name="Title 1">
             <a:extLst>
               <a:ext uri="{FF2B5EF4-FFF2-40B4-BE49-F238E27FC236}">
-                <a16:creationId xmlns:a16="http://schemas.microsoft.com/office/drawing/2014/main" id="{AB82888D-CB65-49D5-E631-83F43DA84B38}"/>
+                <a16:creationId xmlns:a16="http://schemas.microsoft.com/office/drawing/2014/main" id="{6EA44777-2026-BA73-E53A-FACD90D32925}"/>
               </a:ext>
             </a:extLst>
           </p:cNvPr>
-          <p:cNvGraphicFramePr/>
+          <p:cNvSpPr>
+            <a:spLocks noGrp="1"/>
+          </p:cNvSpPr>
           <p:nvPr>
-            <p:extLst>
-              <p:ext uri="{D42A27DB-BD31-4B8C-83A1-F6EECF244321}">
-                <p14:modId xmlns:p14="http://schemas.microsoft.com/office/powerpoint/2010/main" val="450060355"/>
-              </p:ext>
-            </p:extLst>
+            <p:ph type="title"/>
           </p:nvPr>
-        </p:nvGraphicFramePr>
-        <p:xfrm>
-          <a:off x="6096000" y="1513993"/>
-          <a:ext cx="5515264" cy="3676843"/>
-        </p:xfrm>
-        <a:graphic>
-          <a:graphicData uri="http://schemas.openxmlformats.org/drawingml/2006/chart">
-            <c:chart xmlns:c="http://schemas.openxmlformats.org/drawingml/2006/chart" xmlns:r="http://schemas.openxmlformats.org/officeDocument/2006/relationships" r:id="rId2"/>
-          </a:graphicData>
-        </a:graphic>
-      </p:graphicFrame>
-      <p:graphicFrame>
-        <p:nvGraphicFramePr>
-          <p:cNvPr id="5" name="Chart 4">
+        </p:nvSpPr>
+        <p:spPr/>
+        <p:txBody>
+          <a:bodyPr/>
+          <a:lstStyle/>
+          <a:p>
+            <a:r>
+              <a:rPr lang="en-US" dirty="0" err="1"/>
+              <a:t>Melhorias</a:t>
+            </a:r>
+            <a:r>
+              <a:rPr lang="en-US" dirty="0"/>
+              <a:t> </a:t>
+            </a:r>
+            <a:r>
+              <a:rPr lang="en-US" dirty="0" err="1"/>
+              <a:t>Implementadas</a:t>
+            </a:r>
+            <a:endParaRPr lang="en-US" dirty="0"/>
+          </a:p>
+        </p:txBody>
+      </p:sp>
+      <p:sp>
+        <p:nvSpPr>
+          <p:cNvPr id="3" name="Content Placeholder 2">
             <a:extLst>
               <a:ext uri="{FF2B5EF4-FFF2-40B4-BE49-F238E27FC236}">
-                <a16:creationId xmlns:a16="http://schemas.microsoft.com/office/drawing/2014/main" id="{B784F5BA-1A3E-8CD8-8B0A-2113BEC790B9}"/>
+                <a16:creationId xmlns:a16="http://schemas.microsoft.com/office/drawing/2014/main" id="{54CABF01-96C9-14E6-01DA-99C6167B2D9E}"/>
               </a:ext>
             </a:extLst>
           </p:cNvPr>
-          <p:cNvGraphicFramePr/>
+          <p:cNvSpPr>
+            <a:spLocks noGrp="1"/>
+          </p:cNvSpPr>
           <p:nvPr>
-            <p:extLst>
-              <p:ext uri="{D42A27DB-BD31-4B8C-83A1-F6EECF244321}">
-                <p14:modId xmlns:p14="http://schemas.microsoft.com/office/powerpoint/2010/main" val="2982913794"/>
-              </p:ext>
-            </p:extLst>
+            <p:ph idx="1"/>
           </p:nvPr>
-        </p:nvGraphicFramePr>
-        <p:xfrm>
-          <a:off x="226291" y="1590578"/>
-          <a:ext cx="5515264" cy="3676843"/>
-        </p:xfrm>
-        <a:graphic>
-          <a:graphicData uri="http://schemas.openxmlformats.org/drawingml/2006/chart">
-            <c:chart xmlns:c="http://schemas.openxmlformats.org/drawingml/2006/chart" xmlns:r="http://schemas.openxmlformats.org/officeDocument/2006/relationships" r:id="rId3"/>
-          </a:graphicData>
-        </a:graphic>
-      </p:graphicFrame>
+        </p:nvSpPr>
+        <p:spPr/>
+        <p:txBody>
+          <a:bodyPr/>
+          <a:lstStyle/>
+          <a:p>
+            <a:r>
+              <a:rPr lang="pt-BR" b="1" dirty="0"/>
+              <a:t>Validação do Formato JSON: </a:t>
+            </a:r>
+          </a:p>
+          <a:p>
+            <a:pPr lvl="1"/>
+            <a:r>
+              <a:rPr lang="pt-BR" dirty="0"/>
+              <a:t>Tentou-se ajustar o formato de output para procurar garantir JSON válido em todos os testes, evitando gráficos de precisão vazios.</a:t>
+            </a:r>
+          </a:p>
+          <a:p>
+            <a:r>
+              <a:rPr lang="pt-BR" b="1" dirty="0"/>
+              <a:t>Redução do Tamanho dos Logs:</a:t>
+            </a:r>
+            <a:r>
+              <a:rPr lang="pt-BR" dirty="0"/>
+              <a:t> </a:t>
+            </a:r>
+          </a:p>
+          <a:p>
+            <a:pPr lvl="1"/>
+            <a:r>
+              <a:rPr lang="pt-BR" dirty="0"/>
+              <a:t>Realizou-se um “trim” das informações irrelevantes dos logs para reduzir a quantidade de texto a processar, procurando-se aumentar a precisão.</a:t>
+            </a:r>
+          </a:p>
+          <a:p>
+            <a:r>
+              <a:rPr lang="pt-BR" b="1" dirty="0"/>
+              <a:t>Implementação Inicial do MCP: </a:t>
+            </a:r>
+          </a:p>
+          <a:p>
+            <a:pPr lvl="1"/>
+            <a:r>
+              <a:rPr lang="pt-BR" dirty="0"/>
+              <a:t>Criou-se uma versão muito inicial do Model Context Protocol, com o objetivo de se facilitar a expansão futura de novas funcionalidades.</a:t>
+            </a:r>
+            <a:endParaRPr lang="en-US" dirty="0"/>
+          </a:p>
+        </p:txBody>
+      </p:sp>
     </p:spTree>
+    <p:extLst>
+      <p:ext uri="{BB962C8B-B14F-4D97-AF65-F5344CB8AC3E}">
+        <p14:creationId xmlns:p14="http://schemas.microsoft.com/office/powerpoint/2010/main" val="2505789841"/>
+      </p:ext>
+    </p:extLst>
   </p:cSld>
   <p:clrMapOvr>
     <a:masterClrMapping/>
@@ -36167,6 +36424,14 @@
 <file path=ppt/slides/slide3.xml><?xml version="1.0" encoding="utf-8"?>
 <p:sld xmlns:a="http://schemas.openxmlformats.org/drawingml/2006/main" xmlns:r="http://schemas.openxmlformats.org/officeDocument/2006/relationships" xmlns:p="http://schemas.openxmlformats.org/presentationml/2006/main">
   <p:cSld>
+    <p:bg>
+      <p:bgPr>
+        <a:solidFill>
+          <a:schemeClr val="bg1"/>
+        </a:solidFill>
+        <a:effectLst/>
+      </p:bgPr>
+    </p:bg>
     <p:spTree>
       <p:nvGrpSpPr>
         <p:cNvPr id="1" name=""/>
@@ -36181,63 +36446,1604 @@
           <a:chExt cx="0" cy="0"/>
         </a:xfrm>
       </p:grpSpPr>
-      <p:graphicFrame>
-        <p:nvGraphicFramePr>
-          <p:cNvPr id="2" name="Chart 1">
+      <p:grpSp>
+        <p:nvGrpSpPr>
+          <p:cNvPr id="7" name="Group 6">
             <a:extLst>
               <a:ext uri="{FF2B5EF4-FFF2-40B4-BE49-F238E27FC236}">
-                <a16:creationId xmlns:a16="http://schemas.microsoft.com/office/drawing/2014/main" id="{C9C78D10-B604-8486-32A0-89938D995A25}"/>
+                <a16:creationId xmlns:a16="http://schemas.microsoft.com/office/drawing/2014/main" id="{28460BD8-AE3F-4AC9-9D0B-717052AA5D3A}"/>
+              </a:ext>
+              <a:ext uri="{C183D7F6-B498-43B3-948B-1728B52AA6E4}">
+                <adec:decorative xmlns:adec="http://schemas.microsoft.com/office/drawing/2017/decorative" val="1"/>
               </a:ext>
             </a:extLst>
           </p:cNvPr>
-          <p:cNvGraphicFramePr/>
+          <p:cNvGrpSpPr>
+            <a:grpSpLocks noGrp="1" noUngrp="1" noRot="1" noChangeAspect="1" noMove="1" noResize="1"/>
+          </p:cNvGrpSpPr>
           <p:nvPr>
             <p:extLst>
-              <p:ext uri="{D42A27DB-BD31-4B8C-83A1-F6EECF244321}">
-                <p14:modId xmlns:p14="http://schemas.microsoft.com/office/powerpoint/2010/main" val="3982600723"/>
+              <p:ext uri="{386F3935-93C4-4BCD-93E2-E3B085C9AB24}">
+                <p16:designElem xmlns:p16="http://schemas.microsoft.com/office/powerpoint/2015/main" val="1"/>
               </p:ext>
             </p:extLst>
           </p:nvPr>
-        </p:nvGraphicFramePr>
-        <p:xfrm>
-          <a:off x="226291" y="1590578"/>
-          <a:ext cx="5515264" cy="3676843"/>
-        </p:xfrm>
-        <a:graphic>
-          <a:graphicData uri="http://schemas.openxmlformats.org/drawingml/2006/chart">
-            <c:chart xmlns:c="http://schemas.openxmlformats.org/drawingml/2006/chart" xmlns:r="http://schemas.openxmlformats.org/officeDocument/2006/relationships" r:id="rId2"/>
-          </a:graphicData>
-        </a:graphic>
-      </p:graphicFrame>
-      <p:graphicFrame>
-        <p:nvGraphicFramePr>
-          <p:cNvPr id="4" name="Chart 3">
+        </p:nvGrpSpPr>
+        <p:grpSpPr>
+          <a:xfrm>
+            <a:off x="0" y="-8467"/>
+            <a:ext cx="12192000" cy="6866467"/>
+            <a:chOff x="0" y="-8467"/>
+            <a:chExt cx="12192000" cy="6866467"/>
+          </a:xfrm>
+        </p:grpSpPr>
+        <p:cxnSp>
+          <p:nvCxnSpPr>
+            <p:cNvPr id="8" name="Straight Connector 7">
+              <a:extLst>
+                <a:ext uri="{FF2B5EF4-FFF2-40B4-BE49-F238E27FC236}">
+                  <a16:creationId xmlns:a16="http://schemas.microsoft.com/office/drawing/2014/main" id="{54420CFE-F482-466E-9E1E-C78513C0B85D}"/>
+                </a:ext>
+                <a:ext uri="{C183D7F6-B498-43B3-948B-1728B52AA6E4}">
+                  <adec:decorative xmlns:adec="http://schemas.microsoft.com/office/drawing/2017/decorative" val="1"/>
+                </a:ext>
+              </a:extLst>
+            </p:cNvPr>
+            <p:cNvCxnSpPr/>
+            <p:nvPr>
+              <p:extLst>
+                <p:ext uri="{386F3935-93C4-4BCD-93E2-E3B085C9AB24}">
+                  <p16:designElem xmlns:p16="http://schemas.microsoft.com/office/powerpoint/2015/main" val="1"/>
+                </p:ext>
+              </p:extLst>
+            </p:nvPr>
+          </p:nvCxnSpPr>
+          <p:spPr>
+            <a:xfrm>
+              <a:off x="9371012" y="0"/>
+              <a:ext cx="1219200" cy="6858000"/>
+            </a:xfrm>
+            <a:prstGeom prst="line">
+              <a:avLst/>
+            </a:prstGeom>
+            <a:ln w="9525">
+              <a:solidFill>
+                <a:schemeClr val="bg1">
+                  <a:lumMod val="75000"/>
+                </a:schemeClr>
+              </a:solidFill>
+            </a:ln>
+          </p:spPr>
+          <p:style>
+            <a:lnRef idx="2">
+              <a:schemeClr val="accent1"/>
+            </a:lnRef>
+            <a:fillRef idx="0">
+              <a:schemeClr val="accent1"/>
+            </a:fillRef>
+            <a:effectRef idx="1">
+              <a:schemeClr val="accent1"/>
+            </a:effectRef>
+            <a:fontRef idx="minor">
+              <a:schemeClr val="tx1"/>
+            </a:fontRef>
+          </p:style>
+        </p:cxnSp>
+        <p:cxnSp>
+          <p:nvCxnSpPr>
+            <p:cNvPr id="9" name="Straight Connector 8">
+              <a:extLst>
+                <a:ext uri="{FF2B5EF4-FFF2-40B4-BE49-F238E27FC236}">
+                  <a16:creationId xmlns:a16="http://schemas.microsoft.com/office/drawing/2014/main" id="{5331032B-BD21-4BDA-920C-12E358052567}"/>
+                </a:ext>
+                <a:ext uri="{C183D7F6-B498-43B3-948B-1728B52AA6E4}">
+                  <adec:decorative xmlns:adec="http://schemas.microsoft.com/office/drawing/2017/decorative" val="1"/>
+                </a:ext>
+              </a:extLst>
+            </p:cNvPr>
+            <p:cNvCxnSpPr/>
+            <p:nvPr>
+              <p:extLst>
+                <p:ext uri="{386F3935-93C4-4BCD-93E2-E3B085C9AB24}">
+                  <p16:designElem xmlns:p16="http://schemas.microsoft.com/office/powerpoint/2015/main" val="1"/>
+                </p:ext>
+              </p:extLst>
+            </p:nvPr>
+          </p:nvCxnSpPr>
+          <p:spPr>
+            <a:xfrm flipH="1">
+              <a:off x="7425267" y="3681413"/>
+              <a:ext cx="4763558" cy="3176587"/>
+            </a:xfrm>
+            <a:prstGeom prst="line">
+              <a:avLst/>
+            </a:prstGeom>
+            <a:ln w="9525">
+              <a:solidFill>
+                <a:schemeClr val="bg1">
+                  <a:lumMod val="85000"/>
+                </a:schemeClr>
+              </a:solidFill>
+            </a:ln>
+          </p:spPr>
+          <p:style>
+            <a:lnRef idx="2">
+              <a:schemeClr val="accent1"/>
+            </a:lnRef>
+            <a:fillRef idx="0">
+              <a:schemeClr val="accent1"/>
+            </a:fillRef>
+            <a:effectRef idx="1">
+              <a:schemeClr val="accent1"/>
+            </a:effectRef>
+            <a:fontRef idx="minor">
+              <a:schemeClr val="tx1"/>
+            </a:fontRef>
+          </p:style>
+        </p:cxnSp>
+        <p:sp>
+          <p:nvSpPr>
+            <p:cNvPr id="4" name="Rectangle 23">
+              <a:extLst>
+                <a:ext uri="{FF2B5EF4-FFF2-40B4-BE49-F238E27FC236}">
+                  <a16:creationId xmlns:a16="http://schemas.microsoft.com/office/drawing/2014/main" id="{E7514DA3-59E7-409E-8A3B-AD097F6E5644}"/>
+                </a:ext>
+                <a:ext uri="{C183D7F6-B498-43B3-948B-1728B52AA6E4}">
+                  <adec:decorative xmlns:adec="http://schemas.microsoft.com/office/drawing/2017/decorative" val="1"/>
+                </a:ext>
+              </a:extLst>
+            </p:cNvPr>
+            <p:cNvSpPr/>
+            <p:nvPr>
+              <p:extLst>
+                <p:ext uri="{386F3935-93C4-4BCD-93E2-E3B085C9AB24}">
+                  <p16:designElem xmlns:p16="http://schemas.microsoft.com/office/powerpoint/2015/main" val="1"/>
+                </p:ext>
+              </p:extLst>
+            </p:nvPr>
+          </p:nvSpPr>
+          <p:spPr>
+            <a:xfrm>
+              <a:off x="9181476" y="-8467"/>
+              <a:ext cx="3007349" cy="6866467"/>
+            </a:xfrm>
+            <a:custGeom>
+              <a:avLst/>
+              <a:gdLst/>
+              <a:ahLst/>
+              <a:cxnLst/>
+              <a:rect l="l" t="t" r="r" b="b"/>
+              <a:pathLst>
+                <a:path w="3007349" h="6866467">
+                  <a:moveTo>
+                    <a:pt x="2045532" y="0"/>
+                  </a:moveTo>
+                  <a:lnTo>
+                    <a:pt x="3007349" y="0"/>
+                  </a:lnTo>
+                  <a:lnTo>
+                    <a:pt x="3007349" y="6866467"/>
+                  </a:lnTo>
+                  <a:lnTo>
+                    <a:pt x="0" y="6866467"/>
+                  </a:lnTo>
+                  <a:lnTo>
+                    <a:pt x="2045532" y="0"/>
+                  </a:lnTo>
+                  <a:close/>
+                </a:path>
+              </a:pathLst>
+            </a:custGeom>
+            <a:solidFill>
+              <a:schemeClr val="accent1">
+                <a:alpha val="30000"/>
+              </a:schemeClr>
+            </a:solidFill>
+            <a:ln>
+              <a:noFill/>
+            </a:ln>
+            <a:effectLst/>
+          </p:spPr>
+          <p:style>
+            <a:lnRef idx="1">
+              <a:schemeClr val="accent1"/>
+            </a:lnRef>
+            <a:fillRef idx="3">
+              <a:schemeClr val="accent1"/>
+            </a:fillRef>
+            <a:effectRef idx="2">
+              <a:schemeClr val="accent1"/>
+            </a:effectRef>
+            <a:fontRef idx="minor">
+              <a:schemeClr val="lt1"/>
+            </a:fontRef>
+          </p:style>
+          <p:txBody>
+            <a:bodyPr/>
+            <a:lstStyle/>
+            <a:p>
+              <a:endParaRPr lang="en-US"/>
+            </a:p>
+          </p:txBody>
+        </p:sp>
+        <p:sp>
+          <p:nvSpPr>
+            <p:cNvPr id="5" name="Rectangle 25">
+              <a:extLst>
+                <a:ext uri="{FF2B5EF4-FFF2-40B4-BE49-F238E27FC236}">
+                  <a16:creationId xmlns:a16="http://schemas.microsoft.com/office/drawing/2014/main" id="{57B9A2A6-3BE4-4599-9364-F71C5BFD61F8}"/>
+                </a:ext>
+                <a:ext uri="{C183D7F6-B498-43B3-948B-1728B52AA6E4}">
+                  <adec:decorative xmlns:adec="http://schemas.microsoft.com/office/drawing/2017/decorative" val="1"/>
+                </a:ext>
+              </a:extLst>
+            </p:cNvPr>
+            <p:cNvSpPr/>
+            <p:nvPr>
+              <p:extLst>
+                <p:ext uri="{386F3935-93C4-4BCD-93E2-E3B085C9AB24}">
+                  <p16:designElem xmlns:p16="http://schemas.microsoft.com/office/powerpoint/2015/main" val="1"/>
+                </p:ext>
+              </p:extLst>
+            </p:nvPr>
+          </p:nvSpPr>
+          <p:spPr>
+            <a:xfrm>
+              <a:off x="9603442" y="-8467"/>
+              <a:ext cx="2588558" cy="6866467"/>
+            </a:xfrm>
+            <a:custGeom>
+              <a:avLst/>
+              <a:gdLst/>
+              <a:ahLst/>
+              <a:cxnLst/>
+              <a:rect l="l" t="t" r="r" b="b"/>
+              <a:pathLst>
+                <a:path w="2573311" h="6866467">
+                  <a:moveTo>
+                    <a:pt x="0" y="0"/>
+                  </a:moveTo>
+                  <a:lnTo>
+                    <a:pt x="2573311" y="0"/>
+                  </a:lnTo>
+                  <a:lnTo>
+                    <a:pt x="2573311" y="6866467"/>
+                  </a:lnTo>
+                  <a:lnTo>
+                    <a:pt x="1202336" y="6866467"/>
+                  </a:lnTo>
+                  <a:lnTo>
+                    <a:pt x="0" y="0"/>
+                  </a:lnTo>
+                  <a:close/>
+                </a:path>
+              </a:pathLst>
+            </a:custGeom>
+            <a:solidFill>
+              <a:schemeClr val="accent1">
+                <a:alpha val="20000"/>
+              </a:schemeClr>
+            </a:solidFill>
+            <a:ln>
+              <a:noFill/>
+            </a:ln>
+            <a:effectLst/>
+          </p:spPr>
+          <p:style>
+            <a:lnRef idx="1">
+              <a:schemeClr val="accent1"/>
+            </a:lnRef>
+            <a:fillRef idx="3">
+              <a:schemeClr val="accent1"/>
+            </a:fillRef>
+            <a:effectRef idx="2">
+              <a:schemeClr val="accent1"/>
+            </a:effectRef>
+            <a:fontRef idx="minor">
+              <a:schemeClr val="lt1"/>
+            </a:fontRef>
+          </p:style>
+          <p:txBody>
+            <a:bodyPr/>
+            <a:lstStyle/>
+            <a:p>
+              <a:endParaRPr lang="en-US"/>
+            </a:p>
+          </p:txBody>
+        </p:sp>
+        <p:sp>
+          <p:nvSpPr>
+            <p:cNvPr id="6" name="Isosceles Triangle 5">
+              <a:extLst>
+                <a:ext uri="{FF2B5EF4-FFF2-40B4-BE49-F238E27FC236}">
+                  <a16:creationId xmlns:a16="http://schemas.microsoft.com/office/drawing/2014/main" id="{4FD744C6-4ED8-4BC9-BF68-6BDF701C5DB4}"/>
+                </a:ext>
+                <a:ext uri="{C183D7F6-B498-43B3-948B-1728B52AA6E4}">
+                  <adec:decorative xmlns:adec="http://schemas.microsoft.com/office/drawing/2017/decorative" val="1"/>
+                </a:ext>
+              </a:extLst>
+            </p:cNvPr>
+            <p:cNvSpPr/>
+            <p:nvPr>
+              <p:extLst>
+                <p:ext uri="{386F3935-93C4-4BCD-93E2-E3B085C9AB24}">
+                  <p16:designElem xmlns:p16="http://schemas.microsoft.com/office/powerpoint/2015/main" val="1"/>
+                </p:ext>
+              </p:extLst>
+            </p:nvPr>
+          </p:nvSpPr>
+          <p:spPr>
+            <a:xfrm>
+              <a:off x="8932333" y="3048000"/>
+              <a:ext cx="3259667" cy="3810000"/>
+            </a:xfrm>
+            <a:prstGeom prst="triangle">
+              <a:avLst>
+                <a:gd name="adj" fmla="val 100000"/>
+              </a:avLst>
+            </a:prstGeom>
+            <a:solidFill>
+              <a:schemeClr val="accent2">
+                <a:alpha val="72000"/>
+              </a:schemeClr>
+            </a:solidFill>
+            <a:ln>
+              <a:noFill/>
+            </a:ln>
+            <a:effectLst/>
+          </p:spPr>
+          <p:style>
+            <a:lnRef idx="1">
+              <a:schemeClr val="accent1"/>
+            </a:lnRef>
+            <a:fillRef idx="3">
+              <a:schemeClr val="accent1"/>
+            </a:fillRef>
+            <a:effectRef idx="2">
+              <a:schemeClr val="accent1"/>
+            </a:effectRef>
+            <a:fontRef idx="minor">
+              <a:schemeClr val="lt1"/>
+            </a:fontRef>
+          </p:style>
+          <p:txBody>
+            <a:bodyPr/>
+            <a:lstStyle/>
+            <a:p>
+              <a:endParaRPr lang="en-US"/>
+            </a:p>
+          </p:txBody>
+        </p:sp>
+        <p:sp>
+          <p:nvSpPr>
+            <p:cNvPr id="18" name="Rectangle 27">
+              <a:extLst>
+                <a:ext uri="{FF2B5EF4-FFF2-40B4-BE49-F238E27FC236}">
+                  <a16:creationId xmlns:a16="http://schemas.microsoft.com/office/drawing/2014/main" id="{092C5BAD-C911-4F8F-A1C5-470268BE668B}"/>
+                </a:ext>
+                <a:ext uri="{C183D7F6-B498-43B3-948B-1728B52AA6E4}">
+                  <adec:decorative xmlns:adec="http://schemas.microsoft.com/office/drawing/2017/decorative" val="1"/>
+                </a:ext>
+              </a:extLst>
+            </p:cNvPr>
+            <p:cNvSpPr/>
+            <p:nvPr>
+              <p:extLst>
+                <p:ext uri="{386F3935-93C4-4BCD-93E2-E3B085C9AB24}">
+                  <p16:designElem xmlns:p16="http://schemas.microsoft.com/office/powerpoint/2015/main" val="1"/>
+                </p:ext>
+              </p:extLst>
+            </p:nvPr>
+          </p:nvSpPr>
+          <p:spPr>
+            <a:xfrm>
+              <a:off x="9334500" y="-8467"/>
+              <a:ext cx="2854326" cy="6866467"/>
+            </a:xfrm>
+            <a:custGeom>
+              <a:avLst/>
+              <a:gdLst/>
+              <a:ahLst/>
+              <a:cxnLst/>
+              <a:rect l="l" t="t" r="r" b="b"/>
+              <a:pathLst>
+                <a:path w="2858013" h="6866467">
+                  <a:moveTo>
+                    <a:pt x="0" y="0"/>
+                  </a:moveTo>
+                  <a:lnTo>
+                    <a:pt x="2858013" y="0"/>
+                  </a:lnTo>
+                  <a:lnTo>
+                    <a:pt x="2858013" y="6866467"/>
+                  </a:lnTo>
+                  <a:lnTo>
+                    <a:pt x="2473942" y="6866467"/>
+                  </a:lnTo>
+                  <a:lnTo>
+                    <a:pt x="0" y="0"/>
+                  </a:lnTo>
+                  <a:close/>
+                </a:path>
+              </a:pathLst>
+            </a:custGeom>
+            <a:solidFill>
+              <a:schemeClr val="accent2">
+                <a:lumMod val="75000"/>
+                <a:alpha val="70000"/>
+              </a:schemeClr>
+            </a:solidFill>
+            <a:ln>
+              <a:noFill/>
+            </a:ln>
+            <a:effectLst/>
+          </p:spPr>
+          <p:style>
+            <a:lnRef idx="1">
+              <a:schemeClr val="accent1"/>
+            </a:lnRef>
+            <a:fillRef idx="3">
+              <a:schemeClr val="accent1"/>
+            </a:fillRef>
+            <a:effectRef idx="2">
+              <a:schemeClr val="accent1"/>
+            </a:effectRef>
+            <a:fontRef idx="minor">
+              <a:schemeClr val="lt1"/>
+            </a:fontRef>
+          </p:style>
+          <p:txBody>
+            <a:bodyPr/>
+            <a:lstStyle/>
+            <a:p>
+              <a:endParaRPr lang="en-US"/>
+            </a:p>
+          </p:txBody>
+        </p:sp>
+        <p:sp>
+          <p:nvSpPr>
+            <p:cNvPr id="20" name="Rectangle 28">
+              <a:extLst>
+                <a:ext uri="{FF2B5EF4-FFF2-40B4-BE49-F238E27FC236}">
+                  <a16:creationId xmlns:a16="http://schemas.microsoft.com/office/drawing/2014/main" id="{B133D0C8-4EC4-424F-8E70-0482D5B1B653}"/>
+                </a:ext>
+                <a:ext uri="{C183D7F6-B498-43B3-948B-1728B52AA6E4}">
+                  <adec:decorative xmlns:adec="http://schemas.microsoft.com/office/drawing/2017/decorative" val="1"/>
+                </a:ext>
+              </a:extLst>
+            </p:cNvPr>
+            <p:cNvSpPr/>
+            <p:nvPr>
+              <p:extLst>
+                <p:ext uri="{386F3935-93C4-4BCD-93E2-E3B085C9AB24}">
+                  <p16:designElem xmlns:p16="http://schemas.microsoft.com/office/powerpoint/2015/main" val="1"/>
+                </p:ext>
+              </p:extLst>
+            </p:nvPr>
+          </p:nvSpPr>
+          <p:spPr>
+            <a:xfrm>
+              <a:off x="10898730" y="-8467"/>
+              <a:ext cx="1290094" cy="6866467"/>
+            </a:xfrm>
+            <a:custGeom>
+              <a:avLst/>
+              <a:gdLst/>
+              <a:ahLst/>
+              <a:cxnLst/>
+              <a:rect l="l" t="t" r="r" b="b"/>
+              <a:pathLst>
+                <a:path w="1290094" h="6858000">
+                  <a:moveTo>
+                    <a:pt x="1019735" y="0"/>
+                  </a:moveTo>
+                  <a:lnTo>
+                    <a:pt x="1290094" y="0"/>
+                  </a:lnTo>
+                  <a:lnTo>
+                    <a:pt x="1290094" y="6858000"/>
+                  </a:lnTo>
+                  <a:lnTo>
+                    <a:pt x="0" y="6858000"/>
+                  </a:lnTo>
+                  <a:lnTo>
+                    <a:pt x="1019735" y="0"/>
+                  </a:lnTo>
+                  <a:close/>
+                </a:path>
+              </a:pathLst>
+            </a:custGeom>
+            <a:solidFill>
+              <a:schemeClr val="accent1">
+                <a:lumMod val="60000"/>
+                <a:lumOff val="40000"/>
+                <a:alpha val="70000"/>
+              </a:schemeClr>
+            </a:solidFill>
+            <a:ln>
+              <a:noFill/>
+            </a:ln>
+            <a:effectLst/>
+          </p:spPr>
+          <p:style>
+            <a:lnRef idx="1">
+              <a:schemeClr val="accent1"/>
+            </a:lnRef>
+            <a:fillRef idx="3">
+              <a:schemeClr val="accent1"/>
+            </a:fillRef>
+            <a:effectRef idx="2">
+              <a:schemeClr val="accent1"/>
+            </a:effectRef>
+            <a:fontRef idx="minor">
+              <a:schemeClr val="lt1"/>
+            </a:fontRef>
+          </p:style>
+          <p:txBody>
+            <a:bodyPr/>
+            <a:lstStyle/>
+            <a:p>
+              <a:endParaRPr lang="en-US"/>
+            </a:p>
+          </p:txBody>
+        </p:sp>
+        <p:sp>
+          <p:nvSpPr>
+            <p:cNvPr id="22" name="Rectangle 29">
+              <a:extLst>
+                <a:ext uri="{FF2B5EF4-FFF2-40B4-BE49-F238E27FC236}">
+                  <a16:creationId xmlns:a16="http://schemas.microsoft.com/office/drawing/2014/main" id="{7B1532A0-F4B3-4DE8-B18F-740CAAD25AC4}"/>
+                </a:ext>
+                <a:ext uri="{C183D7F6-B498-43B3-948B-1728B52AA6E4}">
+                  <adec:decorative xmlns:adec="http://schemas.microsoft.com/office/drawing/2017/decorative" val="1"/>
+                </a:ext>
+              </a:extLst>
+            </p:cNvPr>
+            <p:cNvSpPr/>
+            <p:nvPr>
+              <p:extLst>
+                <p:ext uri="{386F3935-93C4-4BCD-93E2-E3B085C9AB24}">
+                  <p16:designElem xmlns:p16="http://schemas.microsoft.com/office/powerpoint/2015/main" val="1"/>
+                </p:ext>
+              </p:extLst>
+            </p:nvPr>
+          </p:nvSpPr>
+          <p:spPr>
+            <a:xfrm>
+              <a:off x="10938999" y="-8467"/>
+              <a:ext cx="1249825" cy="6866467"/>
+            </a:xfrm>
+            <a:custGeom>
+              <a:avLst/>
+              <a:gdLst/>
+              <a:ahLst/>
+              <a:cxnLst/>
+              <a:rect l="l" t="t" r="r" b="b"/>
+              <a:pathLst>
+                <a:path w="1249825" h="6858000">
+                  <a:moveTo>
+                    <a:pt x="0" y="0"/>
+                  </a:moveTo>
+                  <a:lnTo>
+                    <a:pt x="1249825" y="0"/>
+                  </a:lnTo>
+                  <a:lnTo>
+                    <a:pt x="1249825" y="6858000"/>
+                  </a:lnTo>
+                  <a:lnTo>
+                    <a:pt x="1109382" y="6858000"/>
+                  </a:lnTo>
+                  <a:lnTo>
+                    <a:pt x="0" y="0"/>
+                  </a:lnTo>
+                  <a:close/>
+                </a:path>
+              </a:pathLst>
+            </a:custGeom>
+            <a:solidFill>
+              <a:schemeClr val="accent1">
+                <a:alpha val="65000"/>
+              </a:schemeClr>
+            </a:solidFill>
+            <a:ln>
+              <a:noFill/>
+            </a:ln>
+            <a:effectLst/>
+          </p:spPr>
+          <p:style>
+            <a:lnRef idx="1">
+              <a:schemeClr val="accent1"/>
+            </a:lnRef>
+            <a:fillRef idx="3">
+              <a:schemeClr val="accent1"/>
+            </a:fillRef>
+            <a:effectRef idx="2">
+              <a:schemeClr val="accent1"/>
+            </a:effectRef>
+            <a:fontRef idx="minor">
+              <a:schemeClr val="lt1"/>
+            </a:fontRef>
+          </p:style>
+          <p:txBody>
+            <a:bodyPr/>
+            <a:lstStyle/>
+            <a:p>
+              <a:endParaRPr lang="en-US"/>
+            </a:p>
+          </p:txBody>
+        </p:sp>
+        <p:sp>
+          <p:nvSpPr>
+            <p:cNvPr id="24" name="Isosceles Triangle 23">
+              <a:extLst>
+                <a:ext uri="{FF2B5EF4-FFF2-40B4-BE49-F238E27FC236}">
+                  <a16:creationId xmlns:a16="http://schemas.microsoft.com/office/drawing/2014/main" id="{8EFDD162-BBBA-4062-8BBF-53DBA1091374}"/>
+                </a:ext>
+                <a:ext uri="{C183D7F6-B498-43B3-948B-1728B52AA6E4}">
+                  <adec:decorative xmlns:adec="http://schemas.microsoft.com/office/drawing/2017/decorative" val="1"/>
+                </a:ext>
+              </a:extLst>
+            </p:cNvPr>
+            <p:cNvSpPr/>
+            <p:nvPr>
+              <p:extLst>
+                <p:ext uri="{386F3935-93C4-4BCD-93E2-E3B085C9AB24}">
+                  <p16:designElem xmlns:p16="http://schemas.microsoft.com/office/powerpoint/2015/main" val="1"/>
+                </p:ext>
+              </p:extLst>
+            </p:nvPr>
+          </p:nvSpPr>
+          <p:spPr>
+            <a:xfrm>
+              <a:off x="10371666" y="3589867"/>
+              <a:ext cx="1817159" cy="3268133"/>
+            </a:xfrm>
+            <a:prstGeom prst="triangle">
+              <a:avLst>
+                <a:gd name="adj" fmla="val 100000"/>
+              </a:avLst>
+            </a:prstGeom>
+            <a:solidFill>
+              <a:schemeClr val="accent1">
+                <a:alpha val="80000"/>
+              </a:schemeClr>
+            </a:solidFill>
+            <a:ln>
+              <a:noFill/>
+            </a:ln>
+            <a:effectLst/>
+          </p:spPr>
+          <p:style>
+            <a:lnRef idx="1">
+              <a:schemeClr val="accent1"/>
+            </a:lnRef>
+            <a:fillRef idx="3">
+              <a:schemeClr val="accent1"/>
+            </a:fillRef>
+            <a:effectRef idx="2">
+              <a:schemeClr val="accent1"/>
+            </a:effectRef>
+            <a:fontRef idx="minor">
+              <a:schemeClr val="lt1"/>
+            </a:fontRef>
+          </p:style>
+          <p:txBody>
+            <a:bodyPr/>
+            <a:lstStyle/>
+            <a:p>
+              <a:endParaRPr lang="en-US"/>
+            </a:p>
+          </p:txBody>
+        </p:sp>
+        <p:sp>
+          <p:nvSpPr>
+            <p:cNvPr id="26" name="Isosceles Triangle 25">
+              <a:extLst>
+                <a:ext uri="{FF2B5EF4-FFF2-40B4-BE49-F238E27FC236}">
+                  <a16:creationId xmlns:a16="http://schemas.microsoft.com/office/drawing/2014/main" id="{DCFC9E65-3E19-4483-B952-25D29683CA56}"/>
+                </a:ext>
+                <a:ext uri="{C183D7F6-B498-43B3-948B-1728B52AA6E4}">
+                  <adec:decorative xmlns:adec="http://schemas.microsoft.com/office/drawing/2017/decorative" val="1"/>
+                </a:ext>
+              </a:extLst>
+            </p:cNvPr>
+            <p:cNvSpPr/>
+            <p:nvPr>
+              <p:extLst>
+                <p:ext uri="{386F3935-93C4-4BCD-93E2-E3B085C9AB24}">
+                  <p16:designElem xmlns:p16="http://schemas.microsoft.com/office/powerpoint/2015/main" val="1"/>
+                </p:ext>
+              </p:extLst>
+            </p:nvPr>
+          </p:nvSpPr>
+          <p:spPr>
+            <a:xfrm rot="10800000">
+              <a:off x="0" y="0"/>
+              <a:ext cx="842596" cy="5666154"/>
+            </a:xfrm>
+            <a:prstGeom prst="triangle">
+              <a:avLst>
+                <a:gd name="adj" fmla="val 100000"/>
+              </a:avLst>
+            </a:prstGeom>
+            <a:solidFill>
+              <a:schemeClr val="accent1">
+                <a:alpha val="85000"/>
+              </a:schemeClr>
+            </a:solidFill>
+            <a:ln>
+              <a:noFill/>
+            </a:ln>
+            <a:effectLst/>
+          </p:spPr>
+          <p:style>
+            <a:lnRef idx="1">
+              <a:schemeClr val="accent1"/>
+            </a:lnRef>
+            <a:fillRef idx="3">
+              <a:schemeClr val="accent1"/>
+            </a:fillRef>
+            <a:effectRef idx="2">
+              <a:schemeClr val="accent1"/>
+            </a:effectRef>
+            <a:fontRef idx="minor">
+              <a:schemeClr val="lt1"/>
+            </a:fontRef>
+          </p:style>
+          <p:txBody>
+            <a:bodyPr/>
+            <a:lstStyle/>
+            <a:p>
+              <a:endParaRPr lang="en-US"/>
+            </a:p>
+          </p:txBody>
+        </p:sp>
+      </p:grpSp>
+      <p:sp useBgFill="1">
+        <p:nvSpPr>
+          <p:cNvPr id="19" name="Rectangle 18">
             <a:extLst>
               <a:ext uri="{FF2B5EF4-FFF2-40B4-BE49-F238E27FC236}">
-                <a16:creationId xmlns:a16="http://schemas.microsoft.com/office/drawing/2014/main" id="{318316B1-94F1-5CE3-054A-10EC14774194}"/>
+                <a16:creationId xmlns:a16="http://schemas.microsoft.com/office/drawing/2014/main" id="{9179DE42-5613-4B35-A1E6-6CCBAA13C743}"/>
+              </a:ext>
+              <a:ext uri="{C183D7F6-B498-43B3-948B-1728B52AA6E4}">
+                <adec:decorative xmlns:adec="http://schemas.microsoft.com/office/drawing/2017/decorative" val="1"/>
               </a:ext>
             </a:extLst>
           </p:cNvPr>
-          <p:cNvGraphicFramePr/>
+          <p:cNvSpPr>
+            <a:spLocks noGrp="1" noRot="1" noChangeAspect="1" noMove="1" noResize="1" noEditPoints="1" noAdjustHandles="1" noChangeArrowheads="1" noChangeShapeType="1" noTextEdit="1"/>
+          </p:cNvSpPr>
           <p:nvPr>
             <p:extLst>
-              <p:ext uri="{D42A27DB-BD31-4B8C-83A1-F6EECF244321}">
-                <p14:modId xmlns:p14="http://schemas.microsoft.com/office/powerpoint/2010/main" val="1610725184"/>
+              <p:ext uri="{386F3935-93C4-4BCD-93E2-E3B085C9AB24}">
+                <p16:designElem xmlns:p16="http://schemas.microsoft.com/office/powerpoint/2015/main" val="1"/>
               </p:ext>
             </p:extLst>
           </p:nvPr>
-        </p:nvGraphicFramePr>
-        <p:xfrm>
-          <a:off x="6096000" y="1513993"/>
-          <a:ext cx="5515264" cy="3676843"/>
-        </p:xfrm>
-        <a:graphic>
-          <a:graphicData uri="http://schemas.openxmlformats.org/drawingml/2006/chart">
-            <c:chart xmlns:c="http://schemas.openxmlformats.org/drawingml/2006/chart" xmlns:r="http://schemas.openxmlformats.org/officeDocument/2006/relationships" r:id="rId3"/>
-          </a:graphicData>
-        </a:graphic>
-      </p:graphicFrame>
+        </p:nvSpPr>
+        <p:spPr>
+          <a:xfrm flipH="1">
+            <a:off x="0" y="0"/>
+            <a:ext cx="12192000" cy="6858000"/>
+          </a:xfrm>
+          <a:prstGeom prst="rect">
+            <a:avLst/>
+          </a:prstGeom>
+          <a:ln>
+            <a:noFill/>
+          </a:ln>
+        </p:spPr>
+        <p:style>
+          <a:lnRef idx="2">
+            <a:schemeClr val="accent1">
+              <a:shade val="50000"/>
+            </a:schemeClr>
+          </a:lnRef>
+          <a:fillRef idx="1">
+            <a:schemeClr val="accent1"/>
+          </a:fillRef>
+          <a:effectRef idx="0">
+            <a:schemeClr val="accent1"/>
+          </a:effectRef>
+          <a:fontRef idx="minor">
+            <a:schemeClr val="lt1"/>
+          </a:fontRef>
+        </p:style>
+        <p:txBody>
+          <a:bodyPr rtlCol="0" anchor="ctr"/>
+          <a:lstStyle/>
+          <a:p>
+            <a:pPr algn="ctr"/>
+            <a:endParaRPr lang="en-US"/>
+          </a:p>
+        </p:txBody>
+      </p:sp>
+      <p:cxnSp>
+        <p:nvCxnSpPr>
+          <p:cNvPr id="21" name="Straight Connector 20">
+            <a:extLst>
+              <a:ext uri="{FF2B5EF4-FFF2-40B4-BE49-F238E27FC236}">
+                <a16:creationId xmlns:a16="http://schemas.microsoft.com/office/drawing/2014/main" id="{EB898B32-3891-4C3A-8F58-C5969D2E9033}"/>
+              </a:ext>
+              <a:ext uri="{C183D7F6-B498-43B3-948B-1728B52AA6E4}">
+                <adec:decorative xmlns:adec="http://schemas.microsoft.com/office/drawing/2017/decorative" val="1"/>
+              </a:ext>
+            </a:extLst>
+          </p:cNvPr>
+          <p:cNvCxnSpPr>
+            <a:cxnSpLocks noGrp="1" noRot="1" noChangeAspect="1" noMove="1" noResize="1" noEditPoints="1" noAdjustHandles="1" noChangeArrowheads="1" noChangeShapeType="1"/>
+          </p:cNvCxnSpPr>
+          <p:nvPr>
+            <p:extLst>
+              <p:ext uri="{386F3935-93C4-4BCD-93E2-E3B085C9AB24}">
+                <p16:designElem xmlns:p16="http://schemas.microsoft.com/office/powerpoint/2015/main" val="1"/>
+              </p:ext>
+            </p:extLst>
+          </p:nvPr>
+        </p:nvCxnSpPr>
+        <p:spPr>
+          <a:xfrm flipH="1">
+            <a:off x="9524500" y="0"/>
+            <a:ext cx="1219200" cy="6858000"/>
+          </a:xfrm>
+          <a:prstGeom prst="line">
+            <a:avLst/>
+          </a:prstGeom>
+          <a:ln w="9525">
+            <a:solidFill>
+              <a:schemeClr val="accent1">
+                <a:lumMod val="75000"/>
+              </a:schemeClr>
+            </a:solidFill>
+          </a:ln>
+        </p:spPr>
+        <p:style>
+          <a:lnRef idx="2">
+            <a:schemeClr val="accent1"/>
+          </a:lnRef>
+          <a:fillRef idx="0">
+            <a:schemeClr val="accent1"/>
+          </a:fillRef>
+          <a:effectRef idx="1">
+            <a:schemeClr val="accent1"/>
+          </a:effectRef>
+          <a:fontRef idx="minor">
+            <a:schemeClr val="tx1"/>
+          </a:fontRef>
+        </p:style>
+      </p:cxnSp>
+      <p:cxnSp>
+        <p:nvCxnSpPr>
+          <p:cNvPr id="23" name="Straight Connector 22">
+            <a:extLst>
+              <a:ext uri="{FF2B5EF4-FFF2-40B4-BE49-F238E27FC236}">
+                <a16:creationId xmlns:a16="http://schemas.microsoft.com/office/drawing/2014/main" id="{4AE4806D-B8F9-4679-A68A-9BD21C01A301}"/>
+              </a:ext>
+              <a:ext uri="{C183D7F6-B498-43B3-948B-1728B52AA6E4}">
+                <adec:decorative xmlns:adec="http://schemas.microsoft.com/office/drawing/2017/decorative" val="1"/>
+              </a:ext>
+            </a:extLst>
+          </p:cNvPr>
+          <p:cNvCxnSpPr>
+            <a:cxnSpLocks noGrp="1" noRot="1" noChangeAspect="1" noMove="1" noResize="1" noEditPoints="1" noAdjustHandles="1" noChangeArrowheads="1" noChangeShapeType="1"/>
+          </p:cNvCxnSpPr>
+          <p:nvPr>
+            <p:extLst>
+              <p:ext uri="{386F3935-93C4-4BCD-93E2-E3B085C9AB24}">
+                <p16:designElem xmlns:p16="http://schemas.microsoft.com/office/powerpoint/2015/main" val="1"/>
+              </p:ext>
+            </p:extLst>
+          </p:nvPr>
+        </p:nvCxnSpPr>
+        <p:spPr>
+          <a:xfrm>
+            <a:off x="7361267" y="3681413"/>
+            <a:ext cx="4763558" cy="3176587"/>
+          </a:xfrm>
+          <a:prstGeom prst="line">
+            <a:avLst/>
+          </a:prstGeom>
+          <a:ln w="9525">
+            <a:solidFill>
+              <a:schemeClr val="tx1">
+                <a:lumMod val="50000"/>
+                <a:lumOff val="50000"/>
+                <a:alpha val="80000"/>
+              </a:schemeClr>
+            </a:solidFill>
+          </a:ln>
+        </p:spPr>
+        <p:style>
+          <a:lnRef idx="2">
+            <a:schemeClr val="accent1"/>
+          </a:lnRef>
+          <a:fillRef idx="0">
+            <a:schemeClr val="accent1"/>
+          </a:fillRef>
+          <a:effectRef idx="1">
+            <a:schemeClr val="accent1"/>
+          </a:effectRef>
+          <a:fontRef idx="minor">
+            <a:schemeClr val="tx1"/>
+          </a:fontRef>
+        </p:style>
+      </p:cxnSp>
+      <p:sp>
+        <p:nvSpPr>
+          <p:cNvPr id="25" name="Rectangle 23">
+            <a:extLst>
+              <a:ext uri="{FF2B5EF4-FFF2-40B4-BE49-F238E27FC236}">
+                <a16:creationId xmlns:a16="http://schemas.microsoft.com/office/drawing/2014/main" id="{52FB45E9-914E-4471-AC87-E475CD51767D}"/>
+              </a:ext>
+              <a:ext uri="{C183D7F6-B498-43B3-948B-1728B52AA6E4}">
+                <adec:decorative xmlns:adec="http://schemas.microsoft.com/office/drawing/2017/decorative" val="1"/>
+              </a:ext>
+            </a:extLst>
+          </p:cNvPr>
+          <p:cNvSpPr>
+            <a:spLocks noGrp="1" noRot="1" noChangeAspect="1" noMove="1" noResize="1" noEditPoints="1" noAdjustHandles="1" noChangeArrowheads="1" noChangeShapeType="1" noTextEdit="1"/>
+          </p:cNvSpPr>
+          <p:nvPr>
+            <p:extLst>
+              <p:ext uri="{386F3935-93C4-4BCD-93E2-E3B085C9AB24}">
+                <p16:designElem xmlns:p16="http://schemas.microsoft.com/office/powerpoint/2015/main" val="1"/>
+              </p:ext>
+            </p:extLst>
+          </p:nvPr>
+        </p:nvSpPr>
+        <p:spPr>
+          <a:xfrm flipH="1">
+            <a:off x="7925887" y="-8467"/>
+            <a:ext cx="3007349" cy="6866467"/>
+          </a:xfrm>
+          <a:custGeom>
+            <a:avLst/>
+            <a:gdLst/>
+            <a:ahLst/>
+            <a:cxnLst/>
+            <a:rect l="l" t="t" r="r" b="b"/>
+            <a:pathLst>
+              <a:path w="3007349" h="6866467">
+                <a:moveTo>
+                  <a:pt x="2045532" y="0"/>
+                </a:moveTo>
+                <a:lnTo>
+                  <a:pt x="3007349" y="0"/>
+                </a:lnTo>
+                <a:lnTo>
+                  <a:pt x="3007349" y="6866467"/>
+                </a:lnTo>
+                <a:lnTo>
+                  <a:pt x="0" y="6866467"/>
+                </a:lnTo>
+                <a:lnTo>
+                  <a:pt x="2045532" y="0"/>
+                </a:lnTo>
+                <a:close/>
+              </a:path>
+            </a:pathLst>
+          </a:custGeom>
+          <a:solidFill>
+            <a:schemeClr val="accent1">
+              <a:alpha val="30000"/>
+            </a:schemeClr>
+          </a:solidFill>
+          <a:ln>
+            <a:noFill/>
+          </a:ln>
+          <a:effectLst/>
+        </p:spPr>
+        <p:style>
+          <a:lnRef idx="1">
+            <a:schemeClr val="accent1"/>
+          </a:lnRef>
+          <a:fillRef idx="3">
+            <a:schemeClr val="accent1"/>
+          </a:fillRef>
+          <a:effectRef idx="2">
+            <a:schemeClr val="accent1"/>
+          </a:effectRef>
+          <a:fontRef idx="minor">
+            <a:schemeClr val="lt1"/>
+          </a:fontRef>
+        </p:style>
+        <p:txBody>
+          <a:bodyPr/>
+          <a:lstStyle/>
+          <a:p>
+            <a:endParaRPr lang="en-US"/>
+          </a:p>
+        </p:txBody>
+      </p:sp>
+      <p:sp>
+        <p:nvSpPr>
+          <p:cNvPr id="27" name="Rectangle 25">
+            <a:extLst>
+              <a:ext uri="{FF2B5EF4-FFF2-40B4-BE49-F238E27FC236}">
+                <a16:creationId xmlns:a16="http://schemas.microsoft.com/office/drawing/2014/main" id="{C310626D-5743-49D4-8F7D-88C4F8F05774}"/>
+              </a:ext>
+              <a:ext uri="{C183D7F6-B498-43B3-948B-1728B52AA6E4}">
+                <adec:decorative xmlns:adec="http://schemas.microsoft.com/office/drawing/2017/decorative" val="1"/>
+              </a:ext>
+            </a:extLst>
+          </p:cNvPr>
+          <p:cNvSpPr>
+            <a:spLocks noGrp="1" noRot="1" noChangeAspect="1" noMove="1" noResize="1" noEditPoints="1" noAdjustHandles="1" noChangeArrowheads="1" noChangeShapeType="1" noTextEdit="1"/>
+          </p:cNvSpPr>
+          <p:nvPr>
+            <p:extLst>
+              <p:ext uri="{386F3935-93C4-4BCD-93E2-E3B085C9AB24}">
+                <p16:designElem xmlns:p16="http://schemas.microsoft.com/office/powerpoint/2015/main" val="1"/>
+              </p:ext>
+            </p:extLst>
+          </p:nvPr>
+        </p:nvSpPr>
+        <p:spPr>
+          <a:xfrm flipH="1">
+            <a:off x="7922712" y="-8467"/>
+            <a:ext cx="2588558" cy="6866467"/>
+          </a:xfrm>
+          <a:custGeom>
+            <a:avLst/>
+            <a:gdLst/>
+            <a:ahLst/>
+            <a:cxnLst/>
+            <a:rect l="l" t="t" r="r" b="b"/>
+            <a:pathLst>
+              <a:path w="2573311" h="6866467">
+                <a:moveTo>
+                  <a:pt x="0" y="0"/>
+                </a:moveTo>
+                <a:lnTo>
+                  <a:pt x="2573311" y="0"/>
+                </a:lnTo>
+                <a:lnTo>
+                  <a:pt x="2573311" y="6866467"/>
+                </a:lnTo>
+                <a:lnTo>
+                  <a:pt x="1202336" y="6866467"/>
+                </a:lnTo>
+                <a:lnTo>
+                  <a:pt x="0" y="0"/>
+                </a:lnTo>
+                <a:close/>
+              </a:path>
+            </a:pathLst>
+          </a:custGeom>
+          <a:solidFill>
+            <a:schemeClr val="accent1">
+              <a:alpha val="20000"/>
+            </a:schemeClr>
+          </a:solidFill>
+          <a:ln>
+            <a:noFill/>
+          </a:ln>
+          <a:effectLst/>
+        </p:spPr>
+        <p:style>
+          <a:lnRef idx="1">
+            <a:schemeClr val="accent1"/>
+          </a:lnRef>
+          <a:fillRef idx="3">
+            <a:schemeClr val="accent1"/>
+          </a:fillRef>
+          <a:effectRef idx="2">
+            <a:schemeClr val="accent1"/>
+          </a:effectRef>
+          <a:fontRef idx="minor">
+            <a:schemeClr val="lt1"/>
+          </a:fontRef>
+        </p:style>
+        <p:txBody>
+          <a:bodyPr/>
+          <a:lstStyle/>
+          <a:p>
+            <a:endParaRPr lang="en-US"/>
+          </a:p>
+        </p:txBody>
+      </p:sp>
+      <p:sp>
+        <p:nvSpPr>
+          <p:cNvPr id="29" name="Isosceles Triangle 28">
+            <a:extLst>
+              <a:ext uri="{FF2B5EF4-FFF2-40B4-BE49-F238E27FC236}">
+                <a16:creationId xmlns:a16="http://schemas.microsoft.com/office/drawing/2014/main" id="{3C195FC1-B568-4C72-9902-34CB35DDD7A1}"/>
+              </a:ext>
+              <a:ext uri="{C183D7F6-B498-43B3-948B-1728B52AA6E4}">
+                <adec:decorative xmlns:adec="http://schemas.microsoft.com/office/drawing/2017/decorative" val="1"/>
+              </a:ext>
+            </a:extLst>
+          </p:cNvPr>
+          <p:cNvSpPr>
+            <a:spLocks noGrp="1" noRot="1" noChangeAspect="1" noMove="1" noResize="1" noEditPoints="1" noAdjustHandles="1" noChangeArrowheads="1" noChangeShapeType="1" noTextEdit="1"/>
+          </p:cNvSpPr>
+          <p:nvPr>
+            <p:extLst>
+              <p:ext uri="{386F3935-93C4-4BCD-93E2-E3B085C9AB24}">
+                <p16:designElem xmlns:p16="http://schemas.microsoft.com/office/powerpoint/2015/main" val="1"/>
+              </p:ext>
+            </p:extLst>
+          </p:nvPr>
+        </p:nvSpPr>
+        <p:spPr>
+          <a:xfrm flipH="1">
+            <a:off x="7922712" y="3048000"/>
+            <a:ext cx="3259667" cy="3810000"/>
+          </a:xfrm>
+          <a:prstGeom prst="triangle">
+            <a:avLst>
+              <a:gd name="adj" fmla="val 100000"/>
+            </a:avLst>
+          </a:prstGeom>
+          <a:solidFill>
+            <a:schemeClr val="accent2">
+              <a:alpha val="72000"/>
+            </a:schemeClr>
+          </a:solidFill>
+          <a:ln>
+            <a:noFill/>
+          </a:ln>
+          <a:effectLst/>
+        </p:spPr>
+        <p:style>
+          <a:lnRef idx="1">
+            <a:schemeClr val="accent1"/>
+          </a:lnRef>
+          <a:fillRef idx="3">
+            <a:schemeClr val="accent1"/>
+          </a:fillRef>
+          <a:effectRef idx="2">
+            <a:schemeClr val="accent1"/>
+          </a:effectRef>
+          <a:fontRef idx="minor">
+            <a:schemeClr val="lt1"/>
+          </a:fontRef>
+        </p:style>
+        <p:txBody>
+          <a:bodyPr/>
+          <a:lstStyle/>
+          <a:p>
+            <a:endParaRPr lang="en-US"/>
+          </a:p>
+        </p:txBody>
+      </p:sp>
+      <p:sp>
+        <p:nvSpPr>
+          <p:cNvPr id="31" name="Rectangle 27">
+            <a:extLst>
+              <a:ext uri="{FF2B5EF4-FFF2-40B4-BE49-F238E27FC236}">
+                <a16:creationId xmlns:a16="http://schemas.microsoft.com/office/drawing/2014/main" id="{EF2BDF77-362C-43F0-8CBB-A969EC2AE0C4}"/>
+              </a:ext>
+              <a:ext uri="{C183D7F6-B498-43B3-948B-1728B52AA6E4}">
+                <adec:decorative xmlns:adec="http://schemas.microsoft.com/office/drawing/2017/decorative" val="1"/>
+              </a:ext>
+            </a:extLst>
+          </p:cNvPr>
+          <p:cNvSpPr>
+            <a:spLocks noGrp="1" noRot="1" noChangeAspect="1" noMove="1" noResize="1" noEditPoints="1" noAdjustHandles="1" noChangeArrowheads="1" noChangeShapeType="1" noTextEdit="1"/>
+          </p:cNvSpPr>
+          <p:nvPr>
+            <p:extLst>
+              <p:ext uri="{386F3935-93C4-4BCD-93E2-E3B085C9AB24}">
+                <p16:designElem xmlns:p16="http://schemas.microsoft.com/office/powerpoint/2015/main" val="1"/>
+              </p:ext>
+            </p:extLst>
+          </p:nvPr>
+        </p:nvSpPr>
+        <p:spPr>
+          <a:xfrm flipH="1">
+            <a:off x="7925886" y="-8467"/>
+            <a:ext cx="2854326" cy="6866467"/>
+          </a:xfrm>
+          <a:custGeom>
+            <a:avLst/>
+            <a:gdLst/>
+            <a:ahLst/>
+            <a:cxnLst/>
+            <a:rect l="l" t="t" r="r" b="b"/>
+            <a:pathLst>
+              <a:path w="2858013" h="6866467">
+                <a:moveTo>
+                  <a:pt x="0" y="0"/>
+                </a:moveTo>
+                <a:lnTo>
+                  <a:pt x="2858013" y="0"/>
+                </a:lnTo>
+                <a:lnTo>
+                  <a:pt x="2858013" y="6866467"/>
+                </a:lnTo>
+                <a:lnTo>
+                  <a:pt x="2473942" y="6866467"/>
+                </a:lnTo>
+                <a:lnTo>
+                  <a:pt x="0" y="0"/>
+                </a:lnTo>
+                <a:close/>
+              </a:path>
+            </a:pathLst>
+          </a:custGeom>
+          <a:solidFill>
+            <a:schemeClr val="accent2">
+              <a:lumMod val="75000"/>
+              <a:alpha val="70000"/>
+            </a:schemeClr>
+          </a:solidFill>
+          <a:ln>
+            <a:noFill/>
+          </a:ln>
+          <a:effectLst/>
+        </p:spPr>
+        <p:style>
+          <a:lnRef idx="1">
+            <a:schemeClr val="accent1"/>
+          </a:lnRef>
+          <a:fillRef idx="3">
+            <a:schemeClr val="accent1"/>
+          </a:fillRef>
+          <a:effectRef idx="2">
+            <a:schemeClr val="accent1"/>
+          </a:effectRef>
+          <a:fontRef idx="minor">
+            <a:schemeClr val="lt1"/>
+          </a:fontRef>
+        </p:style>
+        <p:txBody>
+          <a:bodyPr/>
+          <a:lstStyle/>
+          <a:p>
+            <a:endParaRPr lang="en-US"/>
+          </a:p>
+        </p:txBody>
+      </p:sp>
+      <p:sp>
+        <p:nvSpPr>
+          <p:cNvPr id="33" name="Isosceles Triangle 32">
+            <a:extLst>
+              <a:ext uri="{FF2B5EF4-FFF2-40B4-BE49-F238E27FC236}">
+                <a16:creationId xmlns:a16="http://schemas.microsoft.com/office/drawing/2014/main" id="{4BE96B01-3929-432D-B8C2-ADBCB74C2EF4}"/>
+              </a:ext>
+              <a:ext uri="{C183D7F6-B498-43B3-948B-1728B52AA6E4}">
+                <adec:decorative xmlns:adec="http://schemas.microsoft.com/office/drawing/2017/decorative" val="1"/>
+              </a:ext>
+            </a:extLst>
+          </p:cNvPr>
+          <p:cNvSpPr>
+            <a:spLocks noGrp="1" noRot="1" noChangeAspect="1" noMove="1" noResize="1" noEditPoints="1" noAdjustHandles="1" noChangeArrowheads="1" noChangeShapeType="1" noTextEdit="1"/>
+          </p:cNvSpPr>
+          <p:nvPr>
+            <p:extLst>
+              <p:ext uri="{386F3935-93C4-4BCD-93E2-E3B085C9AB24}">
+                <p16:designElem xmlns:p16="http://schemas.microsoft.com/office/powerpoint/2015/main" val="1"/>
+              </p:ext>
+            </p:extLst>
+          </p:nvPr>
+        </p:nvSpPr>
+        <p:spPr>
+          <a:xfrm flipH="1">
+            <a:off x="7925887" y="3589867"/>
+            <a:ext cx="1817159" cy="3268133"/>
+          </a:xfrm>
+          <a:prstGeom prst="triangle">
+            <a:avLst>
+              <a:gd name="adj" fmla="val 100000"/>
+            </a:avLst>
+          </a:prstGeom>
+          <a:solidFill>
+            <a:schemeClr val="accent1">
+              <a:alpha val="80000"/>
+            </a:schemeClr>
+          </a:solidFill>
+          <a:ln>
+            <a:noFill/>
+          </a:ln>
+          <a:effectLst/>
+        </p:spPr>
+        <p:style>
+          <a:lnRef idx="1">
+            <a:schemeClr val="accent1"/>
+          </a:lnRef>
+          <a:fillRef idx="3">
+            <a:schemeClr val="accent1"/>
+          </a:fillRef>
+          <a:effectRef idx="2">
+            <a:schemeClr val="accent1"/>
+          </a:effectRef>
+          <a:fontRef idx="minor">
+            <a:schemeClr val="lt1"/>
+          </a:fontRef>
+        </p:style>
+        <p:txBody>
+          <a:bodyPr/>
+          <a:lstStyle/>
+          <a:p>
+            <a:endParaRPr lang="en-US"/>
+          </a:p>
+        </p:txBody>
+      </p:sp>
+      <p:sp>
+        <p:nvSpPr>
+          <p:cNvPr id="35" name="Freeform: Shape 34">
+            <a:extLst>
+              <a:ext uri="{FF2B5EF4-FFF2-40B4-BE49-F238E27FC236}">
+                <a16:creationId xmlns:a16="http://schemas.microsoft.com/office/drawing/2014/main" id="{2A6FCDE6-CDE2-4C51-B18E-A95CFB679714}"/>
+              </a:ext>
+              <a:ext uri="{C183D7F6-B498-43B3-948B-1728B52AA6E4}">
+                <adec:decorative xmlns:adec="http://schemas.microsoft.com/office/drawing/2017/decorative" val="1"/>
+              </a:ext>
+            </a:extLst>
+          </p:cNvPr>
+          <p:cNvSpPr>
+            <a:spLocks noGrp="1" noRot="1" noChangeAspect="1" noMove="1" noResize="1" noEditPoints="1" noAdjustHandles="1" noChangeArrowheads="1" noChangeShapeType="1" noTextEdit="1"/>
+          </p:cNvSpPr>
+          <p:nvPr>
+            <p:extLst>
+              <p:ext uri="{386F3935-93C4-4BCD-93E2-E3B085C9AB24}">
+                <p16:designElem xmlns:p16="http://schemas.microsoft.com/office/powerpoint/2015/main" val="1"/>
+              </p:ext>
+            </p:extLst>
+          </p:nvPr>
+        </p:nvSpPr>
+        <p:spPr>
+          <a:xfrm flipH="1">
+            <a:off x="0" y="-8467"/>
+            <a:ext cx="9175713" cy="6866467"/>
+          </a:xfrm>
+          <a:custGeom>
+            <a:avLst/>
+            <a:gdLst>
+              <a:gd name="connsiteX0" fmla="*/ 0 w 9175713"/>
+              <a:gd name="connsiteY0" fmla="*/ 0 h 6866467"/>
+              <a:gd name="connsiteX1" fmla="*/ 1249825 w 9175713"/>
+              <a:gd name="connsiteY1" fmla="*/ 0 h 6866467"/>
+              <a:gd name="connsiteX2" fmla="*/ 1249825 w 9175713"/>
+              <a:gd name="connsiteY2" fmla="*/ 8467 h 6866467"/>
+              <a:gd name="connsiteX3" fmla="*/ 9175713 w 9175713"/>
+              <a:gd name="connsiteY3" fmla="*/ 8467 h 6866467"/>
+              <a:gd name="connsiteX4" fmla="*/ 9175713 w 9175713"/>
+              <a:gd name="connsiteY4" fmla="*/ 6866467 h 6866467"/>
+              <a:gd name="connsiteX5" fmla="*/ 1249825 w 9175713"/>
+              <a:gd name="connsiteY5" fmla="*/ 6866467 h 6866467"/>
+              <a:gd name="connsiteX6" fmla="*/ 1109382 w 9175713"/>
+              <a:gd name="connsiteY6" fmla="*/ 6866467 h 6866467"/>
+            </a:gdLst>
+            <a:ahLst/>
+            <a:cxnLst>
+              <a:cxn ang="0">
+                <a:pos x="connsiteX0" y="connsiteY0"/>
+              </a:cxn>
+              <a:cxn ang="0">
+                <a:pos x="connsiteX1" y="connsiteY1"/>
+              </a:cxn>
+              <a:cxn ang="0">
+                <a:pos x="connsiteX2" y="connsiteY2"/>
+              </a:cxn>
+              <a:cxn ang="0">
+                <a:pos x="connsiteX3" y="connsiteY3"/>
+              </a:cxn>
+              <a:cxn ang="0">
+                <a:pos x="connsiteX4" y="connsiteY4"/>
+              </a:cxn>
+              <a:cxn ang="0">
+                <a:pos x="connsiteX5" y="connsiteY5"/>
+              </a:cxn>
+              <a:cxn ang="0">
+                <a:pos x="connsiteX6" y="connsiteY6"/>
+              </a:cxn>
+            </a:cxnLst>
+            <a:rect l="l" t="t" r="r" b="b"/>
+            <a:pathLst>
+              <a:path w="9175713" h="6866467">
+                <a:moveTo>
+                  <a:pt x="0" y="0"/>
+                </a:moveTo>
+                <a:lnTo>
+                  <a:pt x="1249825" y="0"/>
+                </a:lnTo>
+                <a:lnTo>
+                  <a:pt x="1249825" y="8467"/>
+                </a:lnTo>
+                <a:lnTo>
+                  <a:pt x="9175713" y="8467"/>
+                </a:lnTo>
+                <a:lnTo>
+                  <a:pt x="9175713" y="6866467"/>
+                </a:lnTo>
+                <a:lnTo>
+                  <a:pt x="1249825" y="6866467"/>
+                </a:lnTo>
+                <a:lnTo>
+                  <a:pt x="1109382" y="6866467"/>
+                </a:lnTo>
+                <a:close/>
+              </a:path>
+            </a:pathLst>
+          </a:custGeom>
+          <a:solidFill>
+            <a:schemeClr val="accent1"/>
+          </a:solidFill>
+          <a:ln>
+            <a:noFill/>
+          </a:ln>
+        </p:spPr>
+        <p:style>
+          <a:lnRef idx="2">
+            <a:schemeClr val="accent1">
+              <a:shade val="50000"/>
+            </a:schemeClr>
+          </a:lnRef>
+          <a:fillRef idx="1">
+            <a:schemeClr val="accent1"/>
+          </a:fillRef>
+          <a:effectRef idx="0">
+            <a:schemeClr val="accent1"/>
+          </a:effectRef>
+          <a:fontRef idx="minor">
+            <a:schemeClr val="lt1"/>
+          </a:fontRef>
+        </p:style>
+        <p:txBody>
+          <a:bodyPr rtlCol="0" anchor="ctr"/>
+          <a:lstStyle/>
+          <a:p>
+            <a:pPr algn="ctr"/>
+            <a:endParaRPr lang="en-US"/>
+          </a:p>
+        </p:txBody>
+      </p:sp>
+      <p:sp>
+        <p:nvSpPr>
+          <p:cNvPr id="2" name="Title 1">
+            <a:extLst>
+              <a:ext uri="{FF2B5EF4-FFF2-40B4-BE49-F238E27FC236}">
+                <a16:creationId xmlns:a16="http://schemas.microsoft.com/office/drawing/2014/main" id="{46F79C8A-2065-ADB8-8A28-84C14751D38D}"/>
+              </a:ext>
+            </a:extLst>
+          </p:cNvPr>
+          <p:cNvSpPr>
+            <a:spLocks noGrp="1"/>
+          </p:cNvSpPr>
+          <p:nvPr>
+            <p:ph type="title"/>
+          </p:nvPr>
+        </p:nvSpPr>
+        <p:spPr>
+          <a:xfrm>
+            <a:off x="1554120" y="1020871"/>
+            <a:ext cx="6960759" cy="2849671"/>
+          </a:xfrm>
+        </p:spPr>
+        <p:txBody>
+          <a:bodyPr vert="horz" lIns="91440" tIns="45720" rIns="91440" bIns="45720" rtlCol="0" anchor="b">
+            <a:normAutofit/>
+          </a:bodyPr>
+          <a:lstStyle/>
+          <a:p>
+            <a:pPr>
+              <a:lnSpc>
+                <a:spcPct val="90000"/>
+              </a:lnSpc>
+            </a:pPr>
+            <a:r>
+              <a:rPr lang="en-US" sz="6600" dirty="0" err="1">
+                <a:solidFill>
+                  <a:srgbClr val="FFFFFF"/>
+                </a:solidFill>
+              </a:rPr>
+              <a:t>Precisão</a:t>
+            </a:r>
+            <a:r>
+              <a:rPr lang="en-US" sz="6600" dirty="0">
+                <a:solidFill>
+                  <a:srgbClr val="FFFFFF"/>
+                </a:solidFill>
+              </a:rPr>
+              <a:t> </a:t>
+            </a:r>
+            <a:r>
+              <a:rPr lang="en-US" sz="6600" dirty="0" err="1">
+                <a:solidFill>
+                  <a:srgbClr val="FFFFFF"/>
+                </a:solidFill>
+              </a:rPr>
+              <a:t>por</a:t>
+            </a:r>
+            <a:r>
+              <a:rPr lang="en-US" sz="6600" dirty="0">
+                <a:solidFill>
+                  <a:srgbClr val="FFFFFF"/>
+                </a:solidFill>
+              </a:rPr>
+              <a:t> </a:t>
+            </a:r>
+            <a:r>
+              <a:rPr lang="en-US" sz="6600" dirty="0" err="1">
+                <a:solidFill>
+                  <a:srgbClr val="FFFFFF"/>
+                </a:solidFill>
+              </a:rPr>
+              <a:t>Quantidade</a:t>
+            </a:r>
+            <a:r>
+              <a:rPr lang="en-US" sz="6600" dirty="0">
+                <a:solidFill>
+                  <a:srgbClr val="FFFFFF"/>
+                </a:solidFill>
+              </a:rPr>
+              <a:t> de Logs </a:t>
+            </a:r>
+          </a:p>
+        </p:txBody>
+      </p:sp>
+      <p:sp>
+        <p:nvSpPr>
+          <p:cNvPr id="37" name="Isosceles Triangle 36">
+            <a:extLst>
+              <a:ext uri="{FF2B5EF4-FFF2-40B4-BE49-F238E27FC236}">
+                <a16:creationId xmlns:a16="http://schemas.microsoft.com/office/drawing/2014/main" id="{9D2E8756-2465-473A-BA2A-2DB1D6224745}"/>
+              </a:ext>
+              <a:ext uri="{C183D7F6-B498-43B3-948B-1728B52AA6E4}">
+                <adec:decorative xmlns:adec="http://schemas.microsoft.com/office/drawing/2017/decorative" val="1"/>
+              </a:ext>
+            </a:extLst>
+          </p:cNvPr>
+          <p:cNvSpPr>
+            <a:spLocks noGrp="1" noRot="1" noChangeAspect="1" noMove="1" noResize="1" noEditPoints="1" noAdjustHandles="1" noChangeArrowheads="1" noChangeShapeType="1" noTextEdit="1"/>
+          </p:cNvSpPr>
+          <p:nvPr>
+            <p:extLst>
+              <p:ext uri="{386F3935-93C4-4BCD-93E2-E3B085C9AB24}">
+                <p16:designElem xmlns:p16="http://schemas.microsoft.com/office/powerpoint/2015/main" val="1"/>
+              </p:ext>
+            </p:extLst>
+          </p:nvPr>
+        </p:nvSpPr>
+        <p:spPr>
+          <a:xfrm rot="5400000">
+            <a:off x="992146" y="3271487"/>
+            <a:ext cx="220660" cy="186439"/>
+          </a:xfrm>
+          <a:prstGeom prst="triangle">
+            <a:avLst/>
+          </a:prstGeom>
+          <a:solidFill>
+            <a:srgbClr val="FFFFFF"/>
+          </a:solidFill>
+          <a:ln>
+            <a:noFill/>
+          </a:ln>
+        </p:spPr>
+        <p:style>
+          <a:lnRef idx="2">
+            <a:schemeClr val="accent1">
+              <a:shade val="50000"/>
+            </a:schemeClr>
+          </a:lnRef>
+          <a:fillRef idx="1">
+            <a:schemeClr val="accent1"/>
+          </a:fillRef>
+          <a:effectRef idx="0">
+            <a:schemeClr val="accent1"/>
+          </a:effectRef>
+          <a:fontRef idx="minor">
+            <a:schemeClr val="lt1"/>
+          </a:fontRef>
+        </p:style>
+        <p:txBody>
+          <a:bodyPr rtlCol="0" anchor="ctr"/>
+          <a:lstStyle/>
+          <a:p>
+            <a:pPr algn="ctr"/>
+            <a:endParaRPr lang="en-US"/>
+          </a:p>
+        </p:txBody>
+      </p:sp>
     </p:spTree>
+    <p:extLst>
+      <p:ext uri="{BB962C8B-B14F-4D97-AF65-F5344CB8AC3E}">
+        <p14:creationId xmlns:p14="http://schemas.microsoft.com/office/powerpoint/2010/main" val="965124642"/>
+      </p:ext>
+    </p:extLst>
   </p:cSld>
   <p:clrMapOvr>
     <a:masterClrMapping/>
@@ -36264,10 +38070,10 @@
       </p:grpSpPr>
       <p:graphicFrame>
         <p:nvGraphicFramePr>
-          <p:cNvPr id="2" name="Chart 1">
+          <p:cNvPr id="7" name="Chart 6">
             <a:extLst>
               <a:ext uri="{FF2B5EF4-FFF2-40B4-BE49-F238E27FC236}">
-                <a16:creationId xmlns:a16="http://schemas.microsoft.com/office/drawing/2014/main" id="{45984CED-9953-9784-E1C7-7E112AB66D5A}"/>
+                <a16:creationId xmlns:a16="http://schemas.microsoft.com/office/drawing/2014/main" id="{C9C78D10-B604-8486-32A0-89938D995A25}"/>
               </a:ext>
             </a:extLst>
           </p:cNvPr>
@@ -36275,14 +38081,14 @@
           <p:nvPr>
             <p:extLst>
               <p:ext uri="{D42A27DB-BD31-4B8C-83A1-F6EECF244321}">
-                <p14:modId xmlns:p14="http://schemas.microsoft.com/office/powerpoint/2010/main" val="2899969705"/>
+                <p14:modId xmlns:p14="http://schemas.microsoft.com/office/powerpoint/2010/main" val="2874721518"/>
               </p:ext>
             </p:extLst>
           </p:nvPr>
         </p:nvGraphicFramePr>
         <p:xfrm>
-          <a:off x="226291" y="1590578"/>
-          <a:ext cx="5515264" cy="3676843"/>
+          <a:off x="604982" y="3429001"/>
+          <a:ext cx="4918364" cy="3278910"/>
         </p:xfrm>
         <a:graphic>
           <a:graphicData uri="http://schemas.openxmlformats.org/drawingml/2006/chart">
@@ -36292,10 +38098,10 @@
       </p:graphicFrame>
       <p:graphicFrame>
         <p:nvGraphicFramePr>
-          <p:cNvPr id="4" name="Chart 3">
+          <p:cNvPr id="12" name="Chart 11">
             <a:extLst>
               <a:ext uri="{FF2B5EF4-FFF2-40B4-BE49-F238E27FC236}">
-                <a16:creationId xmlns:a16="http://schemas.microsoft.com/office/drawing/2014/main" id="{AB5200DA-2FAF-7E78-8764-70CE800FC589}"/>
+                <a16:creationId xmlns:a16="http://schemas.microsoft.com/office/drawing/2014/main" id="{318316B1-94F1-5CE3-054A-10EC14774194}"/>
               </a:ext>
             </a:extLst>
           </p:cNvPr>
@@ -36303,18 +38109,74 @@
           <p:nvPr>
             <p:extLst>
               <p:ext uri="{D42A27DB-BD31-4B8C-83A1-F6EECF244321}">
-                <p14:modId xmlns:p14="http://schemas.microsoft.com/office/powerpoint/2010/main" val="3110406292"/>
+                <p14:modId xmlns:p14="http://schemas.microsoft.com/office/powerpoint/2010/main" val="2670149329"/>
               </p:ext>
             </p:extLst>
           </p:nvPr>
         </p:nvGraphicFramePr>
         <p:xfrm>
-          <a:off x="6096000" y="1513993"/>
-          <a:ext cx="5515264" cy="3676843"/>
+          <a:off x="6668652" y="3429001"/>
+          <a:ext cx="4918364" cy="3278910"/>
         </p:xfrm>
         <a:graphic>
           <a:graphicData uri="http://schemas.openxmlformats.org/drawingml/2006/chart">
             <c:chart xmlns:c="http://schemas.openxmlformats.org/drawingml/2006/chart" xmlns:r="http://schemas.openxmlformats.org/officeDocument/2006/relationships" r:id="rId3"/>
+          </a:graphicData>
+        </a:graphic>
+      </p:graphicFrame>
+      <p:graphicFrame>
+        <p:nvGraphicFramePr>
+          <p:cNvPr id="13" name="Chart 12">
+            <a:extLst>
+              <a:ext uri="{FF2B5EF4-FFF2-40B4-BE49-F238E27FC236}">
+                <a16:creationId xmlns:a16="http://schemas.microsoft.com/office/drawing/2014/main" id="{B784F5BA-1A3E-8CD8-8B0A-2113BEC790B9}"/>
+              </a:ext>
+            </a:extLst>
+          </p:cNvPr>
+          <p:cNvGraphicFramePr/>
+          <p:nvPr>
+            <p:extLst>
+              <p:ext uri="{D42A27DB-BD31-4B8C-83A1-F6EECF244321}">
+                <p14:modId xmlns:p14="http://schemas.microsoft.com/office/powerpoint/2010/main" val="2955213843"/>
+              </p:ext>
+            </p:extLst>
+          </p:nvPr>
+        </p:nvGraphicFramePr>
+        <p:xfrm>
+          <a:off x="604982" y="150090"/>
+          <a:ext cx="4918364" cy="3278910"/>
+        </p:xfrm>
+        <a:graphic>
+          <a:graphicData uri="http://schemas.openxmlformats.org/drawingml/2006/chart">
+            <c:chart xmlns:c="http://schemas.openxmlformats.org/drawingml/2006/chart" xmlns:r="http://schemas.openxmlformats.org/officeDocument/2006/relationships" r:id="rId4"/>
+          </a:graphicData>
+        </a:graphic>
+      </p:graphicFrame>
+      <p:graphicFrame>
+        <p:nvGraphicFramePr>
+          <p:cNvPr id="14" name="Chart 13">
+            <a:extLst>
+              <a:ext uri="{FF2B5EF4-FFF2-40B4-BE49-F238E27FC236}">
+                <a16:creationId xmlns:a16="http://schemas.microsoft.com/office/drawing/2014/main" id="{AB82888D-CB65-49D5-E631-83F43DA84B38}"/>
+              </a:ext>
+            </a:extLst>
+          </p:cNvPr>
+          <p:cNvGraphicFramePr/>
+          <p:nvPr>
+            <p:extLst>
+              <p:ext uri="{D42A27DB-BD31-4B8C-83A1-F6EECF244321}">
+                <p14:modId xmlns:p14="http://schemas.microsoft.com/office/powerpoint/2010/main" val="3711172568"/>
+              </p:ext>
+            </p:extLst>
+          </p:nvPr>
+        </p:nvGraphicFramePr>
+        <p:xfrm>
+          <a:off x="6668652" y="150090"/>
+          <a:ext cx="4918364" cy="3278910"/>
+        </p:xfrm>
+        <a:graphic>
+          <a:graphicData uri="http://schemas.openxmlformats.org/drawingml/2006/chart">
+            <c:chart xmlns:c="http://schemas.openxmlformats.org/drawingml/2006/chart" xmlns:r="http://schemas.openxmlformats.org/officeDocument/2006/relationships" r:id="rId5"/>
           </a:graphicData>
         </a:graphic>
       </p:graphicFrame>
@@ -36350,7 +38212,7 @@
       </p:grpSpPr>
       <p:graphicFrame>
         <p:nvGraphicFramePr>
-          <p:cNvPr id="2" name="Chart 1">
+          <p:cNvPr id="9" name="Chart 8">
             <a:extLst>
               <a:ext uri="{FF2B5EF4-FFF2-40B4-BE49-F238E27FC236}">
                 <a16:creationId xmlns:a16="http://schemas.microsoft.com/office/drawing/2014/main" id="{18213E51-C755-9B1B-8106-44FFCC05E452}"/>
@@ -36361,14 +38223,14 @@
           <p:nvPr>
             <p:extLst>
               <p:ext uri="{D42A27DB-BD31-4B8C-83A1-F6EECF244321}">
-                <p14:modId xmlns:p14="http://schemas.microsoft.com/office/powerpoint/2010/main" val="1877334194"/>
+                <p14:modId xmlns:p14="http://schemas.microsoft.com/office/powerpoint/2010/main" val="3513463677"/>
               </p:ext>
             </p:extLst>
           </p:nvPr>
         </p:nvGraphicFramePr>
         <p:xfrm>
-          <a:off x="226291" y="1590578"/>
-          <a:ext cx="5515264" cy="3676843"/>
+          <a:off x="604982" y="3429000"/>
+          <a:ext cx="4918364" cy="3278910"/>
         </p:xfrm>
         <a:graphic>
           <a:graphicData uri="http://schemas.openxmlformats.org/drawingml/2006/chart">
@@ -36378,7 +38240,7 @@
       </p:graphicFrame>
       <p:graphicFrame>
         <p:nvGraphicFramePr>
-          <p:cNvPr id="4" name="Chart 3">
+          <p:cNvPr id="10" name="Chart 9">
             <a:extLst>
               <a:ext uri="{FF2B5EF4-FFF2-40B4-BE49-F238E27FC236}">
                 <a16:creationId xmlns:a16="http://schemas.microsoft.com/office/drawing/2014/main" id="{2C1BD3E4-1719-F8A4-91CA-C6ABD492DF42}"/>
@@ -36389,18 +38251,74 @@
           <p:nvPr>
             <p:extLst>
               <p:ext uri="{D42A27DB-BD31-4B8C-83A1-F6EECF244321}">
-                <p14:modId xmlns:p14="http://schemas.microsoft.com/office/powerpoint/2010/main" val="3149402786"/>
+                <p14:modId xmlns:p14="http://schemas.microsoft.com/office/powerpoint/2010/main" val="884797431"/>
               </p:ext>
             </p:extLst>
           </p:nvPr>
         </p:nvGraphicFramePr>
         <p:xfrm>
-          <a:off x="6096000" y="1513993"/>
-          <a:ext cx="5515264" cy="3676843"/>
+          <a:off x="6668654" y="3429000"/>
+          <a:ext cx="4918364" cy="3278910"/>
         </p:xfrm>
         <a:graphic>
           <a:graphicData uri="http://schemas.openxmlformats.org/drawingml/2006/chart">
             <c:chart xmlns:c="http://schemas.openxmlformats.org/drawingml/2006/chart" xmlns:r="http://schemas.openxmlformats.org/officeDocument/2006/relationships" r:id="rId3"/>
+          </a:graphicData>
+        </a:graphic>
+      </p:graphicFrame>
+      <p:graphicFrame>
+        <p:nvGraphicFramePr>
+          <p:cNvPr id="6" name="Chart 5">
+            <a:extLst>
+              <a:ext uri="{FF2B5EF4-FFF2-40B4-BE49-F238E27FC236}">
+                <a16:creationId xmlns:a16="http://schemas.microsoft.com/office/drawing/2014/main" id="{AB5200DA-2FAF-7E78-8764-70CE800FC589}"/>
+              </a:ext>
+            </a:extLst>
+          </p:cNvPr>
+          <p:cNvGraphicFramePr/>
+          <p:nvPr>
+            <p:extLst>
+              <p:ext uri="{D42A27DB-BD31-4B8C-83A1-F6EECF244321}">
+                <p14:modId xmlns:p14="http://schemas.microsoft.com/office/powerpoint/2010/main" val="3419608104"/>
+              </p:ext>
+            </p:extLst>
+          </p:nvPr>
+        </p:nvGraphicFramePr>
+        <p:xfrm>
+          <a:off x="6668652" y="150090"/>
+          <a:ext cx="4918364" cy="3278910"/>
+        </p:xfrm>
+        <a:graphic>
+          <a:graphicData uri="http://schemas.openxmlformats.org/drawingml/2006/chart">
+            <c:chart xmlns:c="http://schemas.openxmlformats.org/drawingml/2006/chart" xmlns:r="http://schemas.openxmlformats.org/officeDocument/2006/relationships" r:id="rId4"/>
+          </a:graphicData>
+        </a:graphic>
+      </p:graphicFrame>
+      <p:graphicFrame>
+        <p:nvGraphicFramePr>
+          <p:cNvPr id="11" name="Chart 10">
+            <a:extLst>
+              <a:ext uri="{FF2B5EF4-FFF2-40B4-BE49-F238E27FC236}">
+                <a16:creationId xmlns:a16="http://schemas.microsoft.com/office/drawing/2014/main" id="{45984CED-9953-9784-E1C7-7E112AB66D5A}"/>
+              </a:ext>
+            </a:extLst>
+          </p:cNvPr>
+          <p:cNvGraphicFramePr/>
+          <p:nvPr>
+            <p:extLst>
+              <p:ext uri="{D42A27DB-BD31-4B8C-83A1-F6EECF244321}">
+                <p14:modId xmlns:p14="http://schemas.microsoft.com/office/powerpoint/2010/main" val="368518899"/>
+              </p:ext>
+            </p:extLst>
+          </p:nvPr>
+        </p:nvGraphicFramePr>
+        <p:xfrm>
+          <a:off x="604982" y="150089"/>
+          <a:ext cx="4918366" cy="3278911"/>
+        </p:xfrm>
+        <a:graphic>
+          <a:graphicData uri="http://schemas.openxmlformats.org/drawingml/2006/chart">
+            <c:chart xmlns:c="http://schemas.openxmlformats.org/drawingml/2006/chart" xmlns:r="http://schemas.openxmlformats.org/officeDocument/2006/relationships" r:id="rId5"/>
           </a:graphicData>
         </a:graphic>
       </p:graphicFrame>
@@ -36418,6 +38336,1642 @@
 </file>
 
 <file path=ppt/slides/slide6.xml><?xml version="1.0" encoding="utf-8"?>
+<p:sld xmlns:a="http://schemas.openxmlformats.org/drawingml/2006/main" xmlns:r="http://schemas.openxmlformats.org/officeDocument/2006/relationships" xmlns:p="http://schemas.openxmlformats.org/presentationml/2006/main">
+  <p:cSld>
+    <p:bg>
+      <p:bgPr>
+        <a:solidFill>
+          <a:schemeClr val="bg1"/>
+        </a:solidFill>
+        <a:effectLst/>
+      </p:bgPr>
+    </p:bg>
+    <p:spTree>
+      <p:nvGrpSpPr>
+        <p:cNvPr id="1" name="">
+          <a:extLst>
+            <a:ext uri="{FF2B5EF4-FFF2-40B4-BE49-F238E27FC236}">
+              <a16:creationId xmlns:a16="http://schemas.microsoft.com/office/drawing/2014/main" id="{7DC37380-AAB3-55BB-23BE-E3C43F5C295A}"/>
+            </a:ext>
+          </a:extLst>
+        </p:cNvPr>
+        <p:cNvGrpSpPr/>
+        <p:nvPr/>
+      </p:nvGrpSpPr>
+      <p:grpSpPr>
+        <a:xfrm>
+          <a:off x="0" y="0"/>
+          <a:ext cx="0" cy="0"/>
+          <a:chOff x="0" y="0"/>
+          <a:chExt cx="0" cy="0"/>
+        </a:xfrm>
+      </p:grpSpPr>
+      <p:grpSp>
+        <p:nvGrpSpPr>
+          <p:cNvPr id="7" name="Group 6">
+            <a:extLst>
+              <a:ext uri="{FF2B5EF4-FFF2-40B4-BE49-F238E27FC236}">
+                <a16:creationId xmlns:a16="http://schemas.microsoft.com/office/drawing/2014/main" id="{700A229E-81A4-B54B-FB67-8A8EA567C5E4}"/>
+              </a:ext>
+              <a:ext uri="{C183D7F6-B498-43B3-948B-1728B52AA6E4}">
+                <adec:decorative xmlns:adec="http://schemas.microsoft.com/office/drawing/2017/decorative" val="1"/>
+              </a:ext>
+            </a:extLst>
+          </p:cNvPr>
+          <p:cNvGrpSpPr>
+            <a:grpSpLocks noGrp="1" noUngrp="1" noRot="1" noChangeAspect="1" noMove="1" noResize="1"/>
+          </p:cNvGrpSpPr>
+          <p:nvPr>
+            <p:extLst>
+              <p:ext uri="{386F3935-93C4-4BCD-93E2-E3B085C9AB24}">
+                <p16:designElem xmlns:p16="http://schemas.microsoft.com/office/powerpoint/2015/main" val="1"/>
+              </p:ext>
+            </p:extLst>
+          </p:nvPr>
+        </p:nvGrpSpPr>
+        <p:grpSpPr>
+          <a:xfrm>
+            <a:off x="0" y="-8467"/>
+            <a:ext cx="12192000" cy="6866467"/>
+            <a:chOff x="0" y="-8467"/>
+            <a:chExt cx="12192000" cy="6866467"/>
+          </a:xfrm>
+        </p:grpSpPr>
+        <p:cxnSp>
+          <p:nvCxnSpPr>
+            <p:cNvPr id="8" name="Straight Connector 7">
+              <a:extLst>
+                <a:ext uri="{FF2B5EF4-FFF2-40B4-BE49-F238E27FC236}">
+                  <a16:creationId xmlns:a16="http://schemas.microsoft.com/office/drawing/2014/main" id="{FEBA3F50-DCA8-5CA5-F951-89CE5538BA63}"/>
+                </a:ext>
+                <a:ext uri="{C183D7F6-B498-43B3-948B-1728B52AA6E4}">
+                  <adec:decorative xmlns:adec="http://schemas.microsoft.com/office/drawing/2017/decorative" val="1"/>
+                </a:ext>
+              </a:extLst>
+            </p:cNvPr>
+            <p:cNvCxnSpPr/>
+            <p:nvPr>
+              <p:extLst>
+                <p:ext uri="{386F3935-93C4-4BCD-93E2-E3B085C9AB24}">
+                  <p16:designElem xmlns:p16="http://schemas.microsoft.com/office/powerpoint/2015/main" val="1"/>
+                </p:ext>
+              </p:extLst>
+            </p:nvPr>
+          </p:nvCxnSpPr>
+          <p:spPr>
+            <a:xfrm>
+              <a:off x="9371012" y="0"/>
+              <a:ext cx="1219200" cy="6858000"/>
+            </a:xfrm>
+            <a:prstGeom prst="line">
+              <a:avLst/>
+            </a:prstGeom>
+            <a:ln w="9525">
+              <a:solidFill>
+                <a:schemeClr val="bg1">
+                  <a:lumMod val="75000"/>
+                </a:schemeClr>
+              </a:solidFill>
+            </a:ln>
+          </p:spPr>
+          <p:style>
+            <a:lnRef idx="2">
+              <a:schemeClr val="accent1"/>
+            </a:lnRef>
+            <a:fillRef idx="0">
+              <a:schemeClr val="accent1"/>
+            </a:fillRef>
+            <a:effectRef idx="1">
+              <a:schemeClr val="accent1"/>
+            </a:effectRef>
+            <a:fontRef idx="minor">
+              <a:schemeClr val="tx1"/>
+            </a:fontRef>
+          </p:style>
+        </p:cxnSp>
+        <p:cxnSp>
+          <p:nvCxnSpPr>
+            <p:cNvPr id="9" name="Straight Connector 8">
+              <a:extLst>
+                <a:ext uri="{FF2B5EF4-FFF2-40B4-BE49-F238E27FC236}">
+                  <a16:creationId xmlns:a16="http://schemas.microsoft.com/office/drawing/2014/main" id="{EFC09810-0115-0B14-2957-0B669D776A87}"/>
+                </a:ext>
+                <a:ext uri="{C183D7F6-B498-43B3-948B-1728B52AA6E4}">
+                  <adec:decorative xmlns:adec="http://schemas.microsoft.com/office/drawing/2017/decorative" val="1"/>
+                </a:ext>
+              </a:extLst>
+            </p:cNvPr>
+            <p:cNvCxnSpPr/>
+            <p:nvPr>
+              <p:extLst>
+                <p:ext uri="{386F3935-93C4-4BCD-93E2-E3B085C9AB24}">
+                  <p16:designElem xmlns:p16="http://schemas.microsoft.com/office/powerpoint/2015/main" val="1"/>
+                </p:ext>
+              </p:extLst>
+            </p:nvPr>
+          </p:nvCxnSpPr>
+          <p:spPr>
+            <a:xfrm flipH="1">
+              <a:off x="7425267" y="3681413"/>
+              <a:ext cx="4763558" cy="3176587"/>
+            </a:xfrm>
+            <a:prstGeom prst="line">
+              <a:avLst/>
+            </a:prstGeom>
+            <a:ln w="9525">
+              <a:solidFill>
+                <a:schemeClr val="bg1">
+                  <a:lumMod val="85000"/>
+                </a:schemeClr>
+              </a:solidFill>
+            </a:ln>
+          </p:spPr>
+          <p:style>
+            <a:lnRef idx="2">
+              <a:schemeClr val="accent1"/>
+            </a:lnRef>
+            <a:fillRef idx="0">
+              <a:schemeClr val="accent1"/>
+            </a:fillRef>
+            <a:effectRef idx="1">
+              <a:schemeClr val="accent1"/>
+            </a:effectRef>
+            <a:fontRef idx="minor">
+              <a:schemeClr val="tx1"/>
+            </a:fontRef>
+          </p:style>
+        </p:cxnSp>
+        <p:sp>
+          <p:nvSpPr>
+            <p:cNvPr id="4" name="Rectangle 23">
+              <a:extLst>
+                <a:ext uri="{FF2B5EF4-FFF2-40B4-BE49-F238E27FC236}">
+                  <a16:creationId xmlns:a16="http://schemas.microsoft.com/office/drawing/2014/main" id="{1E6843F9-BBFB-C9DB-AB47-E357CEBDB8C9}"/>
+                </a:ext>
+                <a:ext uri="{C183D7F6-B498-43B3-948B-1728B52AA6E4}">
+                  <adec:decorative xmlns:adec="http://schemas.microsoft.com/office/drawing/2017/decorative" val="1"/>
+                </a:ext>
+              </a:extLst>
+            </p:cNvPr>
+            <p:cNvSpPr/>
+            <p:nvPr>
+              <p:extLst>
+                <p:ext uri="{386F3935-93C4-4BCD-93E2-E3B085C9AB24}">
+                  <p16:designElem xmlns:p16="http://schemas.microsoft.com/office/powerpoint/2015/main" val="1"/>
+                </p:ext>
+              </p:extLst>
+            </p:nvPr>
+          </p:nvSpPr>
+          <p:spPr>
+            <a:xfrm>
+              <a:off x="9181476" y="-8467"/>
+              <a:ext cx="3007349" cy="6866467"/>
+            </a:xfrm>
+            <a:custGeom>
+              <a:avLst/>
+              <a:gdLst/>
+              <a:ahLst/>
+              <a:cxnLst/>
+              <a:rect l="l" t="t" r="r" b="b"/>
+              <a:pathLst>
+                <a:path w="3007349" h="6866467">
+                  <a:moveTo>
+                    <a:pt x="2045532" y="0"/>
+                  </a:moveTo>
+                  <a:lnTo>
+                    <a:pt x="3007349" y="0"/>
+                  </a:lnTo>
+                  <a:lnTo>
+                    <a:pt x="3007349" y="6866467"/>
+                  </a:lnTo>
+                  <a:lnTo>
+                    <a:pt x="0" y="6866467"/>
+                  </a:lnTo>
+                  <a:lnTo>
+                    <a:pt x="2045532" y="0"/>
+                  </a:lnTo>
+                  <a:close/>
+                </a:path>
+              </a:pathLst>
+            </a:custGeom>
+            <a:solidFill>
+              <a:schemeClr val="accent1">
+                <a:alpha val="30000"/>
+              </a:schemeClr>
+            </a:solidFill>
+            <a:ln>
+              <a:noFill/>
+            </a:ln>
+            <a:effectLst/>
+          </p:spPr>
+          <p:style>
+            <a:lnRef idx="1">
+              <a:schemeClr val="accent1"/>
+            </a:lnRef>
+            <a:fillRef idx="3">
+              <a:schemeClr val="accent1"/>
+            </a:fillRef>
+            <a:effectRef idx="2">
+              <a:schemeClr val="accent1"/>
+            </a:effectRef>
+            <a:fontRef idx="minor">
+              <a:schemeClr val="lt1"/>
+            </a:fontRef>
+          </p:style>
+          <p:txBody>
+            <a:bodyPr/>
+            <a:lstStyle/>
+            <a:p>
+              <a:endParaRPr lang="en-US"/>
+            </a:p>
+          </p:txBody>
+        </p:sp>
+        <p:sp>
+          <p:nvSpPr>
+            <p:cNvPr id="5" name="Rectangle 25">
+              <a:extLst>
+                <a:ext uri="{FF2B5EF4-FFF2-40B4-BE49-F238E27FC236}">
+                  <a16:creationId xmlns:a16="http://schemas.microsoft.com/office/drawing/2014/main" id="{288642FB-727A-199A-0C90-7BC14F35E2FD}"/>
+                </a:ext>
+                <a:ext uri="{C183D7F6-B498-43B3-948B-1728B52AA6E4}">
+                  <adec:decorative xmlns:adec="http://schemas.microsoft.com/office/drawing/2017/decorative" val="1"/>
+                </a:ext>
+              </a:extLst>
+            </p:cNvPr>
+            <p:cNvSpPr/>
+            <p:nvPr>
+              <p:extLst>
+                <p:ext uri="{386F3935-93C4-4BCD-93E2-E3B085C9AB24}">
+                  <p16:designElem xmlns:p16="http://schemas.microsoft.com/office/powerpoint/2015/main" val="1"/>
+                </p:ext>
+              </p:extLst>
+            </p:nvPr>
+          </p:nvSpPr>
+          <p:spPr>
+            <a:xfrm>
+              <a:off x="9603442" y="-8467"/>
+              <a:ext cx="2588558" cy="6866467"/>
+            </a:xfrm>
+            <a:custGeom>
+              <a:avLst/>
+              <a:gdLst/>
+              <a:ahLst/>
+              <a:cxnLst/>
+              <a:rect l="l" t="t" r="r" b="b"/>
+              <a:pathLst>
+                <a:path w="2573311" h="6866467">
+                  <a:moveTo>
+                    <a:pt x="0" y="0"/>
+                  </a:moveTo>
+                  <a:lnTo>
+                    <a:pt x="2573311" y="0"/>
+                  </a:lnTo>
+                  <a:lnTo>
+                    <a:pt x="2573311" y="6866467"/>
+                  </a:lnTo>
+                  <a:lnTo>
+                    <a:pt x="1202336" y="6866467"/>
+                  </a:lnTo>
+                  <a:lnTo>
+                    <a:pt x="0" y="0"/>
+                  </a:lnTo>
+                  <a:close/>
+                </a:path>
+              </a:pathLst>
+            </a:custGeom>
+            <a:solidFill>
+              <a:schemeClr val="accent1">
+                <a:alpha val="20000"/>
+              </a:schemeClr>
+            </a:solidFill>
+            <a:ln>
+              <a:noFill/>
+            </a:ln>
+            <a:effectLst/>
+          </p:spPr>
+          <p:style>
+            <a:lnRef idx="1">
+              <a:schemeClr val="accent1"/>
+            </a:lnRef>
+            <a:fillRef idx="3">
+              <a:schemeClr val="accent1"/>
+            </a:fillRef>
+            <a:effectRef idx="2">
+              <a:schemeClr val="accent1"/>
+            </a:effectRef>
+            <a:fontRef idx="minor">
+              <a:schemeClr val="lt1"/>
+            </a:fontRef>
+          </p:style>
+          <p:txBody>
+            <a:bodyPr/>
+            <a:lstStyle/>
+            <a:p>
+              <a:endParaRPr lang="en-US"/>
+            </a:p>
+          </p:txBody>
+        </p:sp>
+        <p:sp>
+          <p:nvSpPr>
+            <p:cNvPr id="6" name="Isosceles Triangle 5">
+              <a:extLst>
+                <a:ext uri="{FF2B5EF4-FFF2-40B4-BE49-F238E27FC236}">
+                  <a16:creationId xmlns:a16="http://schemas.microsoft.com/office/drawing/2014/main" id="{8AD2C6E9-6B26-B13A-A72F-91CB937A3126}"/>
+                </a:ext>
+                <a:ext uri="{C183D7F6-B498-43B3-948B-1728B52AA6E4}">
+                  <adec:decorative xmlns:adec="http://schemas.microsoft.com/office/drawing/2017/decorative" val="1"/>
+                </a:ext>
+              </a:extLst>
+            </p:cNvPr>
+            <p:cNvSpPr/>
+            <p:nvPr>
+              <p:extLst>
+                <p:ext uri="{386F3935-93C4-4BCD-93E2-E3B085C9AB24}">
+                  <p16:designElem xmlns:p16="http://schemas.microsoft.com/office/powerpoint/2015/main" val="1"/>
+                </p:ext>
+              </p:extLst>
+            </p:nvPr>
+          </p:nvSpPr>
+          <p:spPr>
+            <a:xfrm>
+              <a:off x="8932333" y="3048000"/>
+              <a:ext cx="3259667" cy="3810000"/>
+            </a:xfrm>
+            <a:prstGeom prst="triangle">
+              <a:avLst>
+                <a:gd name="adj" fmla="val 100000"/>
+              </a:avLst>
+            </a:prstGeom>
+            <a:solidFill>
+              <a:schemeClr val="accent2">
+                <a:alpha val="72000"/>
+              </a:schemeClr>
+            </a:solidFill>
+            <a:ln>
+              <a:noFill/>
+            </a:ln>
+            <a:effectLst/>
+          </p:spPr>
+          <p:style>
+            <a:lnRef idx="1">
+              <a:schemeClr val="accent1"/>
+            </a:lnRef>
+            <a:fillRef idx="3">
+              <a:schemeClr val="accent1"/>
+            </a:fillRef>
+            <a:effectRef idx="2">
+              <a:schemeClr val="accent1"/>
+            </a:effectRef>
+            <a:fontRef idx="minor">
+              <a:schemeClr val="lt1"/>
+            </a:fontRef>
+          </p:style>
+          <p:txBody>
+            <a:bodyPr/>
+            <a:lstStyle/>
+            <a:p>
+              <a:endParaRPr lang="en-US"/>
+            </a:p>
+          </p:txBody>
+        </p:sp>
+        <p:sp>
+          <p:nvSpPr>
+            <p:cNvPr id="18" name="Rectangle 27">
+              <a:extLst>
+                <a:ext uri="{FF2B5EF4-FFF2-40B4-BE49-F238E27FC236}">
+                  <a16:creationId xmlns:a16="http://schemas.microsoft.com/office/drawing/2014/main" id="{FA3FF850-138D-7C6C-FEE9-442554E41C18}"/>
+                </a:ext>
+                <a:ext uri="{C183D7F6-B498-43B3-948B-1728B52AA6E4}">
+                  <adec:decorative xmlns:adec="http://schemas.microsoft.com/office/drawing/2017/decorative" val="1"/>
+                </a:ext>
+              </a:extLst>
+            </p:cNvPr>
+            <p:cNvSpPr/>
+            <p:nvPr>
+              <p:extLst>
+                <p:ext uri="{386F3935-93C4-4BCD-93E2-E3B085C9AB24}">
+                  <p16:designElem xmlns:p16="http://schemas.microsoft.com/office/powerpoint/2015/main" val="1"/>
+                </p:ext>
+              </p:extLst>
+            </p:nvPr>
+          </p:nvSpPr>
+          <p:spPr>
+            <a:xfrm>
+              <a:off x="9334500" y="-8467"/>
+              <a:ext cx="2854326" cy="6866467"/>
+            </a:xfrm>
+            <a:custGeom>
+              <a:avLst/>
+              <a:gdLst/>
+              <a:ahLst/>
+              <a:cxnLst/>
+              <a:rect l="l" t="t" r="r" b="b"/>
+              <a:pathLst>
+                <a:path w="2858013" h="6866467">
+                  <a:moveTo>
+                    <a:pt x="0" y="0"/>
+                  </a:moveTo>
+                  <a:lnTo>
+                    <a:pt x="2858013" y="0"/>
+                  </a:lnTo>
+                  <a:lnTo>
+                    <a:pt x="2858013" y="6866467"/>
+                  </a:lnTo>
+                  <a:lnTo>
+                    <a:pt x="2473942" y="6866467"/>
+                  </a:lnTo>
+                  <a:lnTo>
+                    <a:pt x="0" y="0"/>
+                  </a:lnTo>
+                  <a:close/>
+                </a:path>
+              </a:pathLst>
+            </a:custGeom>
+            <a:solidFill>
+              <a:schemeClr val="accent2">
+                <a:lumMod val="75000"/>
+                <a:alpha val="70000"/>
+              </a:schemeClr>
+            </a:solidFill>
+            <a:ln>
+              <a:noFill/>
+            </a:ln>
+            <a:effectLst/>
+          </p:spPr>
+          <p:style>
+            <a:lnRef idx="1">
+              <a:schemeClr val="accent1"/>
+            </a:lnRef>
+            <a:fillRef idx="3">
+              <a:schemeClr val="accent1"/>
+            </a:fillRef>
+            <a:effectRef idx="2">
+              <a:schemeClr val="accent1"/>
+            </a:effectRef>
+            <a:fontRef idx="minor">
+              <a:schemeClr val="lt1"/>
+            </a:fontRef>
+          </p:style>
+          <p:txBody>
+            <a:bodyPr/>
+            <a:lstStyle/>
+            <a:p>
+              <a:endParaRPr lang="en-US"/>
+            </a:p>
+          </p:txBody>
+        </p:sp>
+        <p:sp>
+          <p:nvSpPr>
+            <p:cNvPr id="20" name="Rectangle 28">
+              <a:extLst>
+                <a:ext uri="{FF2B5EF4-FFF2-40B4-BE49-F238E27FC236}">
+                  <a16:creationId xmlns:a16="http://schemas.microsoft.com/office/drawing/2014/main" id="{693D8D89-9978-30FA-E9FB-4DABC7C35A81}"/>
+                </a:ext>
+                <a:ext uri="{C183D7F6-B498-43B3-948B-1728B52AA6E4}">
+                  <adec:decorative xmlns:adec="http://schemas.microsoft.com/office/drawing/2017/decorative" val="1"/>
+                </a:ext>
+              </a:extLst>
+            </p:cNvPr>
+            <p:cNvSpPr/>
+            <p:nvPr>
+              <p:extLst>
+                <p:ext uri="{386F3935-93C4-4BCD-93E2-E3B085C9AB24}">
+                  <p16:designElem xmlns:p16="http://schemas.microsoft.com/office/powerpoint/2015/main" val="1"/>
+                </p:ext>
+              </p:extLst>
+            </p:nvPr>
+          </p:nvSpPr>
+          <p:spPr>
+            <a:xfrm>
+              <a:off x="10898730" y="-8467"/>
+              <a:ext cx="1290094" cy="6866467"/>
+            </a:xfrm>
+            <a:custGeom>
+              <a:avLst/>
+              <a:gdLst/>
+              <a:ahLst/>
+              <a:cxnLst/>
+              <a:rect l="l" t="t" r="r" b="b"/>
+              <a:pathLst>
+                <a:path w="1290094" h="6858000">
+                  <a:moveTo>
+                    <a:pt x="1019735" y="0"/>
+                  </a:moveTo>
+                  <a:lnTo>
+                    <a:pt x="1290094" y="0"/>
+                  </a:lnTo>
+                  <a:lnTo>
+                    <a:pt x="1290094" y="6858000"/>
+                  </a:lnTo>
+                  <a:lnTo>
+                    <a:pt x="0" y="6858000"/>
+                  </a:lnTo>
+                  <a:lnTo>
+                    <a:pt x="1019735" y="0"/>
+                  </a:lnTo>
+                  <a:close/>
+                </a:path>
+              </a:pathLst>
+            </a:custGeom>
+            <a:solidFill>
+              <a:schemeClr val="accent1">
+                <a:lumMod val="60000"/>
+                <a:lumOff val="40000"/>
+                <a:alpha val="70000"/>
+              </a:schemeClr>
+            </a:solidFill>
+            <a:ln>
+              <a:noFill/>
+            </a:ln>
+            <a:effectLst/>
+          </p:spPr>
+          <p:style>
+            <a:lnRef idx="1">
+              <a:schemeClr val="accent1"/>
+            </a:lnRef>
+            <a:fillRef idx="3">
+              <a:schemeClr val="accent1"/>
+            </a:fillRef>
+            <a:effectRef idx="2">
+              <a:schemeClr val="accent1"/>
+            </a:effectRef>
+            <a:fontRef idx="minor">
+              <a:schemeClr val="lt1"/>
+            </a:fontRef>
+          </p:style>
+          <p:txBody>
+            <a:bodyPr/>
+            <a:lstStyle/>
+            <a:p>
+              <a:endParaRPr lang="en-US"/>
+            </a:p>
+          </p:txBody>
+        </p:sp>
+        <p:sp>
+          <p:nvSpPr>
+            <p:cNvPr id="22" name="Rectangle 29">
+              <a:extLst>
+                <a:ext uri="{FF2B5EF4-FFF2-40B4-BE49-F238E27FC236}">
+                  <a16:creationId xmlns:a16="http://schemas.microsoft.com/office/drawing/2014/main" id="{3FCFB628-7FD5-345C-182E-316BF142EF9E}"/>
+                </a:ext>
+                <a:ext uri="{C183D7F6-B498-43B3-948B-1728B52AA6E4}">
+                  <adec:decorative xmlns:adec="http://schemas.microsoft.com/office/drawing/2017/decorative" val="1"/>
+                </a:ext>
+              </a:extLst>
+            </p:cNvPr>
+            <p:cNvSpPr/>
+            <p:nvPr>
+              <p:extLst>
+                <p:ext uri="{386F3935-93C4-4BCD-93E2-E3B085C9AB24}">
+                  <p16:designElem xmlns:p16="http://schemas.microsoft.com/office/powerpoint/2015/main" val="1"/>
+                </p:ext>
+              </p:extLst>
+            </p:nvPr>
+          </p:nvSpPr>
+          <p:spPr>
+            <a:xfrm>
+              <a:off x="10938999" y="-8467"/>
+              <a:ext cx="1249825" cy="6866467"/>
+            </a:xfrm>
+            <a:custGeom>
+              <a:avLst/>
+              <a:gdLst/>
+              <a:ahLst/>
+              <a:cxnLst/>
+              <a:rect l="l" t="t" r="r" b="b"/>
+              <a:pathLst>
+                <a:path w="1249825" h="6858000">
+                  <a:moveTo>
+                    <a:pt x="0" y="0"/>
+                  </a:moveTo>
+                  <a:lnTo>
+                    <a:pt x="1249825" y="0"/>
+                  </a:lnTo>
+                  <a:lnTo>
+                    <a:pt x="1249825" y="6858000"/>
+                  </a:lnTo>
+                  <a:lnTo>
+                    <a:pt x="1109382" y="6858000"/>
+                  </a:lnTo>
+                  <a:lnTo>
+                    <a:pt x="0" y="0"/>
+                  </a:lnTo>
+                  <a:close/>
+                </a:path>
+              </a:pathLst>
+            </a:custGeom>
+            <a:solidFill>
+              <a:schemeClr val="accent1">
+                <a:alpha val="65000"/>
+              </a:schemeClr>
+            </a:solidFill>
+            <a:ln>
+              <a:noFill/>
+            </a:ln>
+            <a:effectLst/>
+          </p:spPr>
+          <p:style>
+            <a:lnRef idx="1">
+              <a:schemeClr val="accent1"/>
+            </a:lnRef>
+            <a:fillRef idx="3">
+              <a:schemeClr val="accent1"/>
+            </a:fillRef>
+            <a:effectRef idx="2">
+              <a:schemeClr val="accent1"/>
+            </a:effectRef>
+            <a:fontRef idx="minor">
+              <a:schemeClr val="lt1"/>
+            </a:fontRef>
+          </p:style>
+          <p:txBody>
+            <a:bodyPr/>
+            <a:lstStyle/>
+            <a:p>
+              <a:endParaRPr lang="en-US"/>
+            </a:p>
+          </p:txBody>
+        </p:sp>
+        <p:sp>
+          <p:nvSpPr>
+            <p:cNvPr id="24" name="Isosceles Triangle 23">
+              <a:extLst>
+                <a:ext uri="{FF2B5EF4-FFF2-40B4-BE49-F238E27FC236}">
+                  <a16:creationId xmlns:a16="http://schemas.microsoft.com/office/drawing/2014/main" id="{8DA35550-A785-A7F7-97CE-9A56FC6E3EC5}"/>
+                </a:ext>
+                <a:ext uri="{C183D7F6-B498-43B3-948B-1728B52AA6E4}">
+                  <adec:decorative xmlns:adec="http://schemas.microsoft.com/office/drawing/2017/decorative" val="1"/>
+                </a:ext>
+              </a:extLst>
+            </p:cNvPr>
+            <p:cNvSpPr/>
+            <p:nvPr>
+              <p:extLst>
+                <p:ext uri="{386F3935-93C4-4BCD-93E2-E3B085C9AB24}">
+                  <p16:designElem xmlns:p16="http://schemas.microsoft.com/office/powerpoint/2015/main" val="1"/>
+                </p:ext>
+              </p:extLst>
+            </p:nvPr>
+          </p:nvSpPr>
+          <p:spPr>
+            <a:xfrm>
+              <a:off x="10371666" y="3589867"/>
+              <a:ext cx="1817159" cy="3268133"/>
+            </a:xfrm>
+            <a:prstGeom prst="triangle">
+              <a:avLst>
+                <a:gd name="adj" fmla="val 100000"/>
+              </a:avLst>
+            </a:prstGeom>
+            <a:solidFill>
+              <a:schemeClr val="accent1">
+                <a:alpha val="80000"/>
+              </a:schemeClr>
+            </a:solidFill>
+            <a:ln>
+              <a:noFill/>
+            </a:ln>
+            <a:effectLst/>
+          </p:spPr>
+          <p:style>
+            <a:lnRef idx="1">
+              <a:schemeClr val="accent1"/>
+            </a:lnRef>
+            <a:fillRef idx="3">
+              <a:schemeClr val="accent1"/>
+            </a:fillRef>
+            <a:effectRef idx="2">
+              <a:schemeClr val="accent1"/>
+            </a:effectRef>
+            <a:fontRef idx="minor">
+              <a:schemeClr val="lt1"/>
+            </a:fontRef>
+          </p:style>
+          <p:txBody>
+            <a:bodyPr/>
+            <a:lstStyle/>
+            <a:p>
+              <a:endParaRPr lang="en-US"/>
+            </a:p>
+          </p:txBody>
+        </p:sp>
+        <p:sp>
+          <p:nvSpPr>
+            <p:cNvPr id="26" name="Isosceles Triangle 25">
+              <a:extLst>
+                <a:ext uri="{FF2B5EF4-FFF2-40B4-BE49-F238E27FC236}">
+                  <a16:creationId xmlns:a16="http://schemas.microsoft.com/office/drawing/2014/main" id="{787480DA-3BA5-B3D6-DF41-706AD246002E}"/>
+                </a:ext>
+                <a:ext uri="{C183D7F6-B498-43B3-948B-1728B52AA6E4}">
+                  <adec:decorative xmlns:adec="http://schemas.microsoft.com/office/drawing/2017/decorative" val="1"/>
+                </a:ext>
+              </a:extLst>
+            </p:cNvPr>
+            <p:cNvSpPr/>
+            <p:nvPr>
+              <p:extLst>
+                <p:ext uri="{386F3935-93C4-4BCD-93E2-E3B085C9AB24}">
+                  <p16:designElem xmlns:p16="http://schemas.microsoft.com/office/powerpoint/2015/main" val="1"/>
+                </p:ext>
+              </p:extLst>
+            </p:nvPr>
+          </p:nvSpPr>
+          <p:spPr>
+            <a:xfrm rot="10800000">
+              <a:off x="0" y="0"/>
+              <a:ext cx="842596" cy="5666154"/>
+            </a:xfrm>
+            <a:prstGeom prst="triangle">
+              <a:avLst>
+                <a:gd name="adj" fmla="val 100000"/>
+              </a:avLst>
+            </a:prstGeom>
+            <a:solidFill>
+              <a:schemeClr val="accent1">
+                <a:alpha val="85000"/>
+              </a:schemeClr>
+            </a:solidFill>
+            <a:ln>
+              <a:noFill/>
+            </a:ln>
+            <a:effectLst/>
+          </p:spPr>
+          <p:style>
+            <a:lnRef idx="1">
+              <a:schemeClr val="accent1"/>
+            </a:lnRef>
+            <a:fillRef idx="3">
+              <a:schemeClr val="accent1"/>
+            </a:fillRef>
+            <a:effectRef idx="2">
+              <a:schemeClr val="accent1"/>
+            </a:effectRef>
+            <a:fontRef idx="minor">
+              <a:schemeClr val="lt1"/>
+            </a:fontRef>
+          </p:style>
+          <p:txBody>
+            <a:bodyPr/>
+            <a:lstStyle/>
+            <a:p>
+              <a:endParaRPr lang="en-US"/>
+            </a:p>
+          </p:txBody>
+        </p:sp>
+      </p:grpSp>
+      <p:sp useBgFill="1">
+        <p:nvSpPr>
+          <p:cNvPr id="19" name="Rectangle 18">
+            <a:extLst>
+              <a:ext uri="{FF2B5EF4-FFF2-40B4-BE49-F238E27FC236}">
+                <a16:creationId xmlns:a16="http://schemas.microsoft.com/office/drawing/2014/main" id="{ABBEF3E5-CF60-B776-A5EC-DDDBAB80F8F0}"/>
+              </a:ext>
+              <a:ext uri="{C183D7F6-B498-43B3-948B-1728B52AA6E4}">
+                <adec:decorative xmlns:adec="http://schemas.microsoft.com/office/drawing/2017/decorative" val="1"/>
+              </a:ext>
+            </a:extLst>
+          </p:cNvPr>
+          <p:cNvSpPr>
+            <a:spLocks noGrp="1" noRot="1" noChangeAspect="1" noMove="1" noResize="1" noEditPoints="1" noAdjustHandles="1" noChangeArrowheads="1" noChangeShapeType="1" noTextEdit="1"/>
+          </p:cNvSpPr>
+          <p:nvPr>
+            <p:extLst>
+              <p:ext uri="{386F3935-93C4-4BCD-93E2-E3B085C9AB24}">
+                <p16:designElem xmlns:p16="http://schemas.microsoft.com/office/powerpoint/2015/main" val="1"/>
+              </p:ext>
+            </p:extLst>
+          </p:nvPr>
+        </p:nvSpPr>
+        <p:spPr>
+          <a:xfrm flipH="1">
+            <a:off x="0" y="0"/>
+            <a:ext cx="12192000" cy="6858000"/>
+          </a:xfrm>
+          <a:prstGeom prst="rect">
+            <a:avLst/>
+          </a:prstGeom>
+          <a:ln>
+            <a:noFill/>
+          </a:ln>
+        </p:spPr>
+        <p:style>
+          <a:lnRef idx="2">
+            <a:schemeClr val="accent1">
+              <a:shade val="50000"/>
+            </a:schemeClr>
+          </a:lnRef>
+          <a:fillRef idx="1">
+            <a:schemeClr val="accent1"/>
+          </a:fillRef>
+          <a:effectRef idx="0">
+            <a:schemeClr val="accent1"/>
+          </a:effectRef>
+          <a:fontRef idx="minor">
+            <a:schemeClr val="lt1"/>
+          </a:fontRef>
+        </p:style>
+        <p:txBody>
+          <a:bodyPr rtlCol="0" anchor="ctr"/>
+          <a:lstStyle/>
+          <a:p>
+            <a:pPr algn="ctr"/>
+            <a:endParaRPr lang="en-US"/>
+          </a:p>
+        </p:txBody>
+      </p:sp>
+      <p:cxnSp>
+        <p:nvCxnSpPr>
+          <p:cNvPr id="21" name="Straight Connector 20">
+            <a:extLst>
+              <a:ext uri="{FF2B5EF4-FFF2-40B4-BE49-F238E27FC236}">
+                <a16:creationId xmlns:a16="http://schemas.microsoft.com/office/drawing/2014/main" id="{10C6CED8-C1A8-97E2-4599-1F0921A7D41E}"/>
+              </a:ext>
+              <a:ext uri="{C183D7F6-B498-43B3-948B-1728B52AA6E4}">
+                <adec:decorative xmlns:adec="http://schemas.microsoft.com/office/drawing/2017/decorative" val="1"/>
+              </a:ext>
+            </a:extLst>
+          </p:cNvPr>
+          <p:cNvCxnSpPr>
+            <a:cxnSpLocks noGrp="1" noRot="1" noChangeAspect="1" noMove="1" noResize="1" noEditPoints="1" noAdjustHandles="1" noChangeArrowheads="1" noChangeShapeType="1"/>
+          </p:cNvCxnSpPr>
+          <p:nvPr>
+            <p:extLst>
+              <p:ext uri="{386F3935-93C4-4BCD-93E2-E3B085C9AB24}">
+                <p16:designElem xmlns:p16="http://schemas.microsoft.com/office/powerpoint/2015/main" val="1"/>
+              </p:ext>
+            </p:extLst>
+          </p:nvPr>
+        </p:nvCxnSpPr>
+        <p:spPr>
+          <a:xfrm flipH="1">
+            <a:off x="9524500" y="0"/>
+            <a:ext cx="1219200" cy="6858000"/>
+          </a:xfrm>
+          <a:prstGeom prst="line">
+            <a:avLst/>
+          </a:prstGeom>
+          <a:ln w="9525">
+            <a:solidFill>
+              <a:schemeClr val="accent1">
+                <a:lumMod val="75000"/>
+              </a:schemeClr>
+            </a:solidFill>
+          </a:ln>
+        </p:spPr>
+        <p:style>
+          <a:lnRef idx="2">
+            <a:schemeClr val="accent1"/>
+          </a:lnRef>
+          <a:fillRef idx="0">
+            <a:schemeClr val="accent1"/>
+          </a:fillRef>
+          <a:effectRef idx="1">
+            <a:schemeClr val="accent1"/>
+          </a:effectRef>
+          <a:fontRef idx="minor">
+            <a:schemeClr val="tx1"/>
+          </a:fontRef>
+        </p:style>
+      </p:cxnSp>
+      <p:cxnSp>
+        <p:nvCxnSpPr>
+          <p:cNvPr id="23" name="Straight Connector 22">
+            <a:extLst>
+              <a:ext uri="{FF2B5EF4-FFF2-40B4-BE49-F238E27FC236}">
+                <a16:creationId xmlns:a16="http://schemas.microsoft.com/office/drawing/2014/main" id="{B3912156-7DF1-7B7C-FF3C-B551C1D492CF}"/>
+              </a:ext>
+              <a:ext uri="{C183D7F6-B498-43B3-948B-1728B52AA6E4}">
+                <adec:decorative xmlns:adec="http://schemas.microsoft.com/office/drawing/2017/decorative" val="1"/>
+              </a:ext>
+            </a:extLst>
+          </p:cNvPr>
+          <p:cNvCxnSpPr>
+            <a:cxnSpLocks noGrp="1" noRot="1" noChangeAspect="1" noMove="1" noResize="1" noEditPoints="1" noAdjustHandles="1" noChangeArrowheads="1" noChangeShapeType="1"/>
+          </p:cNvCxnSpPr>
+          <p:nvPr>
+            <p:extLst>
+              <p:ext uri="{386F3935-93C4-4BCD-93E2-E3B085C9AB24}">
+                <p16:designElem xmlns:p16="http://schemas.microsoft.com/office/powerpoint/2015/main" val="1"/>
+              </p:ext>
+            </p:extLst>
+          </p:nvPr>
+        </p:nvCxnSpPr>
+        <p:spPr>
+          <a:xfrm>
+            <a:off x="7361267" y="3681413"/>
+            <a:ext cx="4763558" cy="3176587"/>
+          </a:xfrm>
+          <a:prstGeom prst="line">
+            <a:avLst/>
+          </a:prstGeom>
+          <a:ln w="9525">
+            <a:solidFill>
+              <a:schemeClr val="tx1">
+                <a:lumMod val="50000"/>
+                <a:lumOff val="50000"/>
+                <a:alpha val="80000"/>
+              </a:schemeClr>
+            </a:solidFill>
+          </a:ln>
+        </p:spPr>
+        <p:style>
+          <a:lnRef idx="2">
+            <a:schemeClr val="accent1"/>
+          </a:lnRef>
+          <a:fillRef idx="0">
+            <a:schemeClr val="accent1"/>
+          </a:fillRef>
+          <a:effectRef idx="1">
+            <a:schemeClr val="accent1"/>
+          </a:effectRef>
+          <a:fontRef idx="minor">
+            <a:schemeClr val="tx1"/>
+          </a:fontRef>
+        </p:style>
+      </p:cxnSp>
+      <p:sp>
+        <p:nvSpPr>
+          <p:cNvPr id="25" name="Rectangle 23">
+            <a:extLst>
+              <a:ext uri="{FF2B5EF4-FFF2-40B4-BE49-F238E27FC236}">
+                <a16:creationId xmlns:a16="http://schemas.microsoft.com/office/drawing/2014/main" id="{C3A42393-099B-3312-A416-DD3A85FE9CE9}"/>
+              </a:ext>
+              <a:ext uri="{C183D7F6-B498-43B3-948B-1728B52AA6E4}">
+                <adec:decorative xmlns:adec="http://schemas.microsoft.com/office/drawing/2017/decorative" val="1"/>
+              </a:ext>
+            </a:extLst>
+          </p:cNvPr>
+          <p:cNvSpPr>
+            <a:spLocks noGrp="1" noRot="1" noChangeAspect="1" noMove="1" noResize="1" noEditPoints="1" noAdjustHandles="1" noChangeArrowheads="1" noChangeShapeType="1" noTextEdit="1"/>
+          </p:cNvSpPr>
+          <p:nvPr>
+            <p:extLst>
+              <p:ext uri="{386F3935-93C4-4BCD-93E2-E3B085C9AB24}">
+                <p16:designElem xmlns:p16="http://schemas.microsoft.com/office/powerpoint/2015/main" val="1"/>
+              </p:ext>
+            </p:extLst>
+          </p:nvPr>
+        </p:nvSpPr>
+        <p:spPr>
+          <a:xfrm flipH="1">
+            <a:off x="7925887" y="-8467"/>
+            <a:ext cx="3007349" cy="6866467"/>
+          </a:xfrm>
+          <a:custGeom>
+            <a:avLst/>
+            <a:gdLst/>
+            <a:ahLst/>
+            <a:cxnLst/>
+            <a:rect l="l" t="t" r="r" b="b"/>
+            <a:pathLst>
+              <a:path w="3007349" h="6866467">
+                <a:moveTo>
+                  <a:pt x="2045532" y="0"/>
+                </a:moveTo>
+                <a:lnTo>
+                  <a:pt x="3007349" y="0"/>
+                </a:lnTo>
+                <a:lnTo>
+                  <a:pt x="3007349" y="6866467"/>
+                </a:lnTo>
+                <a:lnTo>
+                  <a:pt x="0" y="6866467"/>
+                </a:lnTo>
+                <a:lnTo>
+                  <a:pt x="2045532" y="0"/>
+                </a:lnTo>
+                <a:close/>
+              </a:path>
+            </a:pathLst>
+          </a:custGeom>
+          <a:solidFill>
+            <a:schemeClr val="accent1">
+              <a:alpha val="30000"/>
+            </a:schemeClr>
+          </a:solidFill>
+          <a:ln>
+            <a:noFill/>
+          </a:ln>
+          <a:effectLst/>
+        </p:spPr>
+        <p:style>
+          <a:lnRef idx="1">
+            <a:schemeClr val="accent1"/>
+          </a:lnRef>
+          <a:fillRef idx="3">
+            <a:schemeClr val="accent1"/>
+          </a:fillRef>
+          <a:effectRef idx="2">
+            <a:schemeClr val="accent1"/>
+          </a:effectRef>
+          <a:fontRef idx="minor">
+            <a:schemeClr val="lt1"/>
+          </a:fontRef>
+        </p:style>
+        <p:txBody>
+          <a:bodyPr/>
+          <a:lstStyle/>
+          <a:p>
+            <a:endParaRPr lang="en-US"/>
+          </a:p>
+        </p:txBody>
+      </p:sp>
+      <p:sp>
+        <p:nvSpPr>
+          <p:cNvPr id="27" name="Rectangle 25">
+            <a:extLst>
+              <a:ext uri="{FF2B5EF4-FFF2-40B4-BE49-F238E27FC236}">
+                <a16:creationId xmlns:a16="http://schemas.microsoft.com/office/drawing/2014/main" id="{035A746D-9D45-4EA2-1FB8-CC24D821073F}"/>
+              </a:ext>
+              <a:ext uri="{C183D7F6-B498-43B3-948B-1728B52AA6E4}">
+                <adec:decorative xmlns:adec="http://schemas.microsoft.com/office/drawing/2017/decorative" val="1"/>
+              </a:ext>
+            </a:extLst>
+          </p:cNvPr>
+          <p:cNvSpPr>
+            <a:spLocks noGrp="1" noRot="1" noChangeAspect="1" noMove="1" noResize="1" noEditPoints="1" noAdjustHandles="1" noChangeArrowheads="1" noChangeShapeType="1" noTextEdit="1"/>
+          </p:cNvSpPr>
+          <p:nvPr>
+            <p:extLst>
+              <p:ext uri="{386F3935-93C4-4BCD-93E2-E3B085C9AB24}">
+                <p16:designElem xmlns:p16="http://schemas.microsoft.com/office/powerpoint/2015/main" val="1"/>
+              </p:ext>
+            </p:extLst>
+          </p:nvPr>
+        </p:nvSpPr>
+        <p:spPr>
+          <a:xfrm flipH="1">
+            <a:off x="7922712" y="-8467"/>
+            <a:ext cx="2588558" cy="6866467"/>
+          </a:xfrm>
+          <a:custGeom>
+            <a:avLst/>
+            <a:gdLst/>
+            <a:ahLst/>
+            <a:cxnLst/>
+            <a:rect l="l" t="t" r="r" b="b"/>
+            <a:pathLst>
+              <a:path w="2573311" h="6866467">
+                <a:moveTo>
+                  <a:pt x="0" y="0"/>
+                </a:moveTo>
+                <a:lnTo>
+                  <a:pt x="2573311" y="0"/>
+                </a:lnTo>
+                <a:lnTo>
+                  <a:pt x="2573311" y="6866467"/>
+                </a:lnTo>
+                <a:lnTo>
+                  <a:pt x="1202336" y="6866467"/>
+                </a:lnTo>
+                <a:lnTo>
+                  <a:pt x="0" y="0"/>
+                </a:lnTo>
+                <a:close/>
+              </a:path>
+            </a:pathLst>
+          </a:custGeom>
+          <a:solidFill>
+            <a:schemeClr val="accent1">
+              <a:alpha val="20000"/>
+            </a:schemeClr>
+          </a:solidFill>
+          <a:ln>
+            <a:noFill/>
+          </a:ln>
+          <a:effectLst/>
+        </p:spPr>
+        <p:style>
+          <a:lnRef idx="1">
+            <a:schemeClr val="accent1"/>
+          </a:lnRef>
+          <a:fillRef idx="3">
+            <a:schemeClr val="accent1"/>
+          </a:fillRef>
+          <a:effectRef idx="2">
+            <a:schemeClr val="accent1"/>
+          </a:effectRef>
+          <a:fontRef idx="minor">
+            <a:schemeClr val="lt1"/>
+          </a:fontRef>
+        </p:style>
+        <p:txBody>
+          <a:bodyPr/>
+          <a:lstStyle/>
+          <a:p>
+            <a:endParaRPr lang="en-US"/>
+          </a:p>
+        </p:txBody>
+      </p:sp>
+      <p:sp>
+        <p:nvSpPr>
+          <p:cNvPr id="29" name="Isosceles Triangle 28">
+            <a:extLst>
+              <a:ext uri="{FF2B5EF4-FFF2-40B4-BE49-F238E27FC236}">
+                <a16:creationId xmlns:a16="http://schemas.microsoft.com/office/drawing/2014/main" id="{6463ECA6-5A29-0A41-09AC-36610656E405}"/>
+              </a:ext>
+              <a:ext uri="{C183D7F6-B498-43B3-948B-1728B52AA6E4}">
+                <adec:decorative xmlns:adec="http://schemas.microsoft.com/office/drawing/2017/decorative" val="1"/>
+              </a:ext>
+            </a:extLst>
+          </p:cNvPr>
+          <p:cNvSpPr>
+            <a:spLocks noGrp="1" noRot="1" noChangeAspect="1" noMove="1" noResize="1" noEditPoints="1" noAdjustHandles="1" noChangeArrowheads="1" noChangeShapeType="1" noTextEdit="1"/>
+          </p:cNvSpPr>
+          <p:nvPr>
+            <p:extLst>
+              <p:ext uri="{386F3935-93C4-4BCD-93E2-E3B085C9AB24}">
+                <p16:designElem xmlns:p16="http://schemas.microsoft.com/office/powerpoint/2015/main" val="1"/>
+              </p:ext>
+            </p:extLst>
+          </p:nvPr>
+        </p:nvSpPr>
+        <p:spPr>
+          <a:xfrm flipH="1">
+            <a:off x="7922712" y="3048000"/>
+            <a:ext cx="3259667" cy="3810000"/>
+          </a:xfrm>
+          <a:prstGeom prst="triangle">
+            <a:avLst>
+              <a:gd name="adj" fmla="val 100000"/>
+            </a:avLst>
+          </a:prstGeom>
+          <a:solidFill>
+            <a:schemeClr val="accent2">
+              <a:alpha val="72000"/>
+            </a:schemeClr>
+          </a:solidFill>
+          <a:ln>
+            <a:noFill/>
+          </a:ln>
+          <a:effectLst/>
+        </p:spPr>
+        <p:style>
+          <a:lnRef idx="1">
+            <a:schemeClr val="accent1"/>
+          </a:lnRef>
+          <a:fillRef idx="3">
+            <a:schemeClr val="accent1"/>
+          </a:fillRef>
+          <a:effectRef idx="2">
+            <a:schemeClr val="accent1"/>
+          </a:effectRef>
+          <a:fontRef idx="minor">
+            <a:schemeClr val="lt1"/>
+          </a:fontRef>
+        </p:style>
+        <p:txBody>
+          <a:bodyPr/>
+          <a:lstStyle/>
+          <a:p>
+            <a:endParaRPr lang="en-US"/>
+          </a:p>
+        </p:txBody>
+      </p:sp>
+      <p:sp>
+        <p:nvSpPr>
+          <p:cNvPr id="31" name="Rectangle 27">
+            <a:extLst>
+              <a:ext uri="{FF2B5EF4-FFF2-40B4-BE49-F238E27FC236}">
+                <a16:creationId xmlns:a16="http://schemas.microsoft.com/office/drawing/2014/main" id="{B71DB747-FE77-80B2-5E5D-D73EDE0F9FD9}"/>
+              </a:ext>
+              <a:ext uri="{C183D7F6-B498-43B3-948B-1728B52AA6E4}">
+                <adec:decorative xmlns:adec="http://schemas.microsoft.com/office/drawing/2017/decorative" val="1"/>
+              </a:ext>
+            </a:extLst>
+          </p:cNvPr>
+          <p:cNvSpPr>
+            <a:spLocks noGrp="1" noRot="1" noChangeAspect="1" noMove="1" noResize="1" noEditPoints="1" noAdjustHandles="1" noChangeArrowheads="1" noChangeShapeType="1" noTextEdit="1"/>
+          </p:cNvSpPr>
+          <p:nvPr>
+            <p:extLst>
+              <p:ext uri="{386F3935-93C4-4BCD-93E2-E3B085C9AB24}">
+                <p16:designElem xmlns:p16="http://schemas.microsoft.com/office/powerpoint/2015/main" val="1"/>
+              </p:ext>
+            </p:extLst>
+          </p:nvPr>
+        </p:nvSpPr>
+        <p:spPr>
+          <a:xfrm flipH="1">
+            <a:off x="7925886" y="-8467"/>
+            <a:ext cx="2854326" cy="6866467"/>
+          </a:xfrm>
+          <a:custGeom>
+            <a:avLst/>
+            <a:gdLst/>
+            <a:ahLst/>
+            <a:cxnLst/>
+            <a:rect l="l" t="t" r="r" b="b"/>
+            <a:pathLst>
+              <a:path w="2858013" h="6866467">
+                <a:moveTo>
+                  <a:pt x="0" y="0"/>
+                </a:moveTo>
+                <a:lnTo>
+                  <a:pt x="2858013" y="0"/>
+                </a:lnTo>
+                <a:lnTo>
+                  <a:pt x="2858013" y="6866467"/>
+                </a:lnTo>
+                <a:lnTo>
+                  <a:pt x="2473942" y="6866467"/>
+                </a:lnTo>
+                <a:lnTo>
+                  <a:pt x="0" y="0"/>
+                </a:lnTo>
+                <a:close/>
+              </a:path>
+            </a:pathLst>
+          </a:custGeom>
+          <a:solidFill>
+            <a:schemeClr val="accent2">
+              <a:lumMod val="75000"/>
+              <a:alpha val="70000"/>
+            </a:schemeClr>
+          </a:solidFill>
+          <a:ln>
+            <a:noFill/>
+          </a:ln>
+          <a:effectLst/>
+        </p:spPr>
+        <p:style>
+          <a:lnRef idx="1">
+            <a:schemeClr val="accent1"/>
+          </a:lnRef>
+          <a:fillRef idx="3">
+            <a:schemeClr val="accent1"/>
+          </a:fillRef>
+          <a:effectRef idx="2">
+            <a:schemeClr val="accent1"/>
+          </a:effectRef>
+          <a:fontRef idx="minor">
+            <a:schemeClr val="lt1"/>
+          </a:fontRef>
+        </p:style>
+        <p:txBody>
+          <a:bodyPr/>
+          <a:lstStyle/>
+          <a:p>
+            <a:endParaRPr lang="en-US"/>
+          </a:p>
+        </p:txBody>
+      </p:sp>
+      <p:sp>
+        <p:nvSpPr>
+          <p:cNvPr id="33" name="Isosceles Triangle 32">
+            <a:extLst>
+              <a:ext uri="{FF2B5EF4-FFF2-40B4-BE49-F238E27FC236}">
+                <a16:creationId xmlns:a16="http://schemas.microsoft.com/office/drawing/2014/main" id="{22D4B02D-D013-0297-6D31-3B7BD1F5F72D}"/>
+              </a:ext>
+              <a:ext uri="{C183D7F6-B498-43B3-948B-1728B52AA6E4}">
+                <adec:decorative xmlns:adec="http://schemas.microsoft.com/office/drawing/2017/decorative" val="1"/>
+              </a:ext>
+            </a:extLst>
+          </p:cNvPr>
+          <p:cNvSpPr>
+            <a:spLocks noGrp="1" noRot="1" noChangeAspect="1" noMove="1" noResize="1" noEditPoints="1" noAdjustHandles="1" noChangeArrowheads="1" noChangeShapeType="1" noTextEdit="1"/>
+          </p:cNvSpPr>
+          <p:nvPr>
+            <p:extLst>
+              <p:ext uri="{386F3935-93C4-4BCD-93E2-E3B085C9AB24}">
+                <p16:designElem xmlns:p16="http://schemas.microsoft.com/office/powerpoint/2015/main" val="1"/>
+              </p:ext>
+            </p:extLst>
+          </p:nvPr>
+        </p:nvSpPr>
+        <p:spPr>
+          <a:xfrm flipH="1">
+            <a:off x="7925887" y="3589867"/>
+            <a:ext cx="1817159" cy="3268133"/>
+          </a:xfrm>
+          <a:prstGeom prst="triangle">
+            <a:avLst>
+              <a:gd name="adj" fmla="val 100000"/>
+            </a:avLst>
+          </a:prstGeom>
+          <a:solidFill>
+            <a:schemeClr val="accent1">
+              <a:alpha val="80000"/>
+            </a:schemeClr>
+          </a:solidFill>
+          <a:ln>
+            <a:noFill/>
+          </a:ln>
+          <a:effectLst/>
+        </p:spPr>
+        <p:style>
+          <a:lnRef idx="1">
+            <a:schemeClr val="accent1"/>
+          </a:lnRef>
+          <a:fillRef idx="3">
+            <a:schemeClr val="accent1"/>
+          </a:fillRef>
+          <a:effectRef idx="2">
+            <a:schemeClr val="accent1"/>
+          </a:effectRef>
+          <a:fontRef idx="minor">
+            <a:schemeClr val="lt1"/>
+          </a:fontRef>
+        </p:style>
+        <p:txBody>
+          <a:bodyPr/>
+          <a:lstStyle/>
+          <a:p>
+            <a:endParaRPr lang="en-US"/>
+          </a:p>
+        </p:txBody>
+      </p:sp>
+      <p:sp>
+        <p:nvSpPr>
+          <p:cNvPr id="35" name="Freeform: Shape 34">
+            <a:extLst>
+              <a:ext uri="{FF2B5EF4-FFF2-40B4-BE49-F238E27FC236}">
+                <a16:creationId xmlns:a16="http://schemas.microsoft.com/office/drawing/2014/main" id="{6378BB4B-2E70-3A81-35E8-932EC27D0CF4}"/>
+              </a:ext>
+              <a:ext uri="{C183D7F6-B498-43B3-948B-1728B52AA6E4}">
+                <adec:decorative xmlns:adec="http://schemas.microsoft.com/office/drawing/2017/decorative" val="1"/>
+              </a:ext>
+            </a:extLst>
+          </p:cNvPr>
+          <p:cNvSpPr>
+            <a:spLocks noGrp="1" noRot="1" noChangeAspect="1" noMove="1" noResize="1" noEditPoints="1" noAdjustHandles="1" noChangeArrowheads="1" noChangeShapeType="1" noTextEdit="1"/>
+          </p:cNvSpPr>
+          <p:nvPr>
+            <p:extLst>
+              <p:ext uri="{386F3935-93C4-4BCD-93E2-E3B085C9AB24}">
+                <p16:designElem xmlns:p16="http://schemas.microsoft.com/office/powerpoint/2015/main" val="1"/>
+              </p:ext>
+            </p:extLst>
+          </p:nvPr>
+        </p:nvSpPr>
+        <p:spPr>
+          <a:xfrm flipH="1">
+            <a:off x="0" y="-8467"/>
+            <a:ext cx="9175713" cy="6866467"/>
+          </a:xfrm>
+          <a:custGeom>
+            <a:avLst/>
+            <a:gdLst>
+              <a:gd name="connsiteX0" fmla="*/ 0 w 9175713"/>
+              <a:gd name="connsiteY0" fmla="*/ 0 h 6866467"/>
+              <a:gd name="connsiteX1" fmla="*/ 1249825 w 9175713"/>
+              <a:gd name="connsiteY1" fmla="*/ 0 h 6866467"/>
+              <a:gd name="connsiteX2" fmla="*/ 1249825 w 9175713"/>
+              <a:gd name="connsiteY2" fmla="*/ 8467 h 6866467"/>
+              <a:gd name="connsiteX3" fmla="*/ 9175713 w 9175713"/>
+              <a:gd name="connsiteY3" fmla="*/ 8467 h 6866467"/>
+              <a:gd name="connsiteX4" fmla="*/ 9175713 w 9175713"/>
+              <a:gd name="connsiteY4" fmla="*/ 6866467 h 6866467"/>
+              <a:gd name="connsiteX5" fmla="*/ 1249825 w 9175713"/>
+              <a:gd name="connsiteY5" fmla="*/ 6866467 h 6866467"/>
+              <a:gd name="connsiteX6" fmla="*/ 1109382 w 9175713"/>
+              <a:gd name="connsiteY6" fmla="*/ 6866467 h 6866467"/>
+            </a:gdLst>
+            <a:ahLst/>
+            <a:cxnLst>
+              <a:cxn ang="0">
+                <a:pos x="connsiteX0" y="connsiteY0"/>
+              </a:cxn>
+              <a:cxn ang="0">
+                <a:pos x="connsiteX1" y="connsiteY1"/>
+              </a:cxn>
+              <a:cxn ang="0">
+                <a:pos x="connsiteX2" y="connsiteY2"/>
+              </a:cxn>
+              <a:cxn ang="0">
+                <a:pos x="connsiteX3" y="connsiteY3"/>
+              </a:cxn>
+              <a:cxn ang="0">
+                <a:pos x="connsiteX4" y="connsiteY4"/>
+              </a:cxn>
+              <a:cxn ang="0">
+                <a:pos x="connsiteX5" y="connsiteY5"/>
+              </a:cxn>
+              <a:cxn ang="0">
+                <a:pos x="connsiteX6" y="connsiteY6"/>
+              </a:cxn>
+            </a:cxnLst>
+            <a:rect l="l" t="t" r="r" b="b"/>
+            <a:pathLst>
+              <a:path w="9175713" h="6866467">
+                <a:moveTo>
+                  <a:pt x="0" y="0"/>
+                </a:moveTo>
+                <a:lnTo>
+                  <a:pt x="1249825" y="0"/>
+                </a:lnTo>
+                <a:lnTo>
+                  <a:pt x="1249825" y="8467"/>
+                </a:lnTo>
+                <a:lnTo>
+                  <a:pt x="9175713" y="8467"/>
+                </a:lnTo>
+                <a:lnTo>
+                  <a:pt x="9175713" y="6866467"/>
+                </a:lnTo>
+                <a:lnTo>
+                  <a:pt x="1249825" y="6866467"/>
+                </a:lnTo>
+                <a:lnTo>
+                  <a:pt x="1109382" y="6866467"/>
+                </a:lnTo>
+                <a:close/>
+              </a:path>
+            </a:pathLst>
+          </a:custGeom>
+          <a:solidFill>
+            <a:schemeClr val="accent1"/>
+          </a:solidFill>
+          <a:ln>
+            <a:noFill/>
+          </a:ln>
+        </p:spPr>
+        <p:style>
+          <a:lnRef idx="2">
+            <a:schemeClr val="accent1">
+              <a:shade val="50000"/>
+            </a:schemeClr>
+          </a:lnRef>
+          <a:fillRef idx="1">
+            <a:schemeClr val="accent1"/>
+          </a:fillRef>
+          <a:effectRef idx="0">
+            <a:schemeClr val="accent1"/>
+          </a:effectRef>
+          <a:fontRef idx="minor">
+            <a:schemeClr val="lt1"/>
+          </a:fontRef>
+        </p:style>
+        <p:txBody>
+          <a:bodyPr rtlCol="0" anchor="ctr"/>
+          <a:lstStyle/>
+          <a:p>
+            <a:pPr algn="ctr"/>
+            <a:endParaRPr lang="en-US"/>
+          </a:p>
+        </p:txBody>
+      </p:sp>
+      <p:sp>
+        <p:nvSpPr>
+          <p:cNvPr id="2" name="Title 1">
+            <a:extLst>
+              <a:ext uri="{FF2B5EF4-FFF2-40B4-BE49-F238E27FC236}">
+                <a16:creationId xmlns:a16="http://schemas.microsoft.com/office/drawing/2014/main" id="{FECF7B30-7ED2-3C1B-26BA-E8DB17C2C0E0}"/>
+              </a:ext>
+            </a:extLst>
+          </p:cNvPr>
+          <p:cNvSpPr>
+            <a:spLocks noGrp="1"/>
+          </p:cNvSpPr>
+          <p:nvPr>
+            <p:ph type="title"/>
+          </p:nvPr>
+        </p:nvSpPr>
+        <p:spPr>
+          <a:xfrm>
+            <a:off x="1554120" y="1020871"/>
+            <a:ext cx="6960759" cy="2849671"/>
+          </a:xfrm>
+        </p:spPr>
+        <p:txBody>
+          <a:bodyPr vert="horz" lIns="91440" tIns="45720" rIns="91440" bIns="45720" rtlCol="0" anchor="b">
+            <a:normAutofit/>
+          </a:bodyPr>
+          <a:lstStyle/>
+          <a:p>
+            <a:pPr>
+              <a:lnSpc>
+                <a:spcPct val="90000"/>
+              </a:lnSpc>
+            </a:pPr>
+            <a:r>
+              <a:rPr lang="pt-PT" sz="6600" dirty="0" err="1">
+                <a:solidFill>
+                  <a:srgbClr val="FFFFFF"/>
+                </a:solidFill>
+              </a:rPr>
+              <a:t>Tokens</a:t>
+            </a:r>
+            <a:r>
+              <a:rPr lang="en-US" sz="6600" dirty="0">
+                <a:solidFill>
+                  <a:srgbClr val="FFFFFF"/>
+                </a:solidFill>
+              </a:rPr>
+              <a:t>/s </a:t>
+            </a:r>
+            <a:r>
+              <a:rPr lang="en-US" sz="6600" dirty="0" err="1">
+                <a:solidFill>
+                  <a:srgbClr val="FFFFFF"/>
+                </a:solidFill>
+              </a:rPr>
+              <a:t>por</a:t>
+            </a:r>
+            <a:r>
+              <a:rPr lang="en-US" sz="6600" dirty="0">
+                <a:solidFill>
+                  <a:srgbClr val="FFFFFF"/>
+                </a:solidFill>
+              </a:rPr>
+              <a:t> </a:t>
+            </a:r>
+            <a:r>
+              <a:rPr lang="en-US" sz="6600" dirty="0" err="1">
+                <a:solidFill>
+                  <a:srgbClr val="FFFFFF"/>
+                </a:solidFill>
+              </a:rPr>
+              <a:t>Quantidade</a:t>
+            </a:r>
+            <a:r>
+              <a:rPr lang="en-US" sz="6600" dirty="0">
+                <a:solidFill>
+                  <a:srgbClr val="FFFFFF"/>
+                </a:solidFill>
+              </a:rPr>
+              <a:t> de Logs </a:t>
+            </a:r>
+          </a:p>
+        </p:txBody>
+      </p:sp>
+      <p:sp>
+        <p:nvSpPr>
+          <p:cNvPr id="37" name="Isosceles Triangle 36">
+            <a:extLst>
+              <a:ext uri="{FF2B5EF4-FFF2-40B4-BE49-F238E27FC236}">
+                <a16:creationId xmlns:a16="http://schemas.microsoft.com/office/drawing/2014/main" id="{B6990CCA-904F-49CE-9033-8AEB9314C3F4}"/>
+              </a:ext>
+              <a:ext uri="{C183D7F6-B498-43B3-948B-1728B52AA6E4}">
+                <adec:decorative xmlns:adec="http://schemas.microsoft.com/office/drawing/2017/decorative" val="1"/>
+              </a:ext>
+            </a:extLst>
+          </p:cNvPr>
+          <p:cNvSpPr>
+            <a:spLocks noGrp="1" noRot="1" noChangeAspect="1" noMove="1" noResize="1" noEditPoints="1" noAdjustHandles="1" noChangeArrowheads="1" noChangeShapeType="1" noTextEdit="1"/>
+          </p:cNvSpPr>
+          <p:nvPr>
+            <p:extLst>
+              <p:ext uri="{386F3935-93C4-4BCD-93E2-E3B085C9AB24}">
+                <p16:designElem xmlns:p16="http://schemas.microsoft.com/office/powerpoint/2015/main" val="1"/>
+              </p:ext>
+            </p:extLst>
+          </p:nvPr>
+        </p:nvSpPr>
+        <p:spPr>
+          <a:xfrm rot="5400000">
+            <a:off x="992146" y="3271487"/>
+            <a:ext cx="220660" cy="186439"/>
+          </a:xfrm>
+          <a:prstGeom prst="triangle">
+            <a:avLst/>
+          </a:prstGeom>
+          <a:solidFill>
+            <a:srgbClr val="FFFFFF"/>
+          </a:solidFill>
+          <a:ln>
+            <a:noFill/>
+          </a:ln>
+        </p:spPr>
+        <p:style>
+          <a:lnRef idx="2">
+            <a:schemeClr val="accent1">
+              <a:shade val="50000"/>
+            </a:schemeClr>
+          </a:lnRef>
+          <a:fillRef idx="1">
+            <a:schemeClr val="accent1"/>
+          </a:fillRef>
+          <a:effectRef idx="0">
+            <a:schemeClr val="accent1"/>
+          </a:effectRef>
+          <a:fontRef idx="minor">
+            <a:schemeClr val="lt1"/>
+          </a:fontRef>
+        </p:style>
+        <p:txBody>
+          <a:bodyPr rtlCol="0" anchor="ctr"/>
+          <a:lstStyle/>
+          <a:p>
+            <a:pPr algn="ctr"/>
+            <a:endParaRPr lang="en-US"/>
+          </a:p>
+        </p:txBody>
+      </p:sp>
+    </p:spTree>
+    <p:extLst>
+      <p:ext uri="{BB962C8B-B14F-4D97-AF65-F5344CB8AC3E}">
+        <p14:creationId xmlns:p14="http://schemas.microsoft.com/office/powerpoint/2010/main" val="736792763"/>
+      </p:ext>
+    </p:extLst>
+  </p:cSld>
+  <p:clrMapOvr>
+    <a:masterClrMapping/>
+  </p:clrMapOvr>
+</p:sld>
+</file>
+
+<file path=ppt/slides/slide7.xml><?xml version="1.0" encoding="utf-8"?>
 <p:sld xmlns:a="http://schemas.openxmlformats.org/drawingml/2006/main" xmlns:r="http://schemas.openxmlformats.org/officeDocument/2006/relationships" xmlns:p="http://schemas.openxmlformats.org/presentationml/2006/main">
   <p:cSld>
     <p:spTree>
@@ -36559,7 +40113,7 @@
 </p:sld>
 </file>
 
-<file path=ppt/slides/slide7.xml><?xml version="1.0" encoding="utf-8"?>
+<file path=ppt/slides/slide8.xml><?xml version="1.0" encoding="utf-8"?>
 <p:sld xmlns:a="http://schemas.openxmlformats.org/drawingml/2006/main" xmlns:r="http://schemas.openxmlformats.org/officeDocument/2006/relationships" xmlns:p="http://schemas.openxmlformats.org/presentationml/2006/main">
   <p:cSld>
     <p:spTree>
@@ -36701,12 +40255,26 @@
 </p:sld>
 </file>
 
-<file path=ppt/slides/slide8.xml><?xml version="1.0" encoding="utf-8"?>
+<file path=ppt/slides/slide9.xml><?xml version="1.0" encoding="utf-8"?>
 <p:sld xmlns:a="http://schemas.openxmlformats.org/drawingml/2006/main" xmlns:r="http://schemas.openxmlformats.org/officeDocument/2006/relationships" xmlns:p="http://schemas.openxmlformats.org/presentationml/2006/main">
   <p:cSld>
+    <p:bg>
+      <p:bgPr>
+        <a:solidFill>
+          <a:schemeClr val="bg1"/>
+        </a:solidFill>
+        <a:effectLst/>
+      </p:bgPr>
+    </p:bg>
     <p:spTree>
       <p:nvGrpSpPr>
-        <p:cNvPr id="1" name=""/>
+        <p:cNvPr id="1" name="">
+          <a:extLst>
+            <a:ext uri="{FF2B5EF4-FFF2-40B4-BE49-F238E27FC236}">
+              <a16:creationId xmlns:a16="http://schemas.microsoft.com/office/drawing/2014/main" id="{CDED519C-D00C-B648-7490-3E69EB2DB0D3}"/>
+            </a:ext>
+          </a:extLst>
+        </p:cNvPr>
         <p:cNvGrpSpPr/>
         <p:nvPr/>
       </p:nvGrpSpPr>
@@ -36718,264 +40286,1602 @@
           <a:chExt cx="0" cy="0"/>
         </a:xfrm>
       </p:grpSpPr>
-      <p:graphicFrame>
-        <p:nvGraphicFramePr>
-          <p:cNvPr id="2" name="Chart 1">
+      <p:grpSp>
+        <p:nvGrpSpPr>
+          <p:cNvPr id="7" name="Group 6">
             <a:extLst>
               <a:ext uri="{FF2B5EF4-FFF2-40B4-BE49-F238E27FC236}">
-                <a16:creationId xmlns:a16="http://schemas.microsoft.com/office/drawing/2014/main" id="{F7C4CA31-8D6C-EEC9-FF8E-A864971B8B12}"/>
+                <a16:creationId xmlns:a16="http://schemas.microsoft.com/office/drawing/2014/main" id="{CEE54319-3494-1C67-B4A7-4827A838E6D5}"/>
+              </a:ext>
+              <a:ext uri="{C183D7F6-B498-43B3-948B-1728B52AA6E4}">
+                <adec:decorative xmlns:adec="http://schemas.microsoft.com/office/drawing/2017/decorative" val="1"/>
               </a:ext>
             </a:extLst>
           </p:cNvPr>
-          <p:cNvGraphicFramePr/>
+          <p:cNvGrpSpPr>
+            <a:grpSpLocks noGrp="1" noUngrp="1" noRot="1" noChangeAspect="1" noMove="1" noResize="1"/>
+          </p:cNvGrpSpPr>
           <p:nvPr>
             <p:extLst>
-              <p:ext uri="{D42A27DB-BD31-4B8C-83A1-F6EECF244321}">
-                <p14:modId xmlns:p14="http://schemas.microsoft.com/office/powerpoint/2010/main" val="3064158216"/>
+              <p:ext uri="{386F3935-93C4-4BCD-93E2-E3B085C9AB24}">
+                <p16:designElem xmlns:p16="http://schemas.microsoft.com/office/powerpoint/2015/main" val="1"/>
               </p:ext>
             </p:extLst>
           </p:nvPr>
-        </p:nvGraphicFramePr>
-        <p:xfrm>
-          <a:off x="604982" y="150090"/>
-          <a:ext cx="4918364" cy="3278910"/>
-        </p:xfrm>
-        <a:graphic>
-          <a:graphicData uri="http://schemas.openxmlformats.org/drawingml/2006/chart">
-            <c:chart xmlns:c="http://schemas.openxmlformats.org/drawingml/2006/chart" xmlns:r="http://schemas.openxmlformats.org/officeDocument/2006/relationships" r:id="rId2"/>
-          </a:graphicData>
-        </a:graphic>
-      </p:graphicFrame>
-      <p:graphicFrame>
-        <p:nvGraphicFramePr>
-          <p:cNvPr id="4" name="Chart 3">
+        </p:nvGrpSpPr>
+        <p:grpSpPr>
+          <a:xfrm>
+            <a:off x="0" y="-8467"/>
+            <a:ext cx="12192000" cy="6866467"/>
+            <a:chOff x="0" y="-8467"/>
+            <a:chExt cx="12192000" cy="6866467"/>
+          </a:xfrm>
+        </p:grpSpPr>
+        <p:cxnSp>
+          <p:nvCxnSpPr>
+            <p:cNvPr id="8" name="Straight Connector 7">
+              <a:extLst>
+                <a:ext uri="{FF2B5EF4-FFF2-40B4-BE49-F238E27FC236}">
+                  <a16:creationId xmlns:a16="http://schemas.microsoft.com/office/drawing/2014/main" id="{525BF4ED-CC58-E80F-9FF0-EDA752B3A285}"/>
+                </a:ext>
+                <a:ext uri="{C183D7F6-B498-43B3-948B-1728B52AA6E4}">
+                  <adec:decorative xmlns:adec="http://schemas.microsoft.com/office/drawing/2017/decorative" val="1"/>
+                </a:ext>
+              </a:extLst>
+            </p:cNvPr>
+            <p:cNvCxnSpPr/>
+            <p:nvPr>
+              <p:extLst>
+                <p:ext uri="{386F3935-93C4-4BCD-93E2-E3B085C9AB24}">
+                  <p16:designElem xmlns:p16="http://schemas.microsoft.com/office/powerpoint/2015/main" val="1"/>
+                </p:ext>
+              </p:extLst>
+            </p:nvPr>
+          </p:nvCxnSpPr>
+          <p:spPr>
+            <a:xfrm>
+              <a:off x="9371012" y="0"/>
+              <a:ext cx="1219200" cy="6858000"/>
+            </a:xfrm>
+            <a:prstGeom prst="line">
+              <a:avLst/>
+            </a:prstGeom>
+            <a:ln w="9525">
+              <a:solidFill>
+                <a:schemeClr val="bg1">
+                  <a:lumMod val="75000"/>
+                </a:schemeClr>
+              </a:solidFill>
+            </a:ln>
+          </p:spPr>
+          <p:style>
+            <a:lnRef idx="2">
+              <a:schemeClr val="accent1"/>
+            </a:lnRef>
+            <a:fillRef idx="0">
+              <a:schemeClr val="accent1"/>
+            </a:fillRef>
+            <a:effectRef idx="1">
+              <a:schemeClr val="accent1"/>
+            </a:effectRef>
+            <a:fontRef idx="minor">
+              <a:schemeClr val="tx1"/>
+            </a:fontRef>
+          </p:style>
+        </p:cxnSp>
+        <p:cxnSp>
+          <p:nvCxnSpPr>
+            <p:cNvPr id="9" name="Straight Connector 8">
+              <a:extLst>
+                <a:ext uri="{FF2B5EF4-FFF2-40B4-BE49-F238E27FC236}">
+                  <a16:creationId xmlns:a16="http://schemas.microsoft.com/office/drawing/2014/main" id="{B817CA85-C2AA-84F5-7E9D-DC1FEC78F80B}"/>
+                </a:ext>
+                <a:ext uri="{C183D7F6-B498-43B3-948B-1728B52AA6E4}">
+                  <adec:decorative xmlns:adec="http://schemas.microsoft.com/office/drawing/2017/decorative" val="1"/>
+                </a:ext>
+              </a:extLst>
+            </p:cNvPr>
+            <p:cNvCxnSpPr/>
+            <p:nvPr>
+              <p:extLst>
+                <p:ext uri="{386F3935-93C4-4BCD-93E2-E3B085C9AB24}">
+                  <p16:designElem xmlns:p16="http://schemas.microsoft.com/office/powerpoint/2015/main" val="1"/>
+                </p:ext>
+              </p:extLst>
+            </p:nvPr>
+          </p:nvCxnSpPr>
+          <p:spPr>
+            <a:xfrm flipH="1">
+              <a:off x="7425267" y="3681413"/>
+              <a:ext cx="4763558" cy="3176587"/>
+            </a:xfrm>
+            <a:prstGeom prst="line">
+              <a:avLst/>
+            </a:prstGeom>
+            <a:ln w="9525">
+              <a:solidFill>
+                <a:schemeClr val="bg1">
+                  <a:lumMod val="85000"/>
+                </a:schemeClr>
+              </a:solidFill>
+            </a:ln>
+          </p:spPr>
+          <p:style>
+            <a:lnRef idx="2">
+              <a:schemeClr val="accent1"/>
+            </a:lnRef>
+            <a:fillRef idx="0">
+              <a:schemeClr val="accent1"/>
+            </a:fillRef>
+            <a:effectRef idx="1">
+              <a:schemeClr val="accent1"/>
+            </a:effectRef>
+            <a:fontRef idx="minor">
+              <a:schemeClr val="tx1"/>
+            </a:fontRef>
+          </p:style>
+        </p:cxnSp>
+        <p:sp>
+          <p:nvSpPr>
+            <p:cNvPr id="4" name="Rectangle 23">
+              <a:extLst>
+                <a:ext uri="{FF2B5EF4-FFF2-40B4-BE49-F238E27FC236}">
+                  <a16:creationId xmlns:a16="http://schemas.microsoft.com/office/drawing/2014/main" id="{34B943FB-53CA-75E4-D559-DF174B38A366}"/>
+                </a:ext>
+                <a:ext uri="{C183D7F6-B498-43B3-948B-1728B52AA6E4}">
+                  <adec:decorative xmlns:adec="http://schemas.microsoft.com/office/drawing/2017/decorative" val="1"/>
+                </a:ext>
+              </a:extLst>
+            </p:cNvPr>
+            <p:cNvSpPr/>
+            <p:nvPr>
+              <p:extLst>
+                <p:ext uri="{386F3935-93C4-4BCD-93E2-E3B085C9AB24}">
+                  <p16:designElem xmlns:p16="http://schemas.microsoft.com/office/powerpoint/2015/main" val="1"/>
+                </p:ext>
+              </p:extLst>
+            </p:nvPr>
+          </p:nvSpPr>
+          <p:spPr>
+            <a:xfrm>
+              <a:off x="9181476" y="-8467"/>
+              <a:ext cx="3007349" cy="6866467"/>
+            </a:xfrm>
+            <a:custGeom>
+              <a:avLst/>
+              <a:gdLst/>
+              <a:ahLst/>
+              <a:cxnLst/>
+              <a:rect l="l" t="t" r="r" b="b"/>
+              <a:pathLst>
+                <a:path w="3007349" h="6866467">
+                  <a:moveTo>
+                    <a:pt x="2045532" y="0"/>
+                  </a:moveTo>
+                  <a:lnTo>
+                    <a:pt x="3007349" y="0"/>
+                  </a:lnTo>
+                  <a:lnTo>
+                    <a:pt x="3007349" y="6866467"/>
+                  </a:lnTo>
+                  <a:lnTo>
+                    <a:pt x="0" y="6866467"/>
+                  </a:lnTo>
+                  <a:lnTo>
+                    <a:pt x="2045532" y="0"/>
+                  </a:lnTo>
+                  <a:close/>
+                </a:path>
+              </a:pathLst>
+            </a:custGeom>
+            <a:solidFill>
+              <a:schemeClr val="accent1">
+                <a:alpha val="30000"/>
+              </a:schemeClr>
+            </a:solidFill>
+            <a:ln>
+              <a:noFill/>
+            </a:ln>
+            <a:effectLst/>
+          </p:spPr>
+          <p:style>
+            <a:lnRef idx="1">
+              <a:schemeClr val="accent1"/>
+            </a:lnRef>
+            <a:fillRef idx="3">
+              <a:schemeClr val="accent1"/>
+            </a:fillRef>
+            <a:effectRef idx="2">
+              <a:schemeClr val="accent1"/>
+            </a:effectRef>
+            <a:fontRef idx="minor">
+              <a:schemeClr val="lt1"/>
+            </a:fontRef>
+          </p:style>
+          <p:txBody>
+            <a:bodyPr/>
+            <a:lstStyle/>
+            <a:p>
+              <a:endParaRPr lang="en-US"/>
+            </a:p>
+          </p:txBody>
+        </p:sp>
+        <p:sp>
+          <p:nvSpPr>
+            <p:cNvPr id="5" name="Rectangle 25">
+              <a:extLst>
+                <a:ext uri="{FF2B5EF4-FFF2-40B4-BE49-F238E27FC236}">
+                  <a16:creationId xmlns:a16="http://schemas.microsoft.com/office/drawing/2014/main" id="{F530DC10-6C42-4C45-ACBA-927BBF119E77}"/>
+                </a:ext>
+                <a:ext uri="{C183D7F6-B498-43B3-948B-1728B52AA6E4}">
+                  <adec:decorative xmlns:adec="http://schemas.microsoft.com/office/drawing/2017/decorative" val="1"/>
+                </a:ext>
+              </a:extLst>
+            </p:cNvPr>
+            <p:cNvSpPr/>
+            <p:nvPr>
+              <p:extLst>
+                <p:ext uri="{386F3935-93C4-4BCD-93E2-E3B085C9AB24}">
+                  <p16:designElem xmlns:p16="http://schemas.microsoft.com/office/powerpoint/2015/main" val="1"/>
+                </p:ext>
+              </p:extLst>
+            </p:nvPr>
+          </p:nvSpPr>
+          <p:spPr>
+            <a:xfrm>
+              <a:off x="9603442" y="-8467"/>
+              <a:ext cx="2588558" cy="6866467"/>
+            </a:xfrm>
+            <a:custGeom>
+              <a:avLst/>
+              <a:gdLst/>
+              <a:ahLst/>
+              <a:cxnLst/>
+              <a:rect l="l" t="t" r="r" b="b"/>
+              <a:pathLst>
+                <a:path w="2573311" h="6866467">
+                  <a:moveTo>
+                    <a:pt x="0" y="0"/>
+                  </a:moveTo>
+                  <a:lnTo>
+                    <a:pt x="2573311" y="0"/>
+                  </a:lnTo>
+                  <a:lnTo>
+                    <a:pt x="2573311" y="6866467"/>
+                  </a:lnTo>
+                  <a:lnTo>
+                    <a:pt x="1202336" y="6866467"/>
+                  </a:lnTo>
+                  <a:lnTo>
+                    <a:pt x="0" y="0"/>
+                  </a:lnTo>
+                  <a:close/>
+                </a:path>
+              </a:pathLst>
+            </a:custGeom>
+            <a:solidFill>
+              <a:schemeClr val="accent1">
+                <a:alpha val="20000"/>
+              </a:schemeClr>
+            </a:solidFill>
+            <a:ln>
+              <a:noFill/>
+            </a:ln>
+            <a:effectLst/>
+          </p:spPr>
+          <p:style>
+            <a:lnRef idx="1">
+              <a:schemeClr val="accent1"/>
+            </a:lnRef>
+            <a:fillRef idx="3">
+              <a:schemeClr val="accent1"/>
+            </a:fillRef>
+            <a:effectRef idx="2">
+              <a:schemeClr val="accent1"/>
+            </a:effectRef>
+            <a:fontRef idx="minor">
+              <a:schemeClr val="lt1"/>
+            </a:fontRef>
+          </p:style>
+          <p:txBody>
+            <a:bodyPr/>
+            <a:lstStyle/>
+            <a:p>
+              <a:endParaRPr lang="en-US"/>
+            </a:p>
+          </p:txBody>
+        </p:sp>
+        <p:sp>
+          <p:nvSpPr>
+            <p:cNvPr id="6" name="Isosceles Triangle 5">
+              <a:extLst>
+                <a:ext uri="{FF2B5EF4-FFF2-40B4-BE49-F238E27FC236}">
+                  <a16:creationId xmlns:a16="http://schemas.microsoft.com/office/drawing/2014/main" id="{B475730D-A7DC-19D1-1AC2-6C85CB426DCE}"/>
+                </a:ext>
+                <a:ext uri="{C183D7F6-B498-43B3-948B-1728B52AA6E4}">
+                  <adec:decorative xmlns:adec="http://schemas.microsoft.com/office/drawing/2017/decorative" val="1"/>
+                </a:ext>
+              </a:extLst>
+            </p:cNvPr>
+            <p:cNvSpPr/>
+            <p:nvPr>
+              <p:extLst>
+                <p:ext uri="{386F3935-93C4-4BCD-93E2-E3B085C9AB24}">
+                  <p16:designElem xmlns:p16="http://schemas.microsoft.com/office/powerpoint/2015/main" val="1"/>
+                </p:ext>
+              </p:extLst>
+            </p:nvPr>
+          </p:nvSpPr>
+          <p:spPr>
+            <a:xfrm>
+              <a:off x="8932333" y="3048000"/>
+              <a:ext cx="3259667" cy="3810000"/>
+            </a:xfrm>
+            <a:prstGeom prst="triangle">
+              <a:avLst>
+                <a:gd name="adj" fmla="val 100000"/>
+              </a:avLst>
+            </a:prstGeom>
+            <a:solidFill>
+              <a:schemeClr val="accent2">
+                <a:alpha val="72000"/>
+              </a:schemeClr>
+            </a:solidFill>
+            <a:ln>
+              <a:noFill/>
+            </a:ln>
+            <a:effectLst/>
+          </p:spPr>
+          <p:style>
+            <a:lnRef idx="1">
+              <a:schemeClr val="accent1"/>
+            </a:lnRef>
+            <a:fillRef idx="3">
+              <a:schemeClr val="accent1"/>
+            </a:fillRef>
+            <a:effectRef idx="2">
+              <a:schemeClr val="accent1"/>
+            </a:effectRef>
+            <a:fontRef idx="minor">
+              <a:schemeClr val="lt1"/>
+            </a:fontRef>
+          </p:style>
+          <p:txBody>
+            <a:bodyPr/>
+            <a:lstStyle/>
+            <a:p>
+              <a:endParaRPr lang="en-US"/>
+            </a:p>
+          </p:txBody>
+        </p:sp>
+        <p:sp>
+          <p:nvSpPr>
+            <p:cNvPr id="18" name="Rectangle 27">
+              <a:extLst>
+                <a:ext uri="{FF2B5EF4-FFF2-40B4-BE49-F238E27FC236}">
+                  <a16:creationId xmlns:a16="http://schemas.microsoft.com/office/drawing/2014/main" id="{AC43EF8B-BF2A-2A0D-62BA-20C8D4840B63}"/>
+                </a:ext>
+                <a:ext uri="{C183D7F6-B498-43B3-948B-1728B52AA6E4}">
+                  <adec:decorative xmlns:adec="http://schemas.microsoft.com/office/drawing/2017/decorative" val="1"/>
+                </a:ext>
+              </a:extLst>
+            </p:cNvPr>
+            <p:cNvSpPr/>
+            <p:nvPr>
+              <p:extLst>
+                <p:ext uri="{386F3935-93C4-4BCD-93E2-E3B085C9AB24}">
+                  <p16:designElem xmlns:p16="http://schemas.microsoft.com/office/powerpoint/2015/main" val="1"/>
+                </p:ext>
+              </p:extLst>
+            </p:nvPr>
+          </p:nvSpPr>
+          <p:spPr>
+            <a:xfrm>
+              <a:off x="9334500" y="-8467"/>
+              <a:ext cx="2854326" cy="6866467"/>
+            </a:xfrm>
+            <a:custGeom>
+              <a:avLst/>
+              <a:gdLst/>
+              <a:ahLst/>
+              <a:cxnLst/>
+              <a:rect l="l" t="t" r="r" b="b"/>
+              <a:pathLst>
+                <a:path w="2858013" h="6866467">
+                  <a:moveTo>
+                    <a:pt x="0" y="0"/>
+                  </a:moveTo>
+                  <a:lnTo>
+                    <a:pt x="2858013" y="0"/>
+                  </a:lnTo>
+                  <a:lnTo>
+                    <a:pt x="2858013" y="6866467"/>
+                  </a:lnTo>
+                  <a:lnTo>
+                    <a:pt x="2473942" y="6866467"/>
+                  </a:lnTo>
+                  <a:lnTo>
+                    <a:pt x="0" y="0"/>
+                  </a:lnTo>
+                  <a:close/>
+                </a:path>
+              </a:pathLst>
+            </a:custGeom>
+            <a:solidFill>
+              <a:schemeClr val="accent2">
+                <a:lumMod val="75000"/>
+                <a:alpha val="70000"/>
+              </a:schemeClr>
+            </a:solidFill>
+            <a:ln>
+              <a:noFill/>
+            </a:ln>
+            <a:effectLst/>
+          </p:spPr>
+          <p:style>
+            <a:lnRef idx="1">
+              <a:schemeClr val="accent1"/>
+            </a:lnRef>
+            <a:fillRef idx="3">
+              <a:schemeClr val="accent1"/>
+            </a:fillRef>
+            <a:effectRef idx="2">
+              <a:schemeClr val="accent1"/>
+            </a:effectRef>
+            <a:fontRef idx="minor">
+              <a:schemeClr val="lt1"/>
+            </a:fontRef>
+          </p:style>
+          <p:txBody>
+            <a:bodyPr/>
+            <a:lstStyle/>
+            <a:p>
+              <a:endParaRPr lang="en-US"/>
+            </a:p>
+          </p:txBody>
+        </p:sp>
+        <p:sp>
+          <p:nvSpPr>
+            <p:cNvPr id="20" name="Rectangle 28">
+              <a:extLst>
+                <a:ext uri="{FF2B5EF4-FFF2-40B4-BE49-F238E27FC236}">
+                  <a16:creationId xmlns:a16="http://schemas.microsoft.com/office/drawing/2014/main" id="{B3CBA7B7-E44C-048D-8BF2-9C4E660E755F}"/>
+                </a:ext>
+                <a:ext uri="{C183D7F6-B498-43B3-948B-1728B52AA6E4}">
+                  <adec:decorative xmlns:adec="http://schemas.microsoft.com/office/drawing/2017/decorative" val="1"/>
+                </a:ext>
+              </a:extLst>
+            </p:cNvPr>
+            <p:cNvSpPr/>
+            <p:nvPr>
+              <p:extLst>
+                <p:ext uri="{386F3935-93C4-4BCD-93E2-E3B085C9AB24}">
+                  <p16:designElem xmlns:p16="http://schemas.microsoft.com/office/powerpoint/2015/main" val="1"/>
+                </p:ext>
+              </p:extLst>
+            </p:nvPr>
+          </p:nvSpPr>
+          <p:spPr>
+            <a:xfrm>
+              <a:off x="10898730" y="-8467"/>
+              <a:ext cx="1290094" cy="6866467"/>
+            </a:xfrm>
+            <a:custGeom>
+              <a:avLst/>
+              <a:gdLst/>
+              <a:ahLst/>
+              <a:cxnLst/>
+              <a:rect l="l" t="t" r="r" b="b"/>
+              <a:pathLst>
+                <a:path w="1290094" h="6858000">
+                  <a:moveTo>
+                    <a:pt x="1019735" y="0"/>
+                  </a:moveTo>
+                  <a:lnTo>
+                    <a:pt x="1290094" y="0"/>
+                  </a:lnTo>
+                  <a:lnTo>
+                    <a:pt x="1290094" y="6858000"/>
+                  </a:lnTo>
+                  <a:lnTo>
+                    <a:pt x="0" y="6858000"/>
+                  </a:lnTo>
+                  <a:lnTo>
+                    <a:pt x="1019735" y="0"/>
+                  </a:lnTo>
+                  <a:close/>
+                </a:path>
+              </a:pathLst>
+            </a:custGeom>
+            <a:solidFill>
+              <a:schemeClr val="accent1">
+                <a:lumMod val="60000"/>
+                <a:lumOff val="40000"/>
+                <a:alpha val="70000"/>
+              </a:schemeClr>
+            </a:solidFill>
+            <a:ln>
+              <a:noFill/>
+            </a:ln>
+            <a:effectLst/>
+          </p:spPr>
+          <p:style>
+            <a:lnRef idx="1">
+              <a:schemeClr val="accent1"/>
+            </a:lnRef>
+            <a:fillRef idx="3">
+              <a:schemeClr val="accent1"/>
+            </a:fillRef>
+            <a:effectRef idx="2">
+              <a:schemeClr val="accent1"/>
+            </a:effectRef>
+            <a:fontRef idx="minor">
+              <a:schemeClr val="lt1"/>
+            </a:fontRef>
+          </p:style>
+          <p:txBody>
+            <a:bodyPr/>
+            <a:lstStyle/>
+            <a:p>
+              <a:endParaRPr lang="en-US"/>
+            </a:p>
+          </p:txBody>
+        </p:sp>
+        <p:sp>
+          <p:nvSpPr>
+            <p:cNvPr id="22" name="Rectangle 29">
+              <a:extLst>
+                <a:ext uri="{FF2B5EF4-FFF2-40B4-BE49-F238E27FC236}">
+                  <a16:creationId xmlns:a16="http://schemas.microsoft.com/office/drawing/2014/main" id="{ACB2D5F3-E1B8-13C0-A5EF-81D9142CC58E}"/>
+                </a:ext>
+                <a:ext uri="{C183D7F6-B498-43B3-948B-1728B52AA6E4}">
+                  <adec:decorative xmlns:adec="http://schemas.microsoft.com/office/drawing/2017/decorative" val="1"/>
+                </a:ext>
+              </a:extLst>
+            </p:cNvPr>
+            <p:cNvSpPr/>
+            <p:nvPr>
+              <p:extLst>
+                <p:ext uri="{386F3935-93C4-4BCD-93E2-E3B085C9AB24}">
+                  <p16:designElem xmlns:p16="http://schemas.microsoft.com/office/powerpoint/2015/main" val="1"/>
+                </p:ext>
+              </p:extLst>
+            </p:nvPr>
+          </p:nvSpPr>
+          <p:spPr>
+            <a:xfrm>
+              <a:off x="10938999" y="-8467"/>
+              <a:ext cx="1249825" cy="6866467"/>
+            </a:xfrm>
+            <a:custGeom>
+              <a:avLst/>
+              <a:gdLst/>
+              <a:ahLst/>
+              <a:cxnLst/>
+              <a:rect l="l" t="t" r="r" b="b"/>
+              <a:pathLst>
+                <a:path w="1249825" h="6858000">
+                  <a:moveTo>
+                    <a:pt x="0" y="0"/>
+                  </a:moveTo>
+                  <a:lnTo>
+                    <a:pt x="1249825" y="0"/>
+                  </a:lnTo>
+                  <a:lnTo>
+                    <a:pt x="1249825" y="6858000"/>
+                  </a:lnTo>
+                  <a:lnTo>
+                    <a:pt x="1109382" y="6858000"/>
+                  </a:lnTo>
+                  <a:lnTo>
+                    <a:pt x="0" y="0"/>
+                  </a:lnTo>
+                  <a:close/>
+                </a:path>
+              </a:pathLst>
+            </a:custGeom>
+            <a:solidFill>
+              <a:schemeClr val="accent1">
+                <a:alpha val="65000"/>
+              </a:schemeClr>
+            </a:solidFill>
+            <a:ln>
+              <a:noFill/>
+            </a:ln>
+            <a:effectLst/>
+          </p:spPr>
+          <p:style>
+            <a:lnRef idx="1">
+              <a:schemeClr val="accent1"/>
+            </a:lnRef>
+            <a:fillRef idx="3">
+              <a:schemeClr val="accent1"/>
+            </a:fillRef>
+            <a:effectRef idx="2">
+              <a:schemeClr val="accent1"/>
+            </a:effectRef>
+            <a:fontRef idx="minor">
+              <a:schemeClr val="lt1"/>
+            </a:fontRef>
+          </p:style>
+          <p:txBody>
+            <a:bodyPr/>
+            <a:lstStyle/>
+            <a:p>
+              <a:endParaRPr lang="en-US"/>
+            </a:p>
+          </p:txBody>
+        </p:sp>
+        <p:sp>
+          <p:nvSpPr>
+            <p:cNvPr id="24" name="Isosceles Triangle 23">
+              <a:extLst>
+                <a:ext uri="{FF2B5EF4-FFF2-40B4-BE49-F238E27FC236}">
+                  <a16:creationId xmlns:a16="http://schemas.microsoft.com/office/drawing/2014/main" id="{7D2215D2-0039-5935-6AF4-064552F4EABE}"/>
+                </a:ext>
+                <a:ext uri="{C183D7F6-B498-43B3-948B-1728B52AA6E4}">
+                  <adec:decorative xmlns:adec="http://schemas.microsoft.com/office/drawing/2017/decorative" val="1"/>
+                </a:ext>
+              </a:extLst>
+            </p:cNvPr>
+            <p:cNvSpPr/>
+            <p:nvPr>
+              <p:extLst>
+                <p:ext uri="{386F3935-93C4-4BCD-93E2-E3B085C9AB24}">
+                  <p16:designElem xmlns:p16="http://schemas.microsoft.com/office/powerpoint/2015/main" val="1"/>
+                </p:ext>
+              </p:extLst>
+            </p:nvPr>
+          </p:nvSpPr>
+          <p:spPr>
+            <a:xfrm>
+              <a:off x="10371666" y="3589867"/>
+              <a:ext cx="1817159" cy="3268133"/>
+            </a:xfrm>
+            <a:prstGeom prst="triangle">
+              <a:avLst>
+                <a:gd name="adj" fmla="val 100000"/>
+              </a:avLst>
+            </a:prstGeom>
+            <a:solidFill>
+              <a:schemeClr val="accent1">
+                <a:alpha val="80000"/>
+              </a:schemeClr>
+            </a:solidFill>
+            <a:ln>
+              <a:noFill/>
+            </a:ln>
+            <a:effectLst/>
+          </p:spPr>
+          <p:style>
+            <a:lnRef idx="1">
+              <a:schemeClr val="accent1"/>
+            </a:lnRef>
+            <a:fillRef idx="3">
+              <a:schemeClr val="accent1"/>
+            </a:fillRef>
+            <a:effectRef idx="2">
+              <a:schemeClr val="accent1"/>
+            </a:effectRef>
+            <a:fontRef idx="minor">
+              <a:schemeClr val="lt1"/>
+            </a:fontRef>
+          </p:style>
+          <p:txBody>
+            <a:bodyPr/>
+            <a:lstStyle/>
+            <a:p>
+              <a:endParaRPr lang="en-US"/>
+            </a:p>
+          </p:txBody>
+        </p:sp>
+        <p:sp>
+          <p:nvSpPr>
+            <p:cNvPr id="26" name="Isosceles Triangle 25">
+              <a:extLst>
+                <a:ext uri="{FF2B5EF4-FFF2-40B4-BE49-F238E27FC236}">
+                  <a16:creationId xmlns:a16="http://schemas.microsoft.com/office/drawing/2014/main" id="{A955DC0D-7119-BB1D-F5DF-77F0DDC64370}"/>
+                </a:ext>
+                <a:ext uri="{C183D7F6-B498-43B3-948B-1728B52AA6E4}">
+                  <adec:decorative xmlns:adec="http://schemas.microsoft.com/office/drawing/2017/decorative" val="1"/>
+                </a:ext>
+              </a:extLst>
+            </p:cNvPr>
+            <p:cNvSpPr/>
+            <p:nvPr>
+              <p:extLst>
+                <p:ext uri="{386F3935-93C4-4BCD-93E2-E3B085C9AB24}">
+                  <p16:designElem xmlns:p16="http://schemas.microsoft.com/office/powerpoint/2015/main" val="1"/>
+                </p:ext>
+              </p:extLst>
+            </p:nvPr>
+          </p:nvSpPr>
+          <p:spPr>
+            <a:xfrm rot="10800000">
+              <a:off x="0" y="0"/>
+              <a:ext cx="842596" cy="5666154"/>
+            </a:xfrm>
+            <a:prstGeom prst="triangle">
+              <a:avLst>
+                <a:gd name="adj" fmla="val 100000"/>
+              </a:avLst>
+            </a:prstGeom>
+            <a:solidFill>
+              <a:schemeClr val="accent1">
+                <a:alpha val="85000"/>
+              </a:schemeClr>
+            </a:solidFill>
+            <a:ln>
+              <a:noFill/>
+            </a:ln>
+            <a:effectLst/>
+          </p:spPr>
+          <p:style>
+            <a:lnRef idx="1">
+              <a:schemeClr val="accent1"/>
+            </a:lnRef>
+            <a:fillRef idx="3">
+              <a:schemeClr val="accent1"/>
+            </a:fillRef>
+            <a:effectRef idx="2">
+              <a:schemeClr val="accent1"/>
+            </a:effectRef>
+            <a:fontRef idx="minor">
+              <a:schemeClr val="lt1"/>
+            </a:fontRef>
+          </p:style>
+          <p:txBody>
+            <a:bodyPr/>
+            <a:lstStyle/>
+            <a:p>
+              <a:endParaRPr lang="en-US"/>
+            </a:p>
+          </p:txBody>
+        </p:sp>
+      </p:grpSp>
+      <p:sp useBgFill="1">
+        <p:nvSpPr>
+          <p:cNvPr id="19" name="Rectangle 18">
             <a:extLst>
               <a:ext uri="{FF2B5EF4-FFF2-40B4-BE49-F238E27FC236}">
-                <a16:creationId xmlns:a16="http://schemas.microsoft.com/office/drawing/2014/main" id="{B1101694-D930-0541-90D6-796D9CFC98E6}"/>
+                <a16:creationId xmlns:a16="http://schemas.microsoft.com/office/drawing/2014/main" id="{BD3A0812-D8BA-D7A1-05D4-016B959BC50D}"/>
+              </a:ext>
+              <a:ext uri="{C183D7F6-B498-43B3-948B-1728B52AA6E4}">
+                <adec:decorative xmlns:adec="http://schemas.microsoft.com/office/drawing/2017/decorative" val="1"/>
               </a:ext>
             </a:extLst>
           </p:cNvPr>
-          <p:cNvGraphicFramePr/>
+          <p:cNvSpPr>
+            <a:spLocks noGrp="1" noRot="1" noChangeAspect="1" noMove="1" noResize="1" noEditPoints="1" noAdjustHandles="1" noChangeArrowheads="1" noChangeShapeType="1" noTextEdit="1"/>
+          </p:cNvSpPr>
           <p:nvPr>
             <p:extLst>
-              <p:ext uri="{D42A27DB-BD31-4B8C-83A1-F6EECF244321}">
-                <p14:modId xmlns:p14="http://schemas.microsoft.com/office/powerpoint/2010/main" val="2621704426"/>
+              <p:ext uri="{386F3935-93C4-4BCD-93E2-E3B085C9AB24}">
+                <p16:designElem xmlns:p16="http://schemas.microsoft.com/office/powerpoint/2015/main" val="1"/>
               </p:ext>
             </p:extLst>
           </p:nvPr>
-        </p:nvGraphicFramePr>
-        <p:xfrm>
-          <a:off x="604982" y="3429000"/>
-          <a:ext cx="4918364" cy="3278910"/>
-        </p:xfrm>
-        <a:graphic>
-          <a:graphicData uri="http://schemas.openxmlformats.org/drawingml/2006/chart">
-            <c:chart xmlns:c="http://schemas.openxmlformats.org/drawingml/2006/chart" xmlns:r="http://schemas.openxmlformats.org/officeDocument/2006/relationships" r:id="rId3"/>
-          </a:graphicData>
-        </a:graphic>
-      </p:graphicFrame>
-      <p:graphicFrame>
-        <p:nvGraphicFramePr>
-          <p:cNvPr id="6" name="Chart 5">
+        </p:nvSpPr>
+        <p:spPr>
+          <a:xfrm flipH="1">
+            <a:off x="0" y="0"/>
+            <a:ext cx="12192000" cy="6858000"/>
+          </a:xfrm>
+          <a:prstGeom prst="rect">
+            <a:avLst/>
+          </a:prstGeom>
+          <a:ln>
+            <a:noFill/>
+          </a:ln>
+        </p:spPr>
+        <p:style>
+          <a:lnRef idx="2">
+            <a:schemeClr val="accent1">
+              <a:shade val="50000"/>
+            </a:schemeClr>
+          </a:lnRef>
+          <a:fillRef idx="1">
+            <a:schemeClr val="accent1"/>
+          </a:fillRef>
+          <a:effectRef idx="0">
+            <a:schemeClr val="accent1"/>
+          </a:effectRef>
+          <a:fontRef idx="minor">
+            <a:schemeClr val="lt1"/>
+          </a:fontRef>
+        </p:style>
+        <p:txBody>
+          <a:bodyPr rtlCol="0" anchor="ctr"/>
+          <a:lstStyle/>
+          <a:p>
+            <a:pPr algn="ctr"/>
+            <a:endParaRPr lang="en-US"/>
+          </a:p>
+        </p:txBody>
+      </p:sp>
+      <p:cxnSp>
+        <p:nvCxnSpPr>
+          <p:cNvPr id="21" name="Straight Connector 20">
             <a:extLst>
               <a:ext uri="{FF2B5EF4-FFF2-40B4-BE49-F238E27FC236}">
-                <a16:creationId xmlns:a16="http://schemas.microsoft.com/office/drawing/2014/main" id="{A08E4A76-3143-6853-3FB5-1E7B1A5272B0}"/>
+                <a16:creationId xmlns:a16="http://schemas.microsoft.com/office/drawing/2014/main" id="{6C82BB3C-C8A4-548B-A3DD-08A6A2731E51}"/>
+              </a:ext>
+              <a:ext uri="{C183D7F6-B498-43B3-948B-1728B52AA6E4}">
+                <adec:decorative xmlns:adec="http://schemas.microsoft.com/office/drawing/2017/decorative" val="1"/>
               </a:ext>
             </a:extLst>
           </p:cNvPr>
-          <p:cNvGraphicFramePr/>
+          <p:cNvCxnSpPr>
+            <a:cxnSpLocks noGrp="1" noRot="1" noChangeAspect="1" noMove="1" noResize="1" noEditPoints="1" noAdjustHandles="1" noChangeArrowheads="1" noChangeShapeType="1"/>
+          </p:cNvCxnSpPr>
           <p:nvPr>
             <p:extLst>
-              <p:ext uri="{D42A27DB-BD31-4B8C-83A1-F6EECF244321}">
-                <p14:modId xmlns:p14="http://schemas.microsoft.com/office/powerpoint/2010/main" val="1930677601"/>
+              <p:ext uri="{386F3935-93C4-4BCD-93E2-E3B085C9AB24}">
+                <p16:designElem xmlns:p16="http://schemas.microsoft.com/office/powerpoint/2015/main" val="1"/>
               </p:ext>
             </p:extLst>
           </p:nvPr>
-        </p:nvGraphicFramePr>
-        <p:xfrm>
-          <a:off x="6668654" y="150090"/>
-          <a:ext cx="4918364" cy="3278910"/>
-        </p:xfrm>
-        <a:graphic>
-          <a:graphicData uri="http://schemas.openxmlformats.org/drawingml/2006/chart">
-            <c:chart xmlns:c="http://schemas.openxmlformats.org/drawingml/2006/chart" xmlns:r="http://schemas.openxmlformats.org/officeDocument/2006/relationships" r:id="rId4"/>
-          </a:graphicData>
-        </a:graphic>
-      </p:graphicFrame>
-      <p:graphicFrame>
-        <p:nvGraphicFramePr>
-          <p:cNvPr id="7" name="Chart 6">
+        </p:nvCxnSpPr>
+        <p:spPr>
+          <a:xfrm flipH="1">
+            <a:off x="9524500" y="0"/>
+            <a:ext cx="1219200" cy="6858000"/>
+          </a:xfrm>
+          <a:prstGeom prst="line">
+            <a:avLst/>
+          </a:prstGeom>
+          <a:ln w="9525">
+            <a:solidFill>
+              <a:schemeClr val="accent1">
+                <a:lumMod val="75000"/>
+              </a:schemeClr>
+            </a:solidFill>
+          </a:ln>
+        </p:spPr>
+        <p:style>
+          <a:lnRef idx="2">
+            <a:schemeClr val="accent1"/>
+          </a:lnRef>
+          <a:fillRef idx="0">
+            <a:schemeClr val="accent1"/>
+          </a:fillRef>
+          <a:effectRef idx="1">
+            <a:schemeClr val="accent1"/>
+          </a:effectRef>
+          <a:fontRef idx="minor">
+            <a:schemeClr val="tx1"/>
+          </a:fontRef>
+        </p:style>
+      </p:cxnSp>
+      <p:cxnSp>
+        <p:nvCxnSpPr>
+          <p:cNvPr id="23" name="Straight Connector 22">
             <a:extLst>
               <a:ext uri="{FF2B5EF4-FFF2-40B4-BE49-F238E27FC236}">
-                <a16:creationId xmlns:a16="http://schemas.microsoft.com/office/drawing/2014/main" id="{CB7ED540-1028-E3F9-AD73-DD893C7E2F2E}"/>
+                <a16:creationId xmlns:a16="http://schemas.microsoft.com/office/drawing/2014/main" id="{BE2445F8-9196-EEDB-88F4-5F7FAF013BEE}"/>
+              </a:ext>
+              <a:ext uri="{C183D7F6-B498-43B3-948B-1728B52AA6E4}">
+                <adec:decorative xmlns:adec="http://schemas.microsoft.com/office/drawing/2017/decorative" val="1"/>
               </a:ext>
             </a:extLst>
           </p:cNvPr>
-          <p:cNvGraphicFramePr/>
+          <p:cNvCxnSpPr>
+            <a:cxnSpLocks noGrp="1" noRot="1" noChangeAspect="1" noMove="1" noResize="1" noEditPoints="1" noAdjustHandles="1" noChangeArrowheads="1" noChangeShapeType="1"/>
+          </p:cNvCxnSpPr>
           <p:nvPr>
             <p:extLst>
-              <p:ext uri="{D42A27DB-BD31-4B8C-83A1-F6EECF244321}">
-                <p14:modId xmlns:p14="http://schemas.microsoft.com/office/powerpoint/2010/main" val="1424678726"/>
+              <p:ext uri="{386F3935-93C4-4BCD-93E2-E3B085C9AB24}">
+                <p16:designElem xmlns:p16="http://schemas.microsoft.com/office/powerpoint/2015/main" val="1"/>
               </p:ext>
             </p:extLst>
           </p:nvPr>
-        </p:nvGraphicFramePr>
-        <p:xfrm>
-          <a:off x="6668654" y="3429000"/>
-          <a:ext cx="4918364" cy="3278910"/>
-        </p:xfrm>
-        <a:graphic>
-          <a:graphicData uri="http://schemas.openxmlformats.org/drawingml/2006/chart">
-            <c:chart xmlns:c="http://schemas.openxmlformats.org/drawingml/2006/chart" xmlns:r="http://schemas.openxmlformats.org/officeDocument/2006/relationships" r:id="rId5"/>
-          </a:graphicData>
-        </a:graphic>
-      </p:graphicFrame>
+        </p:nvCxnSpPr>
+        <p:spPr>
+          <a:xfrm>
+            <a:off x="7361267" y="3681413"/>
+            <a:ext cx="4763558" cy="3176587"/>
+          </a:xfrm>
+          <a:prstGeom prst="line">
+            <a:avLst/>
+          </a:prstGeom>
+          <a:ln w="9525">
+            <a:solidFill>
+              <a:schemeClr val="tx1">
+                <a:lumMod val="50000"/>
+                <a:lumOff val="50000"/>
+                <a:alpha val="80000"/>
+              </a:schemeClr>
+            </a:solidFill>
+          </a:ln>
+        </p:spPr>
+        <p:style>
+          <a:lnRef idx="2">
+            <a:schemeClr val="accent1"/>
+          </a:lnRef>
+          <a:fillRef idx="0">
+            <a:schemeClr val="accent1"/>
+          </a:fillRef>
+          <a:effectRef idx="1">
+            <a:schemeClr val="accent1"/>
+          </a:effectRef>
+          <a:fontRef idx="minor">
+            <a:schemeClr val="tx1"/>
+          </a:fontRef>
+        </p:style>
+      </p:cxnSp>
+      <p:sp>
+        <p:nvSpPr>
+          <p:cNvPr id="25" name="Rectangle 23">
+            <a:extLst>
+              <a:ext uri="{FF2B5EF4-FFF2-40B4-BE49-F238E27FC236}">
+                <a16:creationId xmlns:a16="http://schemas.microsoft.com/office/drawing/2014/main" id="{A83878C2-78F3-C688-1B88-E3CF5132DE73}"/>
+              </a:ext>
+              <a:ext uri="{C183D7F6-B498-43B3-948B-1728B52AA6E4}">
+                <adec:decorative xmlns:adec="http://schemas.microsoft.com/office/drawing/2017/decorative" val="1"/>
+              </a:ext>
+            </a:extLst>
+          </p:cNvPr>
+          <p:cNvSpPr>
+            <a:spLocks noGrp="1" noRot="1" noChangeAspect="1" noMove="1" noResize="1" noEditPoints="1" noAdjustHandles="1" noChangeArrowheads="1" noChangeShapeType="1" noTextEdit="1"/>
+          </p:cNvSpPr>
+          <p:nvPr>
+            <p:extLst>
+              <p:ext uri="{386F3935-93C4-4BCD-93E2-E3B085C9AB24}">
+                <p16:designElem xmlns:p16="http://schemas.microsoft.com/office/powerpoint/2015/main" val="1"/>
+              </p:ext>
+            </p:extLst>
+          </p:nvPr>
+        </p:nvSpPr>
+        <p:spPr>
+          <a:xfrm flipH="1">
+            <a:off x="7925887" y="-8467"/>
+            <a:ext cx="3007349" cy="6866467"/>
+          </a:xfrm>
+          <a:custGeom>
+            <a:avLst/>
+            <a:gdLst/>
+            <a:ahLst/>
+            <a:cxnLst/>
+            <a:rect l="l" t="t" r="r" b="b"/>
+            <a:pathLst>
+              <a:path w="3007349" h="6866467">
+                <a:moveTo>
+                  <a:pt x="2045532" y="0"/>
+                </a:moveTo>
+                <a:lnTo>
+                  <a:pt x="3007349" y="0"/>
+                </a:lnTo>
+                <a:lnTo>
+                  <a:pt x="3007349" y="6866467"/>
+                </a:lnTo>
+                <a:lnTo>
+                  <a:pt x="0" y="6866467"/>
+                </a:lnTo>
+                <a:lnTo>
+                  <a:pt x="2045532" y="0"/>
+                </a:lnTo>
+                <a:close/>
+              </a:path>
+            </a:pathLst>
+          </a:custGeom>
+          <a:solidFill>
+            <a:schemeClr val="accent1">
+              <a:alpha val="30000"/>
+            </a:schemeClr>
+          </a:solidFill>
+          <a:ln>
+            <a:noFill/>
+          </a:ln>
+          <a:effectLst/>
+        </p:spPr>
+        <p:style>
+          <a:lnRef idx="1">
+            <a:schemeClr val="accent1"/>
+          </a:lnRef>
+          <a:fillRef idx="3">
+            <a:schemeClr val="accent1"/>
+          </a:fillRef>
+          <a:effectRef idx="2">
+            <a:schemeClr val="accent1"/>
+          </a:effectRef>
+          <a:fontRef idx="minor">
+            <a:schemeClr val="lt1"/>
+          </a:fontRef>
+        </p:style>
+        <p:txBody>
+          <a:bodyPr/>
+          <a:lstStyle/>
+          <a:p>
+            <a:endParaRPr lang="en-US"/>
+          </a:p>
+        </p:txBody>
+      </p:sp>
+      <p:sp>
+        <p:nvSpPr>
+          <p:cNvPr id="27" name="Rectangle 25">
+            <a:extLst>
+              <a:ext uri="{FF2B5EF4-FFF2-40B4-BE49-F238E27FC236}">
+                <a16:creationId xmlns:a16="http://schemas.microsoft.com/office/drawing/2014/main" id="{294831E9-6E53-76AD-D009-D48D51C411D0}"/>
+              </a:ext>
+              <a:ext uri="{C183D7F6-B498-43B3-948B-1728B52AA6E4}">
+                <adec:decorative xmlns:adec="http://schemas.microsoft.com/office/drawing/2017/decorative" val="1"/>
+              </a:ext>
+            </a:extLst>
+          </p:cNvPr>
+          <p:cNvSpPr>
+            <a:spLocks noGrp="1" noRot="1" noChangeAspect="1" noMove="1" noResize="1" noEditPoints="1" noAdjustHandles="1" noChangeArrowheads="1" noChangeShapeType="1" noTextEdit="1"/>
+          </p:cNvSpPr>
+          <p:nvPr>
+            <p:extLst>
+              <p:ext uri="{386F3935-93C4-4BCD-93E2-E3B085C9AB24}">
+                <p16:designElem xmlns:p16="http://schemas.microsoft.com/office/powerpoint/2015/main" val="1"/>
+              </p:ext>
+            </p:extLst>
+          </p:nvPr>
+        </p:nvSpPr>
+        <p:spPr>
+          <a:xfrm flipH="1">
+            <a:off x="7922712" y="-8467"/>
+            <a:ext cx="2588558" cy="6866467"/>
+          </a:xfrm>
+          <a:custGeom>
+            <a:avLst/>
+            <a:gdLst/>
+            <a:ahLst/>
+            <a:cxnLst/>
+            <a:rect l="l" t="t" r="r" b="b"/>
+            <a:pathLst>
+              <a:path w="2573311" h="6866467">
+                <a:moveTo>
+                  <a:pt x="0" y="0"/>
+                </a:moveTo>
+                <a:lnTo>
+                  <a:pt x="2573311" y="0"/>
+                </a:lnTo>
+                <a:lnTo>
+                  <a:pt x="2573311" y="6866467"/>
+                </a:lnTo>
+                <a:lnTo>
+                  <a:pt x="1202336" y="6866467"/>
+                </a:lnTo>
+                <a:lnTo>
+                  <a:pt x="0" y="0"/>
+                </a:lnTo>
+                <a:close/>
+              </a:path>
+            </a:pathLst>
+          </a:custGeom>
+          <a:solidFill>
+            <a:schemeClr val="accent1">
+              <a:alpha val="20000"/>
+            </a:schemeClr>
+          </a:solidFill>
+          <a:ln>
+            <a:noFill/>
+          </a:ln>
+          <a:effectLst/>
+        </p:spPr>
+        <p:style>
+          <a:lnRef idx="1">
+            <a:schemeClr val="accent1"/>
+          </a:lnRef>
+          <a:fillRef idx="3">
+            <a:schemeClr val="accent1"/>
+          </a:fillRef>
+          <a:effectRef idx="2">
+            <a:schemeClr val="accent1"/>
+          </a:effectRef>
+          <a:fontRef idx="minor">
+            <a:schemeClr val="lt1"/>
+          </a:fontRef>
+        </p:style>
+        <p:txBody>
+          <a:bodyPr/>
+          <a:lstStyle/>
+          <a:p>
+            <a:endParaRPr lang="en-US"/>
+          </a:p>
+        </p:txBody>
+      </p:sp>
+      <p:sp>
+        <p:nvSpPr>
+          <p:cNvPr id="29" name="Isosceles Triangle 28">
+            <a:extLst>
+              <a:ext uri="{FF2B5EF4-FFF2-40B4-BE49-F238E27FC236}">
+                <a16:creationId xmlns:a16="http://schemas.microsoft.com/office/drawing/2014/main" id="{CDA579A0-7DE9-9E3A-C2E6-9F6F7B0EC105}"/>
+              </a:ext>
+              <a:ext uri="{C183D7F6-B498-43B3-948B-1728B52AA6E4}">
+                <adec:decorative xmlns:adec="http://schemas.microsoft.com/office/drawing/2017/decorative" val="1"/>
+              </a:ext>
+            </a:extLst>
+          </p:cNvPr>
+          <p:cNvSpPr>
+            <a:spLocks noGrp="1" noRot="1" noChangeAspect="1" noMove="1" noResize="1" noEditPoints="1" noAdjustHandles="1" noChangeArrowheads="1" noChangeShapeType="1" noTextEdit="1"/>
+          </p:cNvSpPr>
+          <p:nvPr>
+            <p:extLst>
+              <p:ext uri="{386F3935-93C4-4BCD-93E2-E3B085C9AB24}">
+                <p16:designElem xmlns:p16="http://schemas.microsoft.com/office/powerpoint/2015/main" val="1"/>
+              </p:ext>
+            </p:extLst>
+          </p:nvPr>
+        </p:nvSpPr>
+        <p:spPr>
+          <a:xfrm flipH="1">
+            <a:off x="7922712" y="3048000"/>
+            <a:ext cx="3259667" cy="3810000"/>
+          </a:xfrm>
+          <a:prstGeom prst="triangle">
+            <a:avLst>
+              <a:gd name="adj" fmla="val 100000"/>
+            </a:avLst>
+          </a:prstGeom>
+          <a:solidFill>
+            <a:schemeClr val="accent2">
+              <a:alpha val="72000"/>
+            </a:schemeClr>
+          </a:solidFill>
+          <a:ln>
+            <a:noFill/>
+          </a:ln>
+          <a:effectLst/>
+        </p:spPr>
+        <p:style>
+          <a:lnRef idx="1">
+            <a:schemeClr val="accent1"/>
+          </a:lnRef>
+          <a:fillRef idx="3">
+            <a:schemeClr val="accent1"/>
+          </a:fillRef>
+          <a:effectRef idx="2">
+            <a:schemeClr val="accent1"/>
+          </a:effectRef>
+          <a:fontRef idx="minor">
+            <a:schemeClr val="lt1"/>
+          </a:fontRef>
+        </p:style>
+        <p:txBody>
+          <a:bodyPr/>
+          <a:lstStyle/>
+          <a:p>
+            <a:endParaRPr lang="en-US"/>
+          </a:p>
+        </p:txBody>
+      </p:sp>
+      <p:sp>
+        <p:nvSpPr>
+          <p:cNvPr id="31" name="Rectangle 27">
+            <a:extLst>
+              <a:ext uri="{FF2B5EF4-FFF2-40B4-BE49-F238E27FC236}">
+                <a16:creationId xmlns:a16="http://schemas.microsoft.com/office/drawing/2014/main" id="{8526AE7A-1B58-668D-D465-90B6A02C16CC}"/>
+              </a:ext>
+              <a:ext uri="{C183D7F6-B498-43B3-948B-1728B52AA6E4}">
+                <adec:decorative xmlns:adec="http://schemas.microsoft.com/office/drawing/2017/decorative" val="1"/>
+              </a:ext>
+            </a:extLst>
+          </p:cNvPr>
+          <p:cNvSpPr>
+            <a:spLocks noGrp="1" noRot="1" noChangeAspect="1" noMove="1" noResize="1" noEditPoints="1" noAdjustHandles="1" noChangeArrowheads="1" noChangeShapeType="1" noTextEdit="1"/>
+          </p:cNvSpPr>
+          <p:nvPr>
+            <p:extLst>
+              <p:ext uri="{386F3935-93C4-4BCD-93E2-E3B085C9AB24}">
+                <p16:designElem xmlns:p16="http://schemas.microsoft.com/office/powerpoint/2015/main" val="1"/>
+              </p:ext>
+            </p:extLst>
+          </p:nvPr>
+        </p:nvSpPr>
+        <p:spPr>
+          <a:xfrm flipH="1">
+            <a:off x="7925886" y="-8467"/>
+            <a:ext cx="2854326" cy="6866467"/>
+          </a:xfrm>
+          <a:custGeom>
+            <a:avLst/>
+            <a:gdLst/>
+            <a:ahLst/>
+            <a:cxnLst/>
+            <a:rect l="l" t="t" r="r" b="b"/>
+            <a:pathLst>
+              <a:path w="2858013" h="6866467">
+                <a:moveTo>
+                  <a:pt x="0" y="0"/>
+                </a:moveTo>
+                <a:lnTo>
+                  <a:pt x="2858013" y="0"/>
+                </a:lnTo>
+                <a:lnTo>
+                  <a:pt x="2858013" y="6866467"/>
+                </a:lnTo>
+                <a:lnTo>
+                  <a:pt x="2473942" y="6866467"/>
+                </a:lnTo>
+                <a:lnTo>
+                  <a:pt x="0" y="0"/>
+                </a:lnTo>
+                <a:close/>
+              </a:path>
+            </a:pathLst>
+          </a:custGeom>
+          <a:solidFill>
+            <a:schemeClr val="accent2">
+              <a:lumMod val="75000"/>
+              <a:alpha val="70000"/>
+            </a:schemeClr>
+          </a:solidFill>
+          <a:ln>
+            <a:noFill/>
+          </a:ln>
+          <a:effectLst/>
+        </p:spPr>
+        <p:style>
+          <a:lnRef idx="1">
+            <a:schemeClr val="accent1"/>
+          </a:lnRef>
+          <a:fillRef idx="3">
+            <a:schemeClr val="accent1"/>
+          </a:fillRef>
+          <a:effectRef idx="2">
+            <a:schemeClr val="accent1"/>
+          </a:effectRef>
+          <a:fontRef idx="minor">
+            <a:schemeClr val="lt1"/>
+          </a:fontRef>
+        </p:style>
+        <p:txBody>
+          <a:bodyPr/>
+          <a:lstStyle/>
+          <a:p>
+            <a:endParaRPr lang="en-US"/>
+          </a:p>
+        </p:txBody>
+      </p:sp>
+      <p:sp>
+        <p:nvSpPr>
+          <p:cNvPr id="33" name="Isosceles Triangle 32">
+            <a:extLst>
+              <a:ext uri="{FF2B5EF4-FFF2-40B4-BE49-F238E27FC236}">
+                <a16:creationId xmlns:a16="http://schemas.microsoft.com/office/drawing/2014/main" id="{D5250754-89F6-1D8F-5634-5A8C656698CC}"/>
+              </a:ext>
+              <a:ext uri="{C183D7F6-B498-43B3-948B-1728B52AA6E4}">
+                <adec:decorative xmlns:adec="http://schemas.microsoft.com/office/drawing/2017/decorative" val="1"/>
+              </a:ext>
+            </a:extLst>
+          </p:cNvPr>
+          <p:cNvSpPr>
+            <a:spLocks noGrp="1" noRot="1" noChangeAspect="1" noMove="1" noResize="1" noEditPoints="1" noAdjustHandles="1" noChangeArrowheads="1" noChangeShapeType="1" noTextEdit="1"/>
+          </p:cNvSpPr>
+          <p:nvPr>
+            <p:extLst>
+              <p:ext uri="{386F3935-93C4-4BCD-93E2-E3B085C9AB24}">
+                <p16:designElem xmlns:p16="http://schemas.microsoft.com/office/powerpoint/2015/main" val="1"/>
+              </p:ext>
+            </p:extLst>
+          </p:nvPr>
+        </p:nvSpPr>
+        <p:spPr>
+          <a:xfrm flipH="1">
+            <a:off x="7925887" y="3589867"/>
+            <a:ext cx="1817159" cy="3268133"/>
+          </a:xfrm>
+          <a:prstGeom prst="triangle">
+            <a:avLst>
+              <a:gd name="adj" fmla="val 100000"/>
+            </a:avLst>
+          </a:prstGeom>
+          <a:solidFill>
+            <a:schemeClr val="accent1">
+              <a:alpha val="80000"/>
+            </a:schemeClr>
+          </a:solidFill>
+          <a:ln>
+            <a:noFill/>
+          </a:ln>
+          <a:effectLst/>
+        </p:spPr>
+        <p:style>
+          <a:lnRef idx="1">
+            <a:schemeClr val="accent1"/>
+          </a:lnRef>
+          <a:fillRef idx="3">
+            <a:schemeClr val="accent1"/>
+          </a:fillRef>
+          <a:effectRef idx="2">
+            <a:schemeClr val="accent1"/>
+          </a:effectRef>
+          <a:fontRef idx="minor">
+            <a:schemeClr val="lt1"/>
+          </a:fontRef>
+        </p:style>
+        <p:txBody>
+          <a:bodyPr/>
+          <a:lstStyle/>
+          <a:p>
+            <a:endParaRPr lang="en-US"/>
+          </a:p>
+        </p:txBody>
+      </p:sp>
+      <p:sp>
+        <p:nvSpPr>
+          <p:cNvPr id="35" name="Freeform: Shape 34">
+            <a:extLst>
+              <a:ext uri="{FF2B5EF4-FFF2-40B4-BE49-F238E27FC236}">
+                <a16:creationId xmlns:a16="http://schemas.microsoft.com/office/drawing/2014/main" id="{2CF9C5EA-C1F8-A908-6C12-55957339A8DE}"/>
+              </a:ext>
+              <a:ext uri="{C183D7F6-B498-43B3-948B-1728B52AA6E4}">
+                <adec:decorative xmlns:adec="http://schemas.microsoft.com/office/drawing/2017/decorative" val="1"/>
+              </a:ext>
+            </a:extLst>
+          </p:cNvPr>
+          <p:cNvSpPr>
+            <a:spLocks noGrp="1" noRot="1" noChangeAspect="1" noMove="1" noResize="1" noEditPoints="1" noAdjustHandles="1" noChangeArrowheads="1" noChangeShapeType="1" noTextEdit="1"/>
+          </p:cNvSpPr>
+          <p:nvPr>
+            <p:extLst>
+              <p:ext uri="{386F3935-93C4-4BCD-93E2-E3B085C9AB24}">
+                <p16:designElem xmlns:p16="http://schemas.microsoft.com/office/powerpoint/2015/main" val="1"/>
+              </p:ext>
+            </p:extLst>
+          </p:nvPr>
+        </p:nvSpPr>
+        <p:spPr>
+          <a:xfrm flipH="1">
+            <a:off x="0" y="-8467"/>
+            <a:ext cx="9175713" cy="6866467"/>
+          </a:xfrm>
+          <a:custGeom>
+            <a:avLst/>
+            <a:gdLst>
+              <a:gd name="connsiteX0" fmla="*/ 0 w 9175713"/>
+              <a:gd name="connsiteY0" fmla="*/ 0 h 6866467"/>
+              <a:gd name="connsiteX1" fmla="*/ 1249825 w 9175713"/>
+              <a:gd name="connsiteY1" fmla="*/ 0 h 6866467"/>
+              <a:gd name="connsiteX2" fmla="*/ 1249825 w 9175713"/>
+              <a:gd name="connsiteY2" fmla="*/ 8467 h 6866467"/>
+              <a:gd name="connsiteX3" fmla="*/ 9175713 w 9175713"/>
+              <a:gd name="connsiteY3" fmla="*/ 8467 h 6866467"/>
+              <a:gd name="connsiteX4" fmla="*/ 9175713 w 9175713"/>
+              <a:gd name="connsiteY4" fmla="*/ 6866467 h 6866467"/>
+              <a:gd name="connsiteX5" fmla="*/ 1249825 w 9175713"/>
+              <a:gd name="connsiteY5" fmla="*/ 6866467 h 6866467"/>
+              <a:gd name="connsiteX6" fmla="*/ 1109382 w 9175713"/>
+              <a:gd name="connsiteY6" fmla="*/ 6866467 h 6866467"/>
+            </a:gdLst>
+            <a:ahLst/>
+            <a:cxnLst>
+              <a:cxn ang="0">
+                <a:pos x="connsiteX0" y="connsiteY0"/>
+              </a:cxn>
+              <a:cxn ang="0">
+                <a:pos x="connsiteX1" y="connsiteY1"/>
+              </a:cxn>
+              <a:cxn ang="0">
+                <a:pos x="connsiteX2" y="connsiteY2"/>
+              </a:cxn>
+              <a:cxn ang="0">
+                <a:pos x="connsiteX3" y="connsiteY3"/>
+              </a:cxn>
+              <a:cxn ang="0">
+                <a:pos x="connsiteX4" y="connsiteY4"/>
+              </a:cxn>
+              <a:cxn ang="0">
+                <a:pos x="connsiteX5" y="connsiteY5"/>
+              </a:cxn>
+              <a:cxn ang="0">
+                <a:pos x="connsiteX6" y="connsiteY6"/>
+              </a:cxn>
+            </a:cxnLst>
+            <a:rect l="l" t="t" r="r" b="b"/>
+            <a:pathLst>
+              <a:path w="9175713" h="6866467">
+                <a:moveTo>
+                  <a:pt x="0" y="0"/>
+                </a:moveTo>
+                <a:lnTo>
+                  <a:pt x="1249825" y="0"/>
+                </a:lnTo>
+                <a:lnTo>
+                  <a:pt x="1249825" y="8467"/>
+                </a:lnTo>
+                <a:lnTo>
+                  <a:pt x="9175713" y="8467"/>
+                </a:lnTo>
+                <a:lnTo>
+                  <a:pt x="9175713" y="6866467"/>
+                </a:lnTo>
+                <a:lnTo>
+                  <a:pt x="1249825" y="6866467"/>
+                </a:lnTo>
+                <a:lnTo>
+                  <a:pt x="1109382" y="6866467"/>
+                </a:lnTo>
+                <a:close/>
+              </a:path>
+            </a:pathLst>
+          </a:custGeom>
+          <a:solidFill>
+            <a:schemeClr val="accent1"/>
+          </a:solidFill>
+          <a:ln>
+            <a:noFill/>
+          </a:ln>
+        </p:spPr>
+        <p:style>
+          <a:lnRef idx="2">
+            <a:schemeClr val="accent1">
+              <a:shade val="50000"/>
+            </a:schemeClr>
+          </a:lnRef>
+          <a:fillRef idx="1">
+            <a:schemeClr val="accent1"/>
+          </a:fillRef>
+          <a:effectRef idx="0">
+            <a:schemeClr val="accent1"/>
+          </a:effectRef>
+          <a:fontRef idx="minor">
+            <a:schemeClr val="lt1"/>
+          </a:fontRef>
+        </p:style>
+        <p:txBody>
+          <a:bodyPr rtlCol="0" anchor="ctr"/>
+          <a:lstStyle/>
+          <a:p>
+            <a:pPr algn="ctr"/>
+            <a:endParaRPr lang="en-US"/>
+          </a:p>
+        </p:txBody>
+      </p:sp>
+      <p:sp>
+        <p:nvSpPr>
+          <p:cNvPr id="2" name="Title 1">
+            <a:extLst>
+              <a:ext uri="{FF2B5EF4-FFF2-40B4-BE49-F238E27FC236}">
+                <a16:creationId xmlns:a16="http://schemas.microsoft.com/office/drawing/2014/main" id="{A2F74DB3-AD0B-B3D1-EB07-9AE9D9DC4B7B}"/>
+              </a:ext>
+            </a:extLst>
+          </p:cNvPr>
+          <p:cNvSpPr>
+            <a:spLocks noGrp="1"/>
+          </p:cNvSpPr>
+          <p:nvPr>
+            <p:ph type="title"/>
+          </p:nvPr>
+        </p:nvSpPr>
+        <p:spPr>
+          <a:xfrm>
+            <a:off x="1554120" y="1020871"/>
+            <a:ext cx="6960759" cy="2849671"/>
+          </a:xfrm>
+        </p:spPr>
+        <p:txBody>
+          <a:bodyPr vert="horz" lIns="91440" tIns="45720" rIns="91440" bIns="45720" rtlCol="0" anchor="b">
+            <a:normAutofit/>
+          </a:bodyPr>
+          <a:lstStyle/>
+          <a:p>
+            <a:pPr>
+              <a:lnSpc>
+                <a:spcPct val="90000"/>
+              </a:lnSpc>
+            </a:pPr>
+            <a:r>
+              <a:rPr lang="pt-PT" sz="6600" dirty="0">
+                <a:solidFill>
+                  <a:srgbClr val="FFFFFF"/>
+                </a:solidFill>
+              </a:rPr>
+              <a:t>T. Resposta</a:t>
+            </a:r>
+            <a:r>
+              <a:rPr lang="en-US" sz="6600" dirty="0">
+                <a:solidFill>
+                  <a:srgbClr val="FFFFFF"/>
+                </a:solidFill>
+              </a:rPr>
+              <a:t> </a:t>
+            </a:r>
+            <a:r>
+              <a:rPr lang="en-US" sz="6600" dirty="0" err="1">
+                <a:solidFill>
+                  <a:srgbClr val="FFFFFF"/>
+                </a:solidFill>
+              </a:rPr>
+              <a:t>por</a:t>
+            </a:r>
+            <a:r>
+              <a:rPr lang="en-US" sz="6600" dirty="0">
+                <a:solidFill>
+                  <a:srgbClr val="FFFFFF"/>
+                </a:solidFill>
+              </a:rPr>
+              <a:t> </a:t>
+            </a:r>
+            <a:r>
+              <a:rPr lang="en-US" sz="6600" dirty="0" err="1">
+                <a:solidFill>
+                  <a:srgbClr val="FFFFFF"/>
+                </a:solidFill>
+              </a:rPr>
+              <a:t>Quantidade</a:t>
+            </a:r>
+            <a:r>
+              <a:rPr lang="en-US" sz="6600" dirty="0">
+                <a:solidFill>
+                  <a:srgbClr val="FFFFFF"/>
+                </a:solidFill>
+              </a:rPr>
+              <a:t> de Logs</a:t>
+            </a:r>
+          </a:p>
+        </p:txBody>
+      </p:sp>
+      <p:sp>
+        <p:nvSpPr>
+          <p:cNvPr id="37" name="Isosceles Triangle 36">
+            <a:extLst>
+              <a:ext uri="{FF2B5EF4-FFF2-40B4-BE49-F238E27FC236}">
+                <a16:creationId xmlns:a16="http://schemas.microsoft.com/office/drawing/2014/main" id="{72E93DB2-4320-9E9E-1BD5-D8FD8633E22A}"/>
+              </a:ext>
+              <a:ext uri="{C183D7F6-B498-43B3-948B-1728B52AA6E4}">
+                <adec:decorative xmlns:adec="http://schemas.microsoft.com/office/drawing/2017/decorative" val="1"/>
+              </a:ext>
+            </a:extLst>
+          </p:cNvPr>
+          <p:cNvSpPr>
+            <a:spLocks noGrp="1" noRot="1" noChangeAspect="1" noMove="1" noResize="1" noEditPoints="1" noAdjustHandles="1" noChangeArrowheads="1" noChangeShapeType="1" noTextEdit="1"/>
+          </p:cNvSpPr>
+          <p:nvPr>
+            <p:extLst>
+              <p:ext uri="{386F3935-93C4-4BCD-93E2-E3B085C9AB24}">
+                <p16:designElem xmlns:p16="http://schemas.microsoft.com/office/powerpoint/2015/main" val="1"/>
+              </p:ext>
+            </p:extLst>
+          </p:nvPr>
+        </p:nvSpPr>
+        <p:spPr>
+          <a:xfrm rot="5400000">
+            <a:off x="992146" y="3271487"/>
+            <a:ext cx="220660" cy="186439"/>
+          </a:xfrm>
+          <a:prstGeom prst="triangle">
+            <a:avLst/>
+          </a:prstGeom>
+          <a:solidFill>
+            <a:srgbClr val="FFFFFF"/>
+          </a:solidFill>
+          <a:ln>
+            <a:noFill/>
+          </a:ln>
+        </p:spPr>
+        <p:style>
+          <a:lnRef idx="2">
+            <a:schemeClr val="accent1">
+              <a:shade val="50000"/>
+            </a:schemeClr>
+          </a:lnRef>
+          <a:fillRef idx="1">
+            <a:schemeClr val="accent1"/>
+          </a:fillRef>
+          <a:effectRef idx="0">
+            <a:schemeClr val="accent1"/>
+          </a:effectRef>
+          <a:fontRef idx="minor">
+            <a:schemeClr val="lt1"/>
+          </a:fontRef>
+        </p:style>
+        <p:txBody>
+          <a:bodyPr rtlCol="0" anchor="ctr"/>
+          <a:lstStyle/>
+          <a:p>
+            <a:pPr algn="ctr"/>
+            <a:endParaRPr lang="en-US"/>
+          </a:p>
+        </p:txBody>
+      </p:sp>
     </p:spTree>
     <p:extLst>
       <p:ext uri="{BB962C8B-B14F-4D97-AF65-F5344CB8AC3E}">
-        <p14:creationId xmlns:p14="http://schemas.microsoft.com/office/powerpoint/2010/main" val="3881569123"/>
-      </p:ext>
-    </p:extLst>
-  </p:cSld>
-  <p:clrMapOvr>
-    <a:masterClrMapping/>
-  </p:clrMapOvr>
-</p:sld>
-</file>
-
-<file path=ppt/slides/slide9.xml><?xml version="1.0" encoding="utf-8"?>
-<p:sld xmlns:a="http://schemas.openxmlformats.org/drawingml/2006/main" xmlns:r="http://schemas.openxmlformats.org/officeDocument/2006/relationships" xmlns:p="http://schemas.openxmlformats.org/presentationml/2006/main">
-  <p:cSld>
-    <p:spTree>
-      <p:nvGrpSpPr>
-        <p:cNvPr id="1" name=""/>
-        <p:cNvGrpSpPr/>
-        <p:nvPr/>
-      </p:nvGrpSpPr>
-      <p:grpSpPr>
-        <a:xfrm>
-          <a:off x="0" y="0"/>
-          <a:ext cx="0" cy="0"/>
-          <a:chOff x="0" y="0"/>
-          <a:chExt cx="0" cy="0"/>
-        </a:xfrm>
-      </p:grpSpPr>
-      <p:graphicFrame>
-        <p:nvGraphicFramePr>
-          <p:cNvPr id="2" name="Chart 1">
-            <a:extLst>
-              <a:ext uri="{FF2B5EF4-FFF2-40B4-BE49-F238E27FC236}">
-                <a16:creationId xmlns:a16="http://schemas.microsoft.com/office/drawing/2014/main" id="{7591DCE1-FDBC-B035-AD2A-BC860B0A6B99}"/>
-              </a:ext>
-            </a:extLst>
-          </p:cNvPr>
-          <p:cNvGraphicFramePr/>
-          <p:nvPr>
-            <p:extLst>
-              <p:ext uri="{D42A27DB-BD31-4B8C-83A1-F6EECF244321}">
-                <p14:modId xmlns:p14="http://schemas.microsoft.com/office/powerpoint/2010/main" val="1648282566"/>
-              </p:ext>
-            </p:extLst>
-          </p:nvPr>
-        </p:nvGraphicFramePr>
-        <p:xfrm>
-          <a:off x="604982" y="150090"/>
-          <a:ext cx="4918364" cy="3278910"/>
-        </p:xfrm>
-        <a:graphic>
-          <a:graphicData uri="http://schemas.openxmlformats.org/drawingml/2006/chart">
-            <c:chart xmlns:c="http://schemas.openxmlformats.org/drawingml/2006/chart" xmlns:r="http://schemas.openxmlformats.org/officeDocument/2006/relationships" r:id="rId2"/>
-          </a:graphicData>
-        </a:graphic>
-      </p:graphicFrame>
-      <p:graphicFrame>
-        <p:nvGraphicFramePr>
-          <p:cNvPr id="4" name="Chart 3">
-            <a:extLst>
-              <a:ext uri="{FF2B5EF4-FFF2-40B4-BE49-F238E27FC236}">
-                <a16:creationId xmlns:a16="http://schemas.microsoft.com/office/drawing/2014/main" id="{E30F73BE-6062-BECB-9D8A-98BCC08F0AA0}"/>
-              </a:ext>
-            </a:extLst>
-          </p:cNvPr>
-          <p:cNvGraphicFramePr/>
-          <p:nvPr>
-            <p:extLst>
-              <p:ext uri="{D42A27DB-BD31-4B8C-83A1-F6EECF244321}">
-                <p14:modId xmlns:p14="http://schemas.microsoft.com/office/powerpoint/2010/main" val="408466376"/>
-              </p:ext>
-            </p:extLst>
-          </p:nvPr>
-        </p:nvGraphicFramePr>
-        <p:xfrm>
-          <a:off x="604982" y="3429000"/>
-          <a:ext cx="4918364" cy="3278910"/>
-        </p:xfrm>
-        <a:graphic>
-          <a:graphicData uri="http://schemas.openxmlformats.org/drawingml/2006/chart">
-            <c:chart xmlns:c="http://schemas.openxmlformats.org/drawingml/2006/chart" xmlns:r="http://schemas.openxmlformats.org/officeDocument/2006/relationships" r:id="rId3"/>
-          </a:graphicData>
-        </a:graphic>
-      </p:graphicFrame>
-      <p:graphicFrame>
-        <p:nvGraphicFramePr>
-          <p:cNvPr id="6" name="Chart 5">
-            <a:extLst>
-              <a:ext uri="{FF2B5EF4-FFF2-40B4-BE49-F238E27FC236}">
-                <a16:creationId xmlns:a16="http://schemas.microsoft.com/office/drawing/2014/main" id="{C0B3D3F9-CDEA-889B-81C8-48566CE79712}"/>
-              </a:ext>
-            </a:extLst>
-          </p:cNvPr>
-          <p:cNvGraphicFramePr/>
-          <p:nvPr>
-            <p:extLst>
-              <p:ext uri="{D42A27DB-BD31-4B8C-83A1-F6EECF244321}">
-                <p14:modId xmlns:p14="http://schemas.microsoft.com/office/powerpoint/2010/main" val="3862442733"/>
-              </p:ext>
-            </p:extLst>
-          </p:nvPr>
-        </p:nvGraphicFramePr>
-        <p:xfrm>
-          <a:off x="6668654" y="150090"/>
-          <a:ext cx="4918364" cy="3278910"/>
-        </p:xfrm>
-        <a:graphic>
-          <a:graphicData uri="http://schemas.openxmlformats.org/drawingml/2006/chart">
-            <c:chart xmlns:c="http://schemas.openxmlformats.org/drawingml/2006/chart" xmlns:r="http://schemas.openxmlformats.org/officeDocument/2006/relationships" r:id="rId4"/>
-          </a:graphicData>
-        </a:graphic>
-      </p:graphicFrame>
-      <p:graphicFrame>
-        <p:nvGraphicFramePr>
-          <p:cNvPr id="7" name="Chart 6">
-            <a:extLst>
-              <a:ext uri="{FF2B5EF4-FFF2-40B4-BE49-F238E27FC236}">
-                <a16:creationId xmlns:a16="http://schemas.microsoft.com/office/drawing/2014/main" id="{7BA64F22-F5BF-BA30-DF84-B3C70C16D047}"/>
-              </a:ext>
-            </a:extLst>
-          </p:cNvPr>
-          <p:cNvGraphicFramePr/>
-          <p:nvPr>
-            <p:extLst>
-              <p:ext uri="{D42A27DB-BD31-4B8C-83A1-F6EECF244321}">
-                <p14:modId xmlns:p14="http://schemas.microsoft.com/office/powerpoint/2010/main" val="2333106123"/>
-              </p:ext>
-            </p:extLst>
-          </p:nvPr>
-        </p:nvGraphicFramePr>
-        <p:xfrm>
-          <a:off x="6668654" y="3429000"/>
-          <a:ext cx="4918364" cy="3278910"/>
-        </p:xfrm>
-        <a:graphic>
-          <a:graphicData uri="http://schemas.openxmlformats.org/drawingml/2006/chart">
-            <c:chart xmlns:c="http://schemas.openxmlformats.org/drawingml/2006/chart" xmlns:r="http://schemas.openxmlformats.org/officeDocument/2006/relationships" r:id="rId5"/>
-          </a:graphicData>
-        </a:graphic>
-      </p:graphicFrame>
-    </p:spTree>
-    <p:extLst>
-      <p:ext uri="{BB962C8B-B14F-4D97-AF65-F5344CB8AC3E}">
-        <p14:creationId xmlns:p14="http://schemas.microsoft.com/office/powerpoint/2010/main" val="4203274677"/>
+        <p14:creationId xmlns:p14="http://schemas.microsoft.com/office/powerpoint/2010/main" val="3910832674"/>
       </p:ext>
     </p:extLst>
   </p:cSld>
@@ -37243,20 +42149,20 @@
 </file>
 
 <file path=customXml/item1.xml><?xml version="1.0" encoding="utf-8"?>
-<p:properties xmlns:p="http://schemas.microsoft.com/office/2006/metadata/properties" xmlns:xsi="http://www.w3.org/2001/XMLSchema-instance" xmlns:pc="http://schemas.microsoft.com/office/infopath/2007/PartnerControls">
-  <documentManagement>
-    <_activity xmlns="ed73cc0d-225c-4cd1-9155-489065828688" xsi:nil="true"/>
-  </documentManagement>
-</p:properties>
-</file>
-
-<file path=customXml/item2.xml><?xml version="1.0" encoding="utf-8"?>
 <?mso-contentType ?>
 <FormTemplates xmlns="http://schemas.microsoft.com/sharepoint/v3/contenttype/forms">
   <Display>DocumentLibraryForm</Display>
   <Edit>DocumentLibraryForm</Edit>
   <New>DocumentLibraryForm</New>
 </FormTemplates>
+</file>
+
+<file path=customXml/item2.xml><?xml version="1.0" encoding="utf-8"?>
+<p:properties xmlns:p="http://schemas.microsoft.com/office/2006/metadata/properties" xmlns:xsi="http://www.w3.org/2001/XMLSchema-instance" xmlns:pc="http://schemas.microsoft.com/office/infopath/2007/PartnerControls">
+  <documentManagement>
+    <_activity xmlns="ed73cc0d-225c-4cd1-9155-489065828688" xsi:nil="true"/>
+  </documentManagement>
+</p:properties>
 </file>
 
 <file path=customXml/item3.xml><?xml version="1.0" encoding="utf-8"?>
@@ -37416,6 +42322,14 @@
 </file>
 
 <file path=customXml/itemProps1.xml><?xml version="1.0" encoding="utf-8"?>
+<ds:datastoreItem xmlns:ds="http://schemas.openxmlformats.org/officeDocument/2006/customXml" ds:itemID="{81D6223F-590C-472C-B53D-D79A82E0BC68}">
+  <ds:schemaRefs>
+    <ds:schemaRef ds:uri="http://schemas.microsoft.com/sharepoint/v3/contenttype/forms"/>
+  </ds:schemaRefs>
+</ds:datastoreItem>
+</file>
+
+<file path=customXml/itemProps2.xml><?xml version="1.0" encoding="utf-8"?>
 <ds:datastoreItem xmlns:ds="http://schemas.openxmlformats.org/officeDocument/2006/customXml" ds:itemID="{D321189C-7AAE-4008-AE16-E100DF0891FA}">
   <ds:schemaRefs>
     <ds:schemaRef ds:uri="http://www.w3.org/XML/1998/namespace"/>
@@ -37427,14 +42341,6 @@
     <ds:schemaRef ds:uri="http://schemas.microsoft.com/office/2006/metadata/properties"/>
     <ds:schemaRef ds:uri="http://purl.org/dc/dcmitype/"/>
     <ds:schemaRef ds:uri="http://purl.org/dc/terms/"/>
-  </ds:schemaRefs>
-</ds:datastoreItem>
-</file>
-
-<file path=customXml/itemProps2.xml><?xml version="1.0" encoding="utf-8"?>
-<ds:datastoreItem xmlns:ds="http://schemas.openxmlformats.org/officeDocument/2006/customXml" ds:itemID="{81D6223F-590C-472C-B53D-D79A82E0BC68}">
-  <ds:schemaRefs>
-    <ds:schemaRef ds:uri="http://schemas.microsoft.com/sharepoint/v3/contenttype/forms"/>
   </ds:schemaRefs>
 </ds:datastoreItem>
 </file>
